--- a/matome/sentence-structure/sentence-structure.pptx
+++ b/matome/sentence-structure/sentence-structure.pptx
@@ -519,7 +519,7 @@
             </a:avLst>
           </a:prstGeom>
           <a:solidFill>
-            <a:srgbClr val="D6E9FA"/>
+            <a:srgbClr val="FFDDE0"/>
           </a:solidFill>
           <a:ln/>
         </p:spPr>
@@ -549,7 +549,7 @@
             <a:r>
               <a:rPr sz="1650" b="1">
                 <a:solidFill>
-                  <a:srgbClr val="1F5F96"/>
+                  <a:srgbClr val="C42B3B"/>
                 </a:solidFill>
                 <a:latin typeface="Noto Sans JP"/>
                 <a:ea typeface="Noto Sans JP"/>
@@ -576,7 +576,7 @@
             </a:avLst>
           </a:prstGeom>
           <a:solidFill>
-            <a:srgbClr val="F0521E"/>
+            <a:srgbClr val="FFE98A"/>
           </a:solidFill>
           <a:ln/>
         </p:spPr>
@@ -606,7 +606,7 @@
             <a:r>
               <a:rPr sz="1650" b="1">
                 <a:solidFill>
-                  <a:srgbClr val="FFFFFF"/>
+                  <a:srgbClr val="7A5A00"/>
                 </a:solidFill>
                 <a:latin typeface="Noto Sans JP"/>
                 <a:ea typeface="Noto Sans JP"/>
@@ -633,7 +633,7 @@
             </a:avLst>
           </a:prstGeom>
           <a:solidFill>
-            <a:srgbClr val="FFD9E2"/>
+            <a:srgbClr val="DDF1C6"/>
           </a:solidFill>
           <a:ln/>
         </p:spPr>
@@ -663,7 +663,7 @@
             <a:r>
               <a:rPr sz="1650" b="1">
                 <a:solidFill>
-                  <a:srgbClr val="B3304F"/>
+                  <a:srgbClr val="3D7A1A"/>
                 </a:solidFill>
                 <a:latin typeface="Noto Sans JP"/>
                 <a:ea typeface="Noto Sans JP"/>
@@ -690,7 +690,7 @@
             </a:avLst>
           </a:prstGeom>
           <a:solidFill>
-            <a:srgbClr val="FFEDB8"/>
+            <a:srgbClr val="FFE0C0"/>
           </a:solidFill>
           <a:ln/>
         </p:spPr>
@@ -720,7 +720,7 @@
             <a:r>
               <a:rPr sz="1650" b="1">
                 <a:solidFill>
-                  <a:srgbClr val="8A5A00"/>
+                  <a:srgbClr val="B65300"/>
                 </a:solidFill>
                 <a:latin typeface="Noto Sans JP"/>
                 <a:ea typeface="Noto Sans JP"/>
@@ -884,8 +884,8 @@
         </p:nvSpPr>
         <p:spPr>
           <a:xfrm>
-            <a:off x="1295400" y="1333500"/>
-            <a:ext cx="1847850" cy="571500"/>
+            <a:off x="1295400" y="1343025"/>
+            <a:ext cx="1847850" cy="495300"/>
           </a:xfrm>
           <a:prstGeom prst="roundRect">
             <a:avLst>
@@ -893,7 +893,7 @@
             </a:avLst>
           </a:prstGeom>
           <a:solidFill>
-            <a:srgbClr val="D3F0E2"/>
+            <a:srgbClr val="D6E9FA"/>
           </a:solidFill>
           <a:ln/>
         </p:spPr>
@@ -906,8 +906,8 @@
         </p:nvSpPr>
         <p:spPr>
           <a:xfrm>
-            <a:off x="1924050" y="1485900"/>
-            <a:ext cx="600075" cy="257175"/>
+            <a:off x="1933575" y="1466850"/>
+            <a:ext cx="581025" cy="238125"/>
           </a:xfrm>
           <a:prstGeom prst="rect">
             <a:avLst/>
@@ -921,9 +921,9 @@
           <a:p>
             <a:pPr algn="ctr"/>
             <a:r>
-              <a:rPr sz="1800" b="1">
+              <a:rPr sz="1650" b="1">
                 <a:solidFill>
-                  <a:srgbClr val="1F7A52"/>
+                  <a:srgbClr val="1F5F96"/>
                 </a:solidFill>
                 <a:latin typeface="Arial"/>
                 <a:ea typeface="Arial"/>
@@ -933,16 +933,40 @@
           </a:p>
         </p:txBody>
       </p:sp>
-      <p:sp>
-        <p:nvSpPr>
-          <p:cNvPr id="8" name=""/>
-          <p:cNvSpPr/>
-          <p:nvPr/>
-        </p:nvSpPr>
-        <p:spPr>
-          <a:xfrm>
-            <a:off x="3257550" y="1333500"/>
-            <a:ext cx="1847850" cy="571500"/>
+      <p:pic>
+        <p:nvPicPr>
+          <p:cNvPr id="8" name="Image 0" descr="黄色いバナナ">    </p:cNvPr>
+          <p:cNvPicPr>
+            <a:picLocks noChangeAspect="1"/>
+          </p:cNvPicPr>
+          <p:nvPr/>
+        </p:nvPicPr>
+        <p:blipFill>
+          <a:blip r:embed="rId1"/>
+          <a:stretch>
+            <a:fillRect/>
+          </a:stretch>
+        </p:blipFill>
+        <p:spPr>
+          <a:xfrm>
+            <a:off x="3895725" y="1295400"/>
+            <a:ext cx="590550" cy="590550"/>
+          </a:xfrm>
+          <a:prstGeom prst="rect">
+            <a:avLst/>
+          </a:prstGeom>
+        </p:spPr>
+      </p:pic>
+      <p:sp>
+        <p:nvSpPr>
+          <p:cNvPr id="9" name=""/>
+          <p:cNvSpPr/>
+          <p:nvPr/>
+        </p:nvSpPr>
+        <p:spPr>
+          <a:xfrm>
+            <a:off x="3257550" y="1943100"/>
+            <a:ext cx="1847850" cy="304800"/>
           </a:xfrm>
           <a:prstGeom prst="roundRect">
             <a:avLst>
@@ -950,21 +974,21 @@
             </a:avLst>
           </a:prstGeom>
           <a:solidFill>
-            <a:srgbClr val="F0521E"/>
-          </a:solidFill>
-          <a:ln/>
-        </p:spPr>
-      </p:sp>
-      <p:sp>
-        <p:nvSpPr>
-          <p:cNvPr id="9" name=""/>
+            <a:srgbClr val="FFE98A"/>
+          </a:solidFill>
+          <a:ln/>
+        </p:spPr>
+      </p:sp>
+      <p:sp>
+        <p:nvSpPr>
+          <p:cNvPr id="10" name=""/>
           <p:cNvSpPr txBox="1"/>
           <p:nvPr/>
         </p:nvSpPr>
         <p:spPr>
           <a:xfrm>
-            <a:off x="3619500" y="1457325"/>
-            <a:ext cx="1133475" cy="333375"/>
+            <a:off x="3733800" y="1981200"/>
+            <a:ext cx="904875" cy="238125"/>
           </a:xfrm>
           <a:prstGeom prst="rect">
             <a:avLst/>
@@ -978,9 +1002,9 @@
           <a:p>
             <a:pPr algn="ctr"/>
             <a:r>
-              <a:rPr sz="1800" b="1">
+              <a:rPr sz="1300" b="1">
                 <a:solidFill>
-                  <a:srgbClr val="FFFFFF"/>
+                  <a:srgbClr val="7A5A00"/>
                 </a:solidFill>
                 <a:latin typeface="Noto Sans JP"/>
                 <a:ea typeface="Noto Sans JP"/>
@@ -990,16 +1014,40 @@
           </a:p>
         </p:txBody>
       </p:sp>
-      <p:sp>
-        <p:nvSpPr>
-          <p:cNvPr id="10" name=""/>
-          <p:cNvSpPr/>
-          <p:nvPr/>
-        </p:nvSpPr>
-        <p:spPr>
-          <a:xfrm>
-            <a:off x="5229225" y="1333500"/>
-            <a:ext cx="1847850" cy="571500"/>
+      <p:pic>
+        <p:nvPicPr>
+          <p:cNvPr id="11" name="Image 1" descr="りんご">    </p:cNvPr>
+          <p:cNvPicPr>
+            <a:picLocks noChangeAspect="1"/>
+          </p:cNvPicPr>
+          <p:nvPr/>
+        </p:nvPicPr>
+        <p:blipFill>
+          <a:blip r:embed="rId2"/>
+          <a:stretch>
+            <a:fillRect/>
+          </a:stretch>
+        </p:blipFill>
+        <p:spPr>
+          <a:xfrm>
+            <a:off x="5857875" y="1295400"/>
+            <a:ext cx="590550" cy="590550"/>
+          </a:xfrm>
+          <a:prstGeom prst="rect">
+            <a:avLst/>
+          </a:prstGeom>
+        </p:spPr>
+      </p:pic>
+      <p:sp>
+        <p:nvSpPr>
+          <p:cNvPr id="12" name=""/>
+          <p:cNvSpPr/>
+          <p:nvPr/>
+        </p:nvSpPr>
+        <p:spPr>
+          <a:xfrm>
+            <a:off x="5229225" y="1943100"/>
+            <a:ext cx="1847850" cy="304800"/>
           </a:xfrm>
           <a:prstGeom prst="roundRect">
             <a:avLst>
@@ -1007,21 +1055,21 @@
             </a:avLst>
           </a:prstGeom>
           <a:solidFill>
-            <a:srgbClr val="D6E9FA"/>
-          </a:solidFill>
-          <a:ln/>
-        </p:spPr>
-      </p:sp>
-      <p:sp>
-        <p:nvSpPr>
-          <p:cNvPr id="11" name=""/>
+            <a:srgbClr val="FFDDE0"/>
+          </a:solidFill>
+          <a:ln/>
+        </p:spPr>
+      </p:sp>
+      <p:sp>
+        <p:nvSpPr>
+          <p:cNvPr id="13" name=""/>
           <p:cNvSpPr txBox="1"/>
           <p:nvPr/>
         </p:nvSpPr>
         <p:spPr>
           <a:xfrm>
-            <a:off x="5715000" y="1457325"/>
-            <a:ext cx="866775" cy="333375"/>
+            <a:off x="5791200" y="1981200"/>
+            <a:ext cx="714375" cy="238125"/>
           </a:xfrm>
           <a:prstGeom prst="rect">
             <a:avLst/>
@@ -1035,9 +1083,9 @@
           <a:p>
             <a:pPr algn="ctr"/>
             <a:r>
-              <a:rPr sz="1800" b="1">
+              <a:rPr sz="1300" b="1">
                 <a:solidFill>
-                  <a:srgbClr val="1F5F96"/>
+                  <a:srgbClr val="C42B3B"/>
                 </a:solidFill>
                 <a:latin typeface="Noto Sans JP"/>
                 <a:ea typeface="Noto Sans JP"/>
@@ -1047,16 +1095,40 @@
           </a:p>
         </p:txBody>
       </p:sp>
-      <p:sp>
-        <p:nvSpPr>
-          <p:cNvPr id="12" name=""/>
-          <p:cNvSpPr/>
-          <p:nvPr/>
-        </p:nvSpPr>
-        <p:spPr>
-          <a:xfrm>
-            <a:off x="7191375" y="1333500"/>
-            <a:ext cx="1847850" cy="571500"/>
+      <p:pic>
+        <p:nvPicPr>
+          <p:cNvPr id="14" name="Image 2" descr="緑のバナナ">    </p:cNvPr>
+          <p:cNvPicPr>
+            <a:picLocks noChangeAspect="1"/>
+          </p:cNvPicPr>
+          <p:nvPr/>
+        </p:nvPicPr>
+        <p:blipFill>
+          <a:blip r:embed="rId3"/>
+          <a:stretch>
+            <a:fillRect/>
+          </a:stretch>
+        </p:blipFill>
+        <p:spPr>
+          <a:xfrm>
+            <a:off x="7820025" y="1295400"/>
+            <a:ext cx="590550" cy="590550"/>
+          </a:xfrm>
+          <a:prstGeom prst="rect">
+            <a:avLst/>
+          </a:prstGeom>
+        </p:spPr>
+      </p:pic>
+      <p:sp>
+        <p:nvSpPr>
+          <p:cNvPr id="15" name=""/>
+          <p:cNvSpPr/>
+          <p:nvPr/>
+        </p:nvSpPr>
+        <p:spPr>
+          <a:xfrm>
+            <a:off x="7191375" y="1943100"/>
+            <a:ext cx="1847850" cy="304800"/>
           </a:xfrm>
           <a:prstGeom prst="roundRect">
             <a:avLst>
@@ -1064,21 +1136,21 @@
             </a:avLst>
           </a:prstGeom>
           <a:solidFill>
-            <a:srgbClr val="FFD9E2"/>
-          </a:solidFill>
-          <a:ln/>
-        </p:spPr>
-      </p:sp>
-      <p:sp>
-        <p:nvSpPr>
-          <p:cNvPr id="13" name=""/>
+            <a:srgbClr val="DDF1C6"/>
+          </a:solidFill>
+          <a:ln/>
+        </p:spPr>
+      </p:sp>
+      <p:sp>
+        <p:nvSpPr>
+          <p:cNvPr id="16" name=""/>
           <p:cNvSpPr txBox="1"/>
           <p:nvPr/>
         </p:nvSpPr>
         <p:spPr>
           <a:xfrm>
-            <a:off x="7686675" y="1457325"/>
-            <a:ext cx="866775" cy="333375"/>
+            <a:off x="7762875" y="1981200"/>
+            <a:ext cx="714375" cy="238125"/>
           </a:xfrm>
           <a:prstGeom prst="rect">
             <a:avLst/>
@@ -1092,9 +1164,9 @@
           <a:p>
             <a:pPr algn="ctr"/>
             <a:r>
-              <a:rPr sz="1800" b="1">
+              <a:rPr sz="1300" b="1">
                 <a:solidFill>
-                  <a:srgbClr val="B3304F"/>
+                  <a:srgbClr val="3D7A1A"/>
                 </a:solidFill>
                 <a:latin typeface="Noto Sans JP"/>
                 <a:ea typeface="Noto Sans JP"/>
@@ -1104,16 +1176,40 @@
           </a:p>
         </p:txBody>
       </p:sp>
-      <p:sp>
-        <p:nvSpPr>
-          <p:cNvPr id="14" name=""/>
-          <p:cNvSpPr/>
-          <p:nvPr/>
-        </p:nvSpPr>
-        <p:spPr>
-          <a:xfrm>
-            <a:off x="9163050" y="1333500"/>
-            <a:ext cx="1847850" cy="571500"/>
+      <p:pic>
+        <p:nvPicPr>
+          <p:cNvPr id="17" name="Image 3" descr="オレンジ">    </p:cNvPr>
+          <p:cNvPicPr>
+            <a:picLocks noChangeAspect="1"/>
+          </p:cNvPicPr>
+          <p:nvPr/>
+        </p:nvPicPr>
+        <p:blipFill>
+          <a:blip r:embed="rId4"/>
+          <a:stretch>
+            <a:fillRect/>
+          </a:stretch>
+        </p:blipFill>
+        <p:spPr>
+          <a:xfrm>
+            <a:off x="9791700" y="1295400"/>
+            <a:ext cx="590550" cy="590550"/>
+          </a:xfrm>
+          <a:prstGeom prst="rect">
+            <a:avLst/>
+          </a:prstGeom>
+        </p:spPr>
+      </p:pic>
+      <p:sp>
+        <p:nvSpPr>
+          <p:cNvPr id="18" name=""/>
+          <p:cNvSpPr/>
+          <p:nvPr/>
+        </p:nvSpPr>
+        <p:spPr>
+          <a:xfrm>
+            <a:off x="9163050" y="1943100"/>
+            <a:ext cx="1847850" cy="304800"/>
           </a:xfrm>
           <a:prstGeom prst="roundRect">
             <a:avLst>
@@ -1121,21 +1217,21 @@
             </a:avLst>
           </a:prstGeom>
           <a:solidFill>
-            <a:srgbClr val="FFEDB8"/>
-          </a:solidFill>
-          <a:ln/>
-        </p:spPr>
-      </p:sp>
-      <p:sp>
-        <p:nvSpPr>
-          <p:cNvPr id="15" name=""/>
+            <a:srgbClr val="FFE0C0"/>
+          </a:solidFill>
+          <a:ln/>
+        </p:spPr>
+      </p:sp>
+      <p:sp>
+        <p:nvSpPr>
+          <p:cNvPr id="19" name=""/>
           <p:cNvSpPr txBox="1"/>
           <p:nvPr/>
         </p:nvSpPr>
         <p:spPr>
           <a:xfrm>
-            <a:off x="9515475" y="1457325"/>
-            <a:ext cx="1133475" cy="333375"/>
+            <a:off x="9629775" y="1981200"/>
+            <a:ext cx="904875" cy="238125"/>
           </a:xfrm>
           <a:prstGeom prst="rect">
             <a:avLst/>
@@ -1149,9 +1245,9 @@
           <a:p>
             <a:pPr algn="ctr"/>
             <a:r>
-              <a:rPr sz="1800" b="1">
+              <a:rPr sz="1300" b="1">
                 <a:solidFill>
-                  <a:srgbClr val="8A5A00"/>
+                  <a:srgbClr val="B65300"/>
                 </a:solidFill>
                 <a:latin typeface="Noto Sans JP"/>
                 <a:ea typeface="Noto Sans JP"/>
@@ -1163,33 +1259,33 @@
       </p:sp>
       <p:sp>
         <p:nvSpPr>
-          <p:cNvPr id="16" name=""/>
-          <p:cNvSpPr/>
-          <p:nvPr/>
-        </p:nvSpPr>
-        <p:spPr>
-          <a:xfrm>
-            <a:off x="762000" y="2333625"/>
+          <p:cNvPr id="20" name=""/>
+          <p:cNvSpPr/>
+          <p:nvPr/>
+        </p:nvSpPr>
+        <p:spPr>
+          <a:xfrm>
+            <a:off x="762000" y="2628900"/>
             <a:ext cx="381000" cy="381000"/>
           </a:xfrm>
           <a:prstGeom prst="ellipse">
             <a:avLst/>
           </a:prstGeom>
           <a:solidFill>
-            <a:srgbClr val="FFE6DC"/>
-          </a:solidFill>
-          <a:ln/>
-        </p:spPr>
-      </p:sp>
-      <p:sp>
-        <p:nvSpPr>
-          <p:cNvPr id="17" name=""/>
+            <a:srgbClr val="EAF2FB"/>
+          </a:solidFill>
+          <a:ln/>
+        </p:spPr>
+      </p:sp>
+      <p:sp>
+        <p:nvSpPr>
+          <p:cNvPr id="21" name=""/>
           <p:cNvSpPr txBox="1"/>
           <p:nvPr/>
         </p:nvSpPr>
         <p:spPr>
           <a:xfrm>
-            <a:off x="723900" y="2419350"/>
+            <a:off x="723900" y="2705100"/>
             <a:ext cx="466725" cy="209550"/>
           </a:xfrm>
           <a:prstGeom prst="rect">
@@ -1206,7 +1302,7 @@
             <a:r>
               <a:rPr sz="1500" b="1">
                 <a:solidFill>
-                  <a:srgbClr val="C23B12"/>
+                  <a:srgbClr val="4B5569"/>
                 </a:solidFill>
                 <a:latin typeface="Arial"/>
                 <a:ea typeface="Arial"/>
@@ -1218,18 +1314,18 @@
       </p:sp>
       <p:sp>
         <p:nvSpPr>
-          <p:cNvPr id="18" name="記入欄"/>
-          <p:cNvSpPr/>
-          <p:nvPr/>
-        </p:nvSpPr>
-        <p:spPr>
-          <a:xfrm>
-            <a:off x="1295400" y="2038350"/>
-            <a:ext cx="1847850" cy="971550"/>
-          </a:xfrm>
-          <a:prstGeom prst="roundRect">
-            <a:avLst>
-              <a:gd name="adj" fmla="val 17647"/>
+          <p:cNvPr id="22" name="記入欄"/>
+          <p:cNvSpPr/>
+          <p:nvPr/>
+        </p:nvSpPr>
+        <p:spPr>
+          <a:xfrm>
+            <a:off x="1295400" y="2362200"/>
+            <a:ext cx="1847850" cy="904875"/>
+          </a:xfrm>
+          <a:prstGeom prst="roundRect">
+            <a:avLst>
+              <a:gd name="adj" fmla="val 18947"/>
             </a:avLst>
           </a:prstGeom>
           <a:solidFill>
@@ -1237,7 +1333,7 @@
           </a:solidFill>
           <a:ln w="19050">
             <a:solidFill>
-              <a:srgbClr val="8FD3B2"/>
+              <a:srgbClr val="9CC6EC"/>
             </a:solidFill>
             <a:prstDash val="dash"/>
           </a:ln>
@@ -1259,18 +1355,18 @@
       </p:sp>
       <p:sp>
         <p:nvSpPr>
-          <p:cNvPr id="19" name="記入欄"/>
-          <p:cNvSpPr/>
-          <p:nvPr/>
-        </p:nvSpPr>
-        <p:spPr>
-          <a:xfrm>
-            <a:off x="3257550" y="2038350"/>
-            <a:ext cx="1847850" cy="971550"/>
-          </a:xfrm>
-          <a:prstGeom prst="roundRect">
-            <a:avLst>
-              <a:gd name="adj" fmla="val 17647"/>
+          <p:cNvPr id="23" name="記入欄"/>
+          <p:cNvSpPr/>
+          <p:nvPr/>
+        </p:nvSpPr>
+        <p:spPr>
+          <a:xfrm>
+            <a:off x="3257550" y="2362200"/>
+            <a:ext cx="1847850" cy="904875"/>
+          </a:xfrm>
+          <a:prstGeom prst="roundRect">
+            <a:avLst>
+              <a:gd name="adj" fmla="val 18947"/>
             </a:avLst>
           </a:prstGeom>
           <a:solidFill>
@@ -1278,7 +1374,7 @@
           </a:solidFill>
           <a:ln w="19050">
             <a:solidFill>
-              <a:srgbClr val="F5A285"/>
+              <a:srgbClr val="EDCB45"/>
             </a:solidFill>
             <a:prstDash val="dash"/>
           </a:ln>
@@ -1300,18 +1396,18 @@
       </p:sp>
       <p:sp>
         <p:nvSpPr>
-          <p:cNvPr id="20" name="記入欄"/>
-          <p:cNvSpPr/>
-          <p:nvPr/>
-        </p:nvSpPr>
-        <p:spPr>
-          <a:xfrm>
-            <a:off x="5229225" y="2038350"/>
-            <a:ext cx="1847850" cy="971550"/>
-          </a:xfrm>
-          <a:prstGeom prst="roundRect">
-            <a:avLst>
-              <a:gd name="adj" fmla="val 17647"/>
+          <p:cNvPr id="24" name="記入欄"/>
+          <p:cNvSpPr/>
+          <p:nvPr/>
+        </p:nvSpPr>
+        <p:spPr>
+          <a:xfrm>
+            <a:off x="5229225" y="2362200"/>
+            <a:ext cx="1847850" cy="904875"/>
+          </a:xfrm>
+          <a:prstGeom prst="roundRect">
+            <a:avLst>
+              <a:gd name="adj" fmla="val 18947"/>
             </a:avLst>
           </a:prstGeom>
           <a:solidFill>
@@ -1319,7 +1415,7 @@
           </a:solidFill>
           <a:ln w="19050">
             <a:solidFill>
-              <a:srgbClr val="9CC6EC"/>
+              <a:srgbClr val="F2A0A8"/>
             </a:solidFill>
             <a:prstDash val="dash"/>
           </a:ln>
@@ -1341,18 +1437,18 @@
       </p:sp>
       <p:sp>
         <p:nvSpPr>
-          <p:cNvPr id="21" name="記入欄"/>
-          <p:cNvSpPr/>
-          <p:nvPr/>
-        </p:nvSpPr>
-        <p:spPr>
-          <a:xfrm>
-            <a:off x="7191375" y="2038350"/>
-            <a:ext cx="1847850" cy="971550"/>
-          </a:xfrm>
-          <a:prstGeom prst="roundRect">
-            <a:avLst>
-              <a:gd name="adj" fmla="val 17647"/>
+          <p:cNvPr id="25" name="記入欄"/>
+          <p:cNvSpPr/>
+          <p:nvPr/>
+        </p:nvSpPr>
+        <p:spPr>
+          <a:xfrm>
+            <a:off x="7191375" y="2362200"/>
+            <a:ext cx="1847850" cy="904875"/>
+          </a:xfrm>
+          <a:prstGeom prst="roundRect">
+            <a:avLst>
+              <a:gd name="adj" fmla="val 18947"/>
             </a:avLst>
           </a:prstGeom>
           <a:solidFill>
@@ -1360,7 +1456,7 @@
           </a:solidFill>
           <a:ln w="19050">
             <a:solidFill>
-              <a:srgbClr val="F2A3B6"/>
+              <a:srgbClr val="A9D77F"/>
             </a:solidFill>
             <a:prstDash val="dash"/>
           </a:ln>
@@ -1382,18 +1478,18 @@
       </p:sp>
       <p:sp>
         <p:nvSpPr>
-          <p:cNvPr id="22" name="記入欄"/>
-          <p:cNvSpPr/>
-          <p:nvPr/>
-        </p:nvSpPr>
-        <p:spPr>
-          <a:xfrm>
-            <a:off x="9163050" y="2038350"/>
-            <a:ext cx="1847850" cy="971550"/>
-          </a:xfrm>
-          <a:prstGeom prst="roundRect">
-            <a:avLst>
-              <a:gd name="adj" fmla="val 17647"/>
+          <p:cNvPr id="26" name="記入欄"/>
+          <p:cNvSpPr/>
+          <p:nvPr/>
+        </p:nvSpPr>
+        <p:spPr>
+          <a:xfrm>
+            <a:off x="9163050" y="2362200"/>
+            <a:ext cx="1847850" cy="904875"/>
+          </a:xfrm>
+          <a:prstGeom prst="roundRect">
+            <a:avLst>
+              <a:gd name="adj" fmla="val 18947"/>
             </a:avLst>
           </a:prstGeom>
           <a:solidFill>
@@ -1401,7 +1497,7 @@
           </a:solidFill>
           <a:ln w="19050">
             <a:solidFill>
-              <a:srgbClr val="EBC864"/>
+              <a:srgbClr val="F5B57A"/>
             </a:solidFill>
             <a:prstDash val="dash"/>
           </a:ln>
@@ -1423,13 +1519,13 @@
       </p:sp>
       <p:sp>
         <p:nvSpPr>
-          <p:cNvPr id="23" name=""/>
+          <p:cNvPr id="27" name=""/>
           <p:cNvSpPr txBox="1"/>
           <p:nvPr/>
         </p:nvSpPr>
         <p:spPr>
           <a:xfrm>
-            <a:off x="10972800" y="2314575"/>
+            <a:off x="10972800" y="2600325"/>
             <a:ext cx="609600" cy="419100"/>
           </a:xfrm>
           <a:prstGeom prst="rect">
@@ -1446,7 +1542,7 @@
             <a:r>
               <a:rPr sz="3000" b="1">
                 <a:solidFill>
-                  <a:srgbClr val="F0521E"/>
+                  <a:srgbClr val="1A2238"/>
                 </a:solidFill>
                 <a:latin typeface="Arial"/>
                 <a:ea typeface="Arial"/>
@@ -1458,33 +1554,33 @@
       </p:sp>
       <p:sp>
         <p:nvSpPr>
-          <p:cNvPr id="24" name=""/>
-          <p:cNvSpPr/>
-          <p:nvPr/>
-        </p:nvSpPr>
-        <p:spPr>
-          <a:xfrm>
-            <a:off x="762000" y="3438525"/>
+          <p:cNvPr id="28" name=""/>
+          <p:cNvSpPr/>
+          <p:nvPr/>
+        </p:nvSpPr>
+        <p:spPr>
+          <a:xfrm>
+            <a:off x="762000" y="3648075"/>
             <a:ext cx="381000" cy="381000"/>
           </a:xfrm>
           <a:prstGeom prst="ellipse">
             <a:avLst/>
           </a:prstGeom>
           <a:solidFill>
-            <a:srgbClr val="FFE6DC"/>
-          </a:solidFill>
-          <a:ln/>
-        </p:spPr>
-      </p:sp>
-      <p:sp>
-        <p:nvSpPr>
-          <p:cNvPr id="25" name=""/>
+            <a:srgbClr val="EAF2FB"/>
+          </a:solidFill>
+          <a:ln/>
+        </p:spPr>
+      </p:sp>
+      <p:sp>
+        <p:nvSpPr>
+          <p:cNvPr id="29" name=""/>
           <p:cNvSpPr txBox="1"/>
           <p:nvPr/>
         </p:nvSpPr>
         <p:spPr>
           <a:xfrm>
-            <a:off x="723900" y="3524250"/>
+            <a:off x="723900" y="3724275"/>
             <a:ext cx="466725" cy="209550"/>
           </a:xfrm>
           <a:prstGeom prst="rect">
@@ -1501,7 +1597,7 @@
             <a:r>
               <a:rPr sz="1500" b="1">
                 <a:solidFill>
-                  <a:srgbClr val="C23B12"/>
+                  <a:srgbClr val="4B5569"/>
                 </a:solidFill>
                 <a:latin typeface="Arial"/>
                 <a:ea typeface="Arial"/>
@@ -1513,18 +1609,18 @@
       </p:sp>
       <p:sp>
         <p:nvSpPr>
-          <p:cNvPr id="26" name="記入欄"/>
-          <p:cNvSpPr/>
-          <p:nvPr/>
-        </p:nvSpPr>
-        <p:spPr>
-          <a:xfrm>
-            <a:off x="1295400" y="3143250"/>
-            <a:ext cx="1847850" cy="971550"/>
-          </a:xfrm>
-          <a:prstGeom prst="roundRect">
-            <a:avLst>
-              <a:gd name="adj" fmla="val 17647"/>
+          <p:cNvPr id="30" name="記入欄"/>
+          <p:cNvSpPr/>
+          <p:nvPr/>
+        </p:nvSpPr>
+        <p:spPr>
+          <a:xfrm>
+            <a:off x="1295400" y="3381375"/>
+            <a:ext cx="1847850" cy="904875"/>
+          </a:xfrm>
+          <a:prstGeom prst="roundRect">
+            <a:avLst>
+              <a:gd name="adj" fmla="val 18947"/>
             </a:avLst>
           </a:prstGeom>
           <a:solidFill>
@@ -1532,7 +1628,7 @@
           </a:solidFill>
           <a:ln w="19050">
             <a:solidFill>
-              <a:srgbClr val="8FD3B2"/>
+              <a:srgbClr val="9CC6EC"/>
             </a:solidFill>
             <a:prstDash val="dash"/>
           </a:ln>
@@ -1554,18 +1650,18 @@
       </p:sp>
       <p:sp>
         <p:nvSpPr>
-          <p:cNvPr id="27" name="記入欄"/>
-          <p:cNvSpPr/>
-          <p:nvPr/>
-        </p:nvSpPr>
-        <p:spPr>
-          <a:xfrm>
-            <a:off x="3257550" y="3143250"/>
-            <a:ext cx="1847850" cy="971550"/>
-          </a:xfrm>
-          <a:prstGeom prst="roundRect">
-            <a:avLst>
-              <a:gd name="adj" fmla="val 17647"/>
+          <p:cNvPr id="31" name="記入欄"/>
+          <p:cNvSpPr/>
+          <p:nvPr/>
+        </p:nvSpPr>
+        <p:spPr>
+          <a:xfrm>
+            <a:off x="3257550" y="3381375"/>
+            <a:ext cx="1847850" cy="904875"/>
+          </a:xfrm>
+          <a:prstGeom prst="roundRect">
+            <a:avLst>
+              <a:gd name="adj" fmla="val 18947"/>
             </a:avLst>
           </a:prstGeom>
           <a:solidFill>
@@ -1573,7 +1669,7 @@
           </a:solidFill>
           <a:ln w="19050">
             <a:solidFill>
-              <a:srgbClr val="F5A285"/>
+              <a:srgbClr val="EDCB45"/>
             </a:solidFill>
             <a:prstDash val="dash"/>
           </a:ln>
@@ -1595,18 +1691,18 @@
       </p:sp>
       <p:sp>
         <p:nvSpPr>
-          <p:cNvPr id="28" name="記入欄"/>
-          <p:cNvSpPr/>
-          <p:nvPr/>
-        </p:nvSpPr>
-        <p:spPr>
-          <a:xfrm>
-            <a:off x="5229225" y="3143250"/>
-            <a:ext cx="1847850" cy="971550"/>
-          </a:xfrm>
-          <a:prstGeom prst="roundRect">
-            <a:avLst>
-              <a:gd name="adj" fmla="val 17647"/>
+          <p:cNvPr id="32" name="記入欄"/>
+          <p:cNvSpPr/>
+          <p:nvPr/>
+        </p:nvSpPr>
+        <p:spPr>
+          <a:xfrm>
+            <a:off x="5229225" y="3381375"/>
+            <a:ext cx="1847850" cy="904875"/>
+          </a:xfrm>
+          <a:prstGeom prst="roundRect">
+            <a:avLst>
+              <a:gd name="adj" fmla="val 18947"/>
             </a:avLst>
           </a:prstGeom>
           <a:solidFill>
@@ -1614,7 +1710,7 @@
           </a:solidFill>
           <a:ln w="19050">
             <a:solidFill>
-              <a:srgbClr val="9CC6EC"/>
+              <a:srgbClr val="F2A0A8"/>
             </a:solidFill>
             <a:prstDash val="dash"/>
           </a:ln>
@@ -1636,18 +1732,18 @@
       </p:sp>
       <p:sp>
         <p:nvSpPr>
-          <p:cNvPr id="29" name="記入欄"/>
-          <p:cNvSpPr/>
-          <p:nvPr/>
-        </p:nvSpPr>
-        <p:spPr>
-          <a:xfrm>
-            <a:off x="7191375" y="3143250"/>
-            <a:ext cx="1847850" cy="971550"/>
-          </a:xfrm>
-          <a:prstGeom prst="roundRect">
-            <a:avLst>
-              <a:gd name="adj" fmla="val 17647"/>
+          <p:cNvPr id="33" name="記入欄"/>
+          <p:cNvSpPr/>
+          <p:nvPr/>
+        </p:nvSpPr>
+        <p:spPr>
+          <a:xfrm>
+            <a:off x="7191375" y="3381375"/>
+            <a:ext cx="1847850" cy="904875"/>
+          </a:xfrm>
+          <a:prstGeom prst="roundRect">
+            <a:avLst>
+              <a:gd name="adj" fmla="val 18947"/>
             </a:avLst>
           </a:prstGeom>
           <a:solidFill>
@@ -1655,7 +1751,7 @@
           </a:solidFill>
           <a:ln w="19050">
             <a:solidFill>
-              <a:srgbClr val="F2A3B6"/>
+              <a:srgbClr val="A9D77F"/>
             </a:solidFill>
             <a:prstDash val="dash"/>
           </a:ln>
@@ -1677,18 +1773,18 @@
       </p:sp>
       <p:sp>
         <p:nvSpPr>
-          <p:cNvPr id="30" name="記入欄"/>
-          <p:cNvSpPr/>
-          <p:nvPr/>
-        </p:nvSpPr>
-        <p:spPr>
-          <a:xfrm>
-            <a:off x="9163050" y="3143250"/>
-            <a:ext cx="1847850" cy="971550"/>
-          </a:xfrm>
-          <a:prstGeom prst="roundRect">
-            <a:avLst>
-              <a:gd name="adj" fmla="val 17647"/>
+          <p:cNvPr id="34" name="記入欄"/>
+          <p:cNvSpPr/>
+          <p:nvPr/>
+        </p:nvSpPr>
+        <p:spPr>
+          <a:xfrm>
+            <a:off x="9163050" y="3381375"/>
+            <a:ext cx="1847850" cy="904875"/>
+          </a:xfrm>
+          <a:prstGeom prst="roundRect">
+            <a:avLst>
+              <a:gd name="adj" fmla="val 18947"/>
             </a:avLst>
           </a:prstGeom>
           <a:solidFill>
@@ -1696,7 +1792,7 @@
           </a:solidFill>
           <a:ln w="19050">
             <a:solidFill>
-              <a:srgbClr val="EBC864"/>
+              <a:srgbClr val="F5B57A"/>
             </a:solidFill>
             <a:prstDash val="dash"/>
           </a:ln>
@@ -1718,13 +1814,13 @@
       </p:sp>
       <p:sp>
         <p:nvSpPr>
-          <p:cNvPr id="31" name=""/>
+          <p:cNvPr id="35" name=""/>
           <p:cNvSpPr txBox="1"/>
           <p:nvPr/>
         </p:nvSpPr>
         <p:spPr>
           <a:xfrm>
-            <a:off x="10972800" y="3419475"/>
+            <a:off x="10972800" y="3619500"/>
             <a:ext cx="609600" cy="419100"/>
           </a:xfrm>
           <a:prstGeom prst="rect">
@@ -1741,7 +1837,7 @@
             <a:r>
               <a:rPr sz="3000" b="1">
                 <a:solidFill>
-                  <a:srgbClr val="F0521E"/>
+                  <a:srgbClr val="1A2238"/>
                 </a:solidFill>
                 <a:latin typeface="Arial"/>
                 <a:ea typeface="Arial"/>
@@ -1753,33 +1849,33 @@
       </p:sp>
       <p:sp>
         <p:nvSpPr>
-          <p:cNvPr id="32" name=""/>
-          <p:cNvSpPr/>
-          <p:nvPr/>
-        </p:nvSpPr>
-        <p:spPr>
-          <a:xfrm>
-            <a:off x="762000" y="4543425"/>
+          <p:cNvPr id="36" name=""/>
+          <p:cNvSpPr/>
+          <p:nvPr/>
+        </p:nvSpPr>
+        <p:spPr>
+          <a:xfrm>
+            <a:off x="762000" y="4667250"/>
             <a:ext cx="381000" cy="381000"/>
           </a:xfrm>
           <a:prstGeom prst="ellipse">
             <a:avLst/>
           </a:prstGeom>
           <a:solidFill>
-            <a:srgbClr val="FFE6DC"/>
-          </a:solidFill>
-          <a:ln/>
-        </p:spPr>
-      </p:sp>
-      <p:sp>
-        <p:nvSpPr>
-          <p:cNvPr id="33" name=""/>
+            <a:srgbClr val="EAF2FB"/>
+          </a:solidFill>
+          <a:ln/>
+        </p:spPr>
+      </p:sp>
+      <p:sp>
+        <p:nvSpPr>
+          <p:cNvPr id="37" name=""/>
           <p:cNvSpPr txBox="1"/>
           <p:nvPr/>
         </p:nvSpPr>
         <p:spPr>
           <a:xfrm>
-            <a:off x="723900" y="4629150"/>
+            <a:off x="723900" y="4743450"/>
             <a:ext cx="466725" cy="209550"/>
           </a:xfrm>
           <a:prstGeom prst="rect">
@@ -1796,7 +1892,7 @@
             <a:r>
               <a:rPr sz="1500" b="1">
                 <a:solidFill>
-                  <a:srgbClr val="C23B12"/>
+                  <a:srgbClr val="4B5569"/>
                 </a:solidFill>
                 <a:latin typeface="Arial"/>
                 <a:ea typeface="Arial"/>
@@ -1808,18 +1904,18 @@
       </p:sp>
       <p:sp>
         <p:nvSpPr>
-          <p:cNvPr id="34" name="記入欄"/>
-          <p:cNvSpPr/>
-          <p:nvPr/>
-        </p:nvSpPr>
-        <p:spPr>
-          <a:xfrm>
-            <a:off x="1295400" y="4248150"/>
-            <a:ext cx="1847850" cy="971550"/>
-          </a:xfrm>
-          <a:prstGeom prst="roundRect">
-            <a:avLst>
-              <a:gd name="adj" fmla="val 17647"/>
+          <p:cNvPr id="38" name="記入欄"/>
+          <p:cNvSpPr/>
+          <p:nvPr/>
+        </p:nvSpPr>
+        <p:spPr>
+          <a:xfrm>
+            <a:off x="1295400" y="4400550"/>
+            <a:ext cx="1847850" cy="904875"/>
+          </a:xfrm>
+          <a:prstGeom prst="roundRect">
+            <a:avLst>
+              <a:gd name="adj" fmla="val 18947"/>
             </a:avLst>
           </a:prstGeom>
           <a:solidFill>
@@ -1827,7 +1923,7 @@
           </a:solidFill>
           <a:ln w="19050">
             <a:solidFill>
-              <a:srgbClr val="8FD3B2"/>
+              <a:srgbClr val="9CC6EC"/>
             </a:solidFill>
             <a:prstDash val="dash"/>
           </a:ln>
@@ -1849,18 +1945,18 @@
       </p:sp>
       <p:sp>
         <p:nvSpPr>
-          <p:cNvPr id="35" name="記入欄"/>
-          <p:cNvSpPr/>
-          <p:nvPr/>
-        </p:nvSpPr>
-        <p:spPr>
-          <a:xfrm>
-            <a:off x="3257550" y="4248150"/>
-            <a:ext cx="1847850" cy="971550"/>
-          </a:xfrm>
-          <a:prstGeom prst="roundRect">
-            <a:avLst>
-              <a:gd name="adj" fmla="val 17647"/>
+          <p:cNvPr id="39" name="記入欄"/>
+          <p:cNvSpPr/>
+          <p:nvPr/>
+        </p:nvSpPr>
+        <p:spPr>
+          <a:xfrm>
+            <a:off x="3257550" y="4400550"/>
+            <a:ext cx="1847850" cy="904875"/>
+          </a:xfrm>
+          <a:prstGeom prst="roundRect">
+            <a:avLst>
+              <a:gd name="adj" fmla="val 18947"/>
             </a:avLst>
           </a:prstGeom>
           <a:solidFill>
@@ -1868,7 +1964,7 @@
           </a:solidFill>
           <a:ln w="19050">
             <a:solidFill>
-              <a:srgbClr val="F5A285"/>
+              <a:srgbClr val="EDCB45"/>
             </a:solidFill>
             <a:prstDash val="dash"/>
           </a:ln>
@@ -1890,18 +1986,18 @@
       </p:sp>
       <p:sp>
         <p:nvSpPr>
-          <p:cNvPr id="36" name="記入欄"/>
-          <p:cNvSpPr/>
-          <p:nvPr/>
-        </p:nvSpPr>
-        <p:spPr>
-          <a:xfrm>
-            <a:off x="5229225" y="4248150"/>
-            <a:ext cx="1847850" cy="971550"/>
-          </a:xfrm>
-          <a:prstGeom prst="roundRect">
-            <a:avLst>
-              <a:gd name="adj" fmla="val 17647"/>
+          <p:cNvPr id="40" name="記入欄"/>
+          <p:cNvSpPr/>
+          <p:nvPr/>
+        </p:nvSpPr>
+        <p:spPr>
+          <a:xfrm>
+            <a:off x="5229225" y="4400550"/>
+            <a:ext cx="1847850" cy="904875"/>
+          </a:xfrm>
+          <a:prstGeom prst="roundRect">
+            <a:avLst>
+              <a:gd name="adj" fmla="val 18947"/>
             </a:avLst>
           </a:prstGeom>
           <a:solidFill>
@@ -1909,7 +2005,7 @@
           </a:solidFill>
           <a:ln w="19050">
             <a:solidFill>
-              <a:srgbClr val="9CC6EC"/>
+              <a:srgbClr val="F2A0A8"/>
             </a:solidFill>
             <a:prstDash val="dash"/>
           </a:ln>
@@ -1931,18 +2027,18 @@
       </p:sp>
       <p:sp>
         <p:nvSpPr>
-          <p:cNvPr id="37" name="記入欄"/>
-          <p:cNvSpPr/>
-          <p:nvPr/>
-        </p:nvSpPr>
-        <p:spPr>
-          <a:xfrm>
-            <a:off x="7191375" y="4248150"/>
-            <a:ext cx="1847850" cy="971550"/>
-          </a:xfrm>
-          <a:prstGeom prst="roundRect">
-            <a:avLst>
-              <a:gd name="adj" fmla="val 17647"/>
+          <p:cNvPr id="41" name="記入欄"/>
+          <p:cNvSpPr/>
+          <p:nvPr/>
+        </p:nvSpPr>
+        <p:spPr>
+          <a:xfrm>
+            <a:off x="7191375" y="4400550"/>
+            <a:ext cx="1847850" cy="904875"/>
+          </a:xfrm>
+          <a:prstGeom prst="roundRect">
+            <a:avLst>
+              <a:gd name="adj" fmla="val 18947"/>
             </a:avLst>
           </a:prstGeom>
           <a:solidFill>
@@ -1950,7 +2046,7 @@
           </a:solidFill>
           <a:ln w="19050">
             <a:solidFill>
-              <a:srgbClr val="F2A3B6"/>
+              <a:srgbClr val="A9D77F"/>
             </a:solidFill>
             <a:prstDash val="dash"/>
           </a:ln>
@@ -1972,18 +2068,18 @@
       </p:sp>
       <p:sp>
         <p:nvSpPr>
-          <p:cNvPr id="38" name="記入欄"/>
-          <p:cNvSpPr/>
-          <p:nvPr/>
-        </p:nvSpPr>
-        <p:spPr>
-          <a:xfrm>
-            <a:off x="9163050" y="4248150"/>
-            <a:ext cx="1847850" cy="971550"/>
-          </a:xfrm>
-          <a:prstGeom prst="roundRect">
-            <a:avLst>
-              <a:gd name="adj" fmla="val 17647"/>
+          <p:cNvPr id="42" name="記入欄"/>
+          <p:cNvSpPr/>
+          <p:nvPr/>
+        </p:nvSpPr>
+        <p:spPr>
+          <a:xfrm>
+            <a:off x="9163050" y="4400550"/>
+            <a:ext cx="1847850" cy="904875"/>
+          </a:xfrm>
+          <a:prstGeom prst="roundRect">
+            <a:avLst>
+              <a:gd name="adj" fmla="val 18947"/>
             </a:avLst>
           </a:prstGeom>
           <a:solidFill>
@@ -1991,7 +2087,7 @@
           </a:solidFill>
           <a:ln w="19050">
             <a:solidFill>
-              <a:srgbClr val="EBC864"/>
+              <a:srgbClr val="F5B57A"/>
             </a:solidFill>
             <a:prstDash val="dash"/>
           </a:ln>
@@ -2013,13 +2109,13 @@
       </p:sp>
       <p:sp>
         <p:nvSpPr>
-          <p:cNvPr id="39" name=""/>
+          <p:cNvPr id="43" name=""/>
           <p:cNvSpPr txBox="1"/>
           <p:nvPr/>
         </p:nvSpPr>
         <p:spPr>
           <a:xfrm>
-            <a:off x="10972800" y="4524375"/>
+            <a:off x="10972800" y="4638675"/>
             <a:ext cx="609600" cy="419100"/>
           </a:xfrm>
           <a:prstGeom prst="rect">
@@ -2036,7 +2132,7 @@
             <a:r>
               <a:rPr sz="3000" b="1">
                 <a:solidFill>
-                  <a:srgbClr val="F0521E"/>
+                  <a:srgbClr val="1A2238"/>
                 </a:solidFill>
                 <a:latin typeface="Arial"/>
                 <a:ea typeface="Arial"/>
@@ -2048,33 +2144,33 @@
       </p:sp>
       <p:sp>
         <p:nvSpPr>
-          <p:cNvPr id="40" name=""/>
-          <p:cNvSpPr/>
-          <p:nvPr/>
-        </p:nvSpPr>
-        <p:spPr>
-          <a:xfrm>
-            <a:off x="762000" y="5648325"/>
+          <p:cNvPr id="44" name=""/>
+          <p:cNvSpPr/>
+          <p:nvPr/>
+        </p:nvSpPr>
+        <p:spPr>
+          <a:xfrm>
+            <a:off x="762000" y="5686425"/>
             <a:ext cx="381000" cy="381000"/>
           </a:xfrm>
           <a:prstGeom prst="ellipse">
             <a:avLst/>
           </a:prstGeom>
           <a:solidFill>
-            <a:srgbClr val="FFE6DC"/>
-          </a:solidFill>
-          <a:ln/>
-        </p:spPr>
-      </p:sp>
-      <p:sp>
-        <p:nvSpPr>
-          <p:cNvPr id="41" name=""/>
+            <a:srgbClr val="EAF2FB"/>
+          </a:solidFill>
+          <a:ln/>
+        </p:spPr>
+      </p:sp>
+      <p:sp>
+        <p:nvSpPr>
+          <p:cNvPr id="45" name=""/>
           <p:cNvSpPr txBox="1"/>
           <p:nvPr/>
         </p:nvSpPr>
         <p:spPr>
           <a:xfrm>
-            <a:off x="723900" y="5734050"/>
+            <a:off x="723900" y="5762625"/>
             <a:ext cx="466725" cy="209550"/>
           </a:xfrm>
           <a:prstGeom prst="rect">
@@ -2091,7 +2187,7 @@
             <a:r>
               <a:rPr sz="1500" b="1">
                 <a:solidFill>
-                  <a:srgbClr val="C23B12"/>
+                  <a:srgbClr val="4B5569"/>
                 </a:solidFill>
                 <a:latin typeface="Arial"/>
                 <a:ea typeface="Arial"/>
@@ -2103,18 +2199,18 @@
       </p:sp>
       <p:sp>
         <p:nvSpPr>
-          <p:cNvPr id="42" name="記入欄"/>
-          <p:cNvSpPr/>
-          <p:nvPr/>
-        </p:nvSpPr>
-        <p:spPr>
-          <a:xfrm>
-            <a:off x="1295400" y="5353050"/>
-            <a:ext cx="1847850" cy="971550"/>
-          </a:xfrm>
-          <a:prstGeom prst="roundRect">
-            <a:avLst>
-              <a:gd name="adj" fmla="val 17647"/>
+          <p:cNvPr id="46" name="記入欄"/>
+          <p:cNvSpPr/>
+          <p:nvPr/>
+        </p:nvSpPr>
+        <p:spPr>
+          <a:xfrm>
+            <a:off x="1295400" y="5419725"/>
+            <a:ext cx="1847850" cy="904875"/>
+          </a:xfrm>
+          <a:prstGeom prst="roundRect">
+            <a:avLst>
+              <a:gd name="adj" fmla="val 18947"/>
             </a:avLst>
           </a:prstGeom>
           <a:solidFill>
@@ -2122,7 +2218,7 @@
           </a:solidFill>
           <a:ln w="19050">
             <a:solidFill>
-              <a:srgbClr val="8FD3B2"/>
+              <a:srgbClr val="9CC6EC"/>
             </a:solidFill>
             <a:prstDash val="dash"/>
           </a:ln>
@@ -2144,18 +2240,18 @@
       </p:sp>
       <p:sp>
         <p:nvSpPr>
-          <p:cNvPr id="43" name="記入欄"/>
-          <p:cNvSpPr/>
-          <p:nvPr/>
-        </p:nvSpPr>
-        <p:spPr>
-          <a:xfrm>
-            <a:off x="3257550" y="5353050"/>
-            <a:ext cx="1847850" cy="971550"/>
-          </a:xfrm>
-          <a:prstGeom prst="roundRect">
-            <a:avLst>
-              <a:gd name="adj" fmla="val 17647"/>
+          <p:cNvPr id="47" name="記入欄"/>
+          <p:cNvSpPr/>
+          <p:nvPr/>
+        </p:nvSpPr>
+        <p:spPr>
+          <a:xfrm>
+            <a:off x="3257550" y="5419725"/>
+            <a:ext cx="1847850" cy="904875"/>
+          </a:xfrm>
+          <a:prstGeom prst="roundRect">
+            <a:avLst>
+              <a:gd name="adj" fmla="val 18947"/>
             </a:avLst>
           </a:prstGeom>
           <a:solidFill>
@@ -2163,7 +2259,7 @@
           </a:solidFill>
           <a:ln w="19050">
             <a:solidFill>
-              <a:srgbClr val="F5A285"/>
+              <a:srgbClr val="EDCB45"/>
             </a:solidFill>
             <a:prstDash val="dash"/>
           </a:ln>
@@ -2185,18 +2281,18 @@
       </p:sp>
       <p:sp>
         <p:nvSpPr>
-          <p:cNvPr id="44" name="記入欄"/>
-          <p:cNvSpPr/>
-          <p:nvPr/>
-        </p:nvSpPr>
-        <p:spPr>
-          <a:xfrm>
-            <a:off x="5229225" y="5353050"/>
-            <a:ext cx="1847850" cy="971550"/>
-          </a:xfrm>
-          <a:prstGeom prst="roundRect">
-            <a:avLst>
-              <a:gd name="adj" fmla="val 17647"/>
+          <p:cNvPr id="48" name="記入欄"/>
+          <p:cNvSpPr/>
+          <p:nvPr/>
+        </p:nvSpPr>
+        <p:spPr>
+          <a:xfrm>
+            <a:off x="5229225" y="5419725"/>
+            <a:ext cx="1847850" cy="904875"/>
+          </a:xfrm>
+          <a:prstGeom prst="roundRect">
+            <a:avLst>
+              <a:gd name="adj" fmla="val 18947"/>
             </a:avLst>
           </a:prstGeom>
           <a:solidFill>
@@ -2204,7 +2300,7 @@
           </a:solidFill>
           <a:ln w="19050">
             <a:solidFill>
-              <a:srgbClr val="9CC6EC"/>
+              <a:srgbClr val="F2A0A8"/>
             </a:solidFill>
             <a:prstDash val="dash"/>
           </a:ln>
@@ -2226,18 +2322,18 @@
       </p:sp>
       <p:sp>
         <p:nvSpPr>
-          <p:cNvPr id="45" name="記入欄"/>
-          <p:cNvSpPr/>
-          <p:nvPr/>
-        </p:nvSpPr>
-        <p:spPr>
-          <a:xfrm>
-            <a:off x="7191375" y="5353050"/>
-            <a:ext cx="1847850" cy="971550"/>
-          </a:xfrm>
-          <a:prstGeom prst="roundRect">
-            <a:avLst>
-              <a:gd name="adj" fmla="val 17647"/>
+          <p:cNvPr id="49" name="記入欄"/>
+          <p:cNvSpPr/>
+          <p:nvPr/>
+        </p:nvSpPr>
+        <p:spPr>
+          <a:xfrm>
+            <a:off x="7191375" y="5419725"/>
+            <a:ext cx="1847850" cy="904875"/>
+          </a:xfrm>
+          <a:prstGeom prst="roundRect">
+            <a:avLst>
+              <a:gd name="adj" fmla="val 18947"/>
             </a:avLst>
           </a:prstGeom>
           <a:solidFill>
@@ -2245,7 +2341,7 @@
           </a:solidFill>
           <a:ln w="19050">
             <a:solidFill>
-              <a:srgbClr val="F2A3B6"/>
+              <a:srgbClr val="A9D77F"/>
             </a:solidFill>
             <a:prstDash val="dash"/>
           </a:ln>
@@ -2267,18 +2363,18 @@
       </p:sp>
       <p:sp>
         <p:nvSpPr>
-          <p:cNvPr id="46" name="記入欄"/>
-          <p:cNvSpPr/>
-          <p:nvPr/>
-        </p:nvSpPr>
-        <p:spPr>
-          <a:xfrm>
-            <a:off x="9163050" y="5353050"/>
-            <a:ext cx="1847850" cy="971550"/>
-          </a:xfrm>
-          <a:prstGeom prst="roundRect">
-            <a:avLst>
-              <a:gd name="adj" fmla="val 17647"/>
+          <p:cNvPr id="50" name="記入欄"/>
+          <p:cNvSpPr/>
+          <p:nvPr/>
+        </p:nvSpPr>
+        <p:spPr>
+          <a:xfrm>
+            <a:off x="9163050" y="5419725"/>
+            <a:ext cx="1847850" cy="904875"/>
+          </a:xfrm>
+          <a:prstGeom prst="roundRect">
+            <a:avLst>
+              <a:gd name="adj" fmla="val 18947"/>
             </a:avLst>
           </a:prstGeom>
           <a:solidFill>
@@ -2286,7 +2382,7 @@
           </a:solidFill>
           <a:ln w="19050">
             <a:solidFill>
-              <a:srgbClr val="EBC864"/>
+              <a:srgbClr val="F5B57A"/>
             </a:solidFill>
             <a:prstDash val="dash"/>
           </a:ln>
@@ -2308,13 +2404,13 @@
       </p:sp>
       <p:sp>
         <p:nvSpPr>
-          <p:cNvPr id="47" name=""/>
+          <p:cNvPr id="51" name=""/>
           <p:cNvSpPr txBox="1"/>
           <p:nvPr/>
         </p:nvSpPr>
         <p:spPr>
           <a:xfrm>
-            <a:off x="10972800" y="5629275"/>
+            <a:off x="10972800" y="5657850"/>
             <a:ext cx="609600" cy="419100"/>
           </a:xfrm>
           <a:prstGeom prst="rect">
@@ -2331,7 +2427,7 @@
             <a:r>
               <a:rPr sz="3000" b="1">
                 <a:solidFill>
-                  <a:srgbClr val="F0521E"/>
+                  <a:srgbClr val="1A2238"/>
                 </a:solidFill>
                 <a:latin typeface="Arial"/>
                 <a:ea typeface="Arial"/>
@@ -2487,16 +2583,40 @@
           </a:p>
         </p:txBody>
       </p:sp>
-      <p:sp>
-        <p:nvSpPr>
-          <p:cNvPr id="6" name=""/>
-          <p:cNvSpPr/>
-          <p:nvPr/>
-        </p:nvSpPr>
-        <p:spPr>
-          <a:xfrm>
-            <a:off x="1295400" y="1333500"/>
-            <a:ext cx="1847850" cy="571500"/>
+      <p:pic>
+        <p:nvPicPr>
+          <p:cNvPr id="6" name="Image 0" descr="りんご">    </p:cNvPr>
+          <p:cNvPicPr>
+            <a:picLocks noChangeAspect="1"/>
+          </p:cNvPicPr>
+          <p:nvPr/>
+        </p:nvPicPr>
+        <p:blipFill>
+          <a:blip r:embed="rId1"/>
+          <a:stretch>
+            <a:fillRect/>
+          </a:stretch>
+        </p:blipFill>
+        <p:spPr>
+          <a:xfrm>
+            <a:off x="1924050" y="1295400"/>
+            <a:ext cx="590550" cy="590550"/>
+          </a:xfrm>
+          <a:prstGeom prst="rect">
+            <a:avLst/>
+          </a:prstGeom>
+        </p:spPr>
+      </p:pic>
+      <p:sp>
+        <p:nvSpPr>
+          <p:cNvPr id="7" name=""/>
+          <p:cNvSpPr/>
+          <p:nvPr/>
+        </p:nvSpPr>
+        <p:spPr>
+          <a:xfrm>
+            <a:off x="1295400" y="1943100"/>
+            <a:ext cx="1847850" cy="304800"/>
           </a:xfrm>
           <a:prstGeom prst="roundRect">
             <a:avLst>
@@ -2504,21 +2624,21 @@
             </a:avLst>
           </a:prstGeom>
           <a:solidFill>
-            <a:srgbClr val="D6E9FA"/>
-          </a:solidFill>
-          <a:ln/>
-        </p:spPr>
-      </p:sp>
-      <p:sp>
-        <p:nvSpPr>
-          <p:cNvPr id="7" name=""/>
+            <a:srgbClr val="FFDDE0"/>
+          </a:solidFill>
+          <a:ln/>
+        </p:spPr>
+      </p:sp>
+      <p:sp>
+        <p:nvSpPr>
+          <p:cNvPr id="8" name=""/>
           <p:cNvSpPr txBox="1"/>
           <p:nvPr/>
         </p:nvSpPr>
         <p:spPr>
           <a:xfrm>
-            <a:off x="1790700" y="1457325"/>
-            <a:ext cx="866775" cy="333375"/>
+            <a:off x="1866900" y="1981200"/>
+            <a:ext cx="714375" cy="238125"/>
           </a:xfrm>
           <a:prstGeom prst="rect">
             <a:avLst/>
@@ -2532,9 +2652,9 @@
           <a:p>
             <a:pPr algn="ctr"/>
             <a:r>
-              <a:rPr sz="1800" b="1">
+              <a:rPr sz="1300" b="1">
                 <a:solidFill>
-                  <a:srgbClr val="1F5F96"/>
+                  <a:srgbClr val="C42B3B"/>
                 </a:solidFill>
                 <a:latin typeface="Noto Sans JP"/>
                 <a:ea typeface="Noto Sans JP"/>
@@ -2544,16 +2664,40 @@
           </a:p>
         </p:txBody>
       </p:sp>
-      <p:sp>
-        <p:nvSpPr>
-          <p:cNvPr id="8" name=""/>
-          <p:cNvSpPr/>
-          <p:nvPr/>
-        </p:nvSpPr>
-        <p:spPr>
-          <a:xfrm>
-            <a:off x="3257550" y="1333500"/>
-            <a:ext cx="1847850" cy="571500"/>
+      <p:pic>
+        <p:nvPicPr>
+          <p:cNvPr id="9" name="Image 1" descr="黄色いバナナ">    </p:cNvPr>
+          <p:cNvPicPr>
+            <a:picLocks noChangeAspect="1"/>
+          </p:cNvPicPr>
+          <p:nvPr/>
+        </p:nvPicPr>
+        <p:blipFill>
+          <a:blip r:embed="rId2"/>
+          <a:stretch>
+            <a:fillRect/>
+          </a:stretch>
+        </p:blipFill>
+        <p:spPr>
+          <a:xfrm>
+            <a:off x="3895725" y="1295400"/>
+            <a:ext cx="590550" cy="590550"/>
+          </a:xfrm>
+          <a:prstGeom prst="rect">
+            <a:avLst/>
+          </a:prstGeom>
+        </p:spPr>
+      </p:pic>
+      <p:sp>
+        <p:nvSpPr>
+          <p:cNvPr id="10" name=""/>
+          <p:cNvSpPr/>
+          <p:nvPr/>
+        </p:nvSpPr>
+        <p:spPr>
+          <a:xfrm>
+            <a:off x="3257550" y="1943100"/>
+            <a:ext cx="1847850" cy="304800"/>
           </a:xfrm>
           <a:prstGeom prst="roundRect">
             <a:avLst>
@@ -2561,21 +2705,21 @@
             </a:avLst>
           </a:prstGeom>
           <a:solidFill>
-            <a:srgbClr val="F0521E"/>
-          </a:solidFill>
-          <a:ln/>
-        </p:spPr>
-      </p:sp>
-      <p:sp>
-        <p:nvSpPr>
-          <p:cNvPr id="9" name=""/>
+            <a:srgbClr val="FFE98A"/>
+          </a:solidFill>
+          <a:ln/>
+        </p:spPr>
+      </p:sp>
+      <p:sp>
+        <p:nvSpPr>
+          <p:cNvPr id="11" name=""/>
           <p:cNvSpPr txBox="1"/>
           <p:nvPr/>
         </p:nvSpPr>
         <p:spPr>
           <a:xfrm>
-            <a:off x="3619500" y="1457325"/>
-            <a:ext cx="1133475" cy="333375"/>
+            <a:off x="3733800" y="1981200"/>
+            <a:ext cx="904875" cy="238125"/>
           </a:xfrm>
           <a:prstGeom prst="rect">
             <a:avLst/>
@@ -2589,9 +2733,9 @@
           <a:p>
             <a:pPr algn="ctr"/>
             <a:r>
-              <a:rPr sz="1800" b="1">
+              <a:rPr sz="1300" b="1">
                 <a:solidFill>
-                  <a:srgbClr val="FFFFFF"/>
+                  <a:srgbClr val="7A5A00"/>
                 </a:solidFill>
                 <a:latin typeface="Noto Sans JP"/>
                 <a:ea typeface="Noto Sans JP"/>
@@ -2603,14 +2747,14 @@
       </p:sp>
       <p:sp>
         <p:nvSpPr>
-          <p:cNvPr id="10" name=""/>
-          <p:cNvSpPr/>
-          <p:nvPr/>
-        </p:nvSpPr>
-        <p:spPr>
-          <a:xfrm>
-            <a:off x="5229225" y="1333500"/>
-            <a:ext cx="1847850" cy="571500"/>
+          <p:cNvPr id="12" name=""/>
+          <p:cNvSpPr/>
+          <p:nvPr/>
+        </p:nvSpPr>
+        <p:spPr>
+          <a:xfrm>
+            <a:off x="5229225" y="1343025"/>
+            <a:ext cx="1847850" cy="495300"/>
           </a:xfrm>
           <a:prstGeom prst="roundRect">
             <a:avLst>
@@ -2625,14 +2769,14 @@
       </p:sp>
       <p:sp>
         <p:nvSpPr>
-          <p:cNvPr id="11" name=""/>
+          <p:cNvPr id="13" name=""/>
           <p:cNvSpPr txBox="1"/>
           <p:nvPr/>
         </p:nvSpPr>
         <p:spPr>
           <a:xfrm>
-            <a:off x="5686425" y="1485900"/>
-            <a:ext cx="933450" cy="257175"/>
+            <a:off x="5715000" y="1466850"/>
+            <a:ext cx="876300" cy="238125"/>
           </a:xfrm>
           <a:prstGeom prst="rect">
             <a:avLst/>
@@ -2646,7 +2790,7 @@
           <a:p>
             <a:pPr algn="ctr"/>
             <a:r>
-              <a:rPr sz="1800" b="1">
+              <a:rPr sz="1650" b="1">
                 <a:solidFill>
                   <a:srgbClr val="FFFFFF"/>
                 </a:solidFill>
@@ -2658,16 +2802,40 @@
           </a:p>
         </p:txBody>
       </p:sp>
-      <p:sp>
-        <p:nvSpPr>
-          <p:cNvPr id="12" name=""/>
-          <p:cNvSpPr/>
-          <p:nvPr/>
-        </p:nvSpPr>
-        <p:spPr>
-          <a:xfrm>
-            <a:off x="7191375" y="1333500"/>
-            <a:ext cx="1847850" cy="571500"/>
+      <p:pic>
+        <p:nvPicPr>
+          <p:cNvPr id="14" name="Image 2" descr="緑のバナナ">    </p:cNvPr>
+          <p:cNvPicPr>
+            <a:picLocks noChangeAspect="1"/>
+          </p:cNvPicPr>
+          <p:nvPr/>
+        </p:nvPicPr>
+        <p:blipFill>
+          <a:blip r:embed="rId3"/>
+          <a:stretch>
+            <a:fillRect/>
+          </a:stretch>
+        </p:blipFill>
+        <p:spPr>
+          <a:xfrm>
+            <a:off x="7820025" y="1295400"/>
+            <a:ext cx="590550" cy="590550"/>
+          </a:xfrm>
+          <a:prstGeom prst="rect">
+            <a:avLst/>
+          </a:prstGeom>
+        </p:spPr>
+      </p:pic>
+      <p:sp>
+        <p:nvSpPr>
+          <p:cNvPr id="15" name=""/>
+          <p:cNvSpPr/>
+          <p:nvPr/>
+        </p:nvSpPr>
+        <p:spPr>
+          <a:xfrm>
+            <a:off x="7191375" y="1943100"/>
+            <a:ext cx="1847850" cy="304800"/>
           </a:xfrm>
           <a:prstGeom prst="roundRect">
             <a:avLst>
@@ -2675,21 +2843,21 @@
             </a:avLst>
           </a:prstGeom>
           <a:solidFill>
-            <a:srgbClr val="FFD9E2"/>
-          </a:solidFill>
-          <a:ln/>
-        </p:spPr>
-      </p:sp>
-      <p:sp>
-        <p:nvSpPr>
-          <p:cNvPr id="13" name=""/>
+            <a:srgbClr val="DDF1C6"/>
+          </a:solidFill>
+          <a:ln/>
+        </p:spPr>
+      </p:sp>
+      <p:sp>
+        <p:nvSpPr>
+          <p:cNvPr id="16" name=""/>
           <p:cNvSpPr txBox="1"/>
           <p:nvPr/>
         </p:nvSpPr>
         <p:spPr>
           <a:xfrm>
-            <a:off x="7686675" y="1457325"/>
-            <a:ext cx="866775" cy="333375"/>
+            <a:off x="7762875" y="1981200"/>
+            <a:ext cx="714375" cy="238125"/>
           </a:xfrm>
           <a:prstGeom prst="rect">
             <a:avLst/>
@@ -2703,9 +2871,9 @@
           <a:p>
             <a:pPr algn="ctr"/>
             <a:r>
-              <a:rPr sz="1800" b="1">
+              <a:rPr sz="1300" b="1">
                 <a:solidFill>
-                  <a:srgbClr val="B3304F"/>
+                  <a:srgbClr val="3D7A1A"/>
                 </a:solidFill>
                 <a:latin typeface="Noto Sans JP"/>
                 <a:ea typeface="Noto Sans JP"/>
@@ -2715,16 +2883,40 @@
           </a:p>
         </p:txBody>
       </p:sp>
-      <p:sp>
-        <p:nvSpPr>
-          <p:cNvPr id="14" name=""/>
-          <p:cNvSpPr/>
-          <p:nvPr/>
-        </p:nvSpPr>
-        <p:spPr>
-          <a:xfrm>
-            <a:off x="9163050" y="1333500"/>
-            <a:ext cx="1847850" cy="571500"/>
+      <p:pic>
+        <p:nvPicPr>
+          <p:cNvPr id="17" name="Image 3" descr="オレンジ">    </p:cNvPr>
+          <p:cNvPicPr>
+            <a:picLocks noChangeAspect="1"/>
+          </p:cNvPicPr>
+          <p:nvPr/>
+        </p:nvPicPr>
+        <p:blipFill>
+          <a:blip r:embed="rId4"/>
+          <a:stretch>
+            <a:fillRect/>
+          </a:stretch>
+        </p:blipFill>
+        <p:spPr>
+          <a:xfrm>
+            <a:off x="9791700" y="1295400"/>
+            <a:ext cx="590550" cy="590550"/>
+          </a:xfrm>
+          <a:prstGeom prst="rect">
+            <a:avLst/>
+          </a:prstGeom>
+        </p:spPr>
+      </p:pic>
+      <p:sp>
+        <p:nvSpPr>
+          <p:cNvPr id="18" name=""/>
+          <p:cNvSpPr/>
+          <p:nvPr/>
+        </p:nvSpPr>
+        <p:spPr>
+          <a:xfrm>
+            <a:off x="9163050" y="1943100"/>
+            <a:ext cx="1847850" cy="304800"/>
           </a:xfrm>
           <a:prstGeom prst="roundRect">
             <a:avLst>
@@ -2732,21 +2924,21 @@
             </a:avLst>
           </a:prstGeom>
           <a:solidFill>
-            <a:srgbClr val="FFEDB8"/>
-          </a:solidFill>
-          <a:ln/>
-        </p:spPr>
-      </p:sp>
-      <p:sp>
-        <p:nvSpPr>
-          <p:cNvPr id="15" name=""/>
+            <a:srgbClr val="FFE0C0"/>
+          </a:solidFill>
+          <a:ln/>
+        </p:spPr>
+      </p:sp>
+      <p:sp>
+        <p:nvSpPr>
+          <p:cNvPr id="19" name=""/>
           <p:cNvSpPr txBox="1"/>
           <p:nvPr/>
         </p:nvSpPr>
         <p:spPr>
           <a:xfrm>
-            <a:off x="9515475" y="1457325"/>
-            <a:ext cx="1133475" cy="333375"/>
+            <a:off x="9629775" y="1981200"/>
+            <a:ext cx="904875" cy="238125"/>
           </a:xfrm>
           <a:prstGeom prst="rect">
             <a:avLst/>
@@ -2760,9 +2952,9 @@
           <a:p>
             <a:pPr algn="ctr"/>
             <a:r>
-              <a:rPr sz="1800" b="1">
+              <a:rPr sz="1300" b="1">
                 <a:solidFill>
-                  <a:srgbClr val="8A5A00"/>
+                  <a:srgbClr val="B65300"/>
                 </a:solidFill>
                 <a:latin typeface="Noto Sans JP"/>
                 <a:ea typeface="Noto Sans JP"/>
@@ -2774,33 +2966,33 @@
       </p:sp>
       <p:sp>
         <p:nvSpPr>
-          <p:cNvPr id="16" name=""/>
-          <p:cNvSpPr/>
-          <p:nvPr/>
-        </p:nvSpPr>
-        <p:spPr>
-          <a:xfrm>
-            <a:off x="762000" y="2333625"/>
+          <p:cNvPr id="20" name=""/>
+          <p:cNvSpPr/>
+          <p:nvPr/>
+        </p:nvSpPr>
+        <p:spPr>
+          <a:xfrm>
+            <a:off x="762000" y="2628900"/>
             <a:ext cx="381000" cy="381000"/>
           </a:xfrm>
           <a:prstGeom prst="ellipse">
             <a:avLst/>
           </a:prstGeom>
           <a:solidFill>
-            <a:srgbClr val="FFE6DC"/>
-          </a:solidFill>
-          <a:ln/>
-        </p:spPr>
-      </p:sp>
-      <p:sp>
-        <p:nvSpPr>
-          <p:cNvPr id="17" name=""/>
+            <a:srgbClr val="EAF2FB"/>
+          </a:solidFill>
+          <a:ln/>
+        </p:spPr>
+      </p:sp>
+      <p:sp>
+        <p:nvSpPr>
+          <p:cNvPr id="21" name=""/>
           <p:cNvSpPr txBox="1"/>
           <p:nvPr/>
         </p:nvSpPr>
         <p:spPr>
           <a:xfrm>
-            <a:off x="723900" y="2419350"/>
+            <a:off x="723900" y="2705100"/>
             <a:ext cx="466725" cy="209550"/>
           </a:xfrm>
           <a:prstGeom prst="rect">
@@ -2817,7 +3009,7 @@
             <a:r>
               <a:rPr sz="1500" b="1">
                 <a:solidFill>
-                  <a:srgbClr val="C23B12"/>
+                  <a:srgbClr val="4B5569"/>
                 </a:solidFill>
                 <a:latin typeface="Arial"/>
                 <a:ea typeface="Arial"/>
@@ -2829,18 +3021,18 @@
       </p:sp>
       <p:sp>
         <p:nvSpPr>
-          <p:cNvPr id="18" name="記入欄"/>
-          <p:cNvSpPr/>
-          <p:nvPr/>
-        </p:nvSpPr>
-        <p:spPr>
-          <a:xfrm>
-            <a:off x="1295400" y="2038350"/>
-            <a:ext cx="1847850" cy="971550"/>
-          </a:xfrm>
-          <a:prstGeom prst="roundRect">
-            <a:avLst>
-              <a:gd name="adj" fmla="val 17647"/>
+          <p:cNvPr id="22" name="記入欄"/>
+          <p:cNvSpPr/>
+          <p:nvPr/>
+        </p:nvSpPr>
+        <p:spPr>
+          <a:xfrm>
+            <a:off x="1295400" y="2362200"/>
+            <a:ext cx="1847850" cy="904875"/>
+          </a:xfrm>
+          <a:prstGeom prst="roundRect">
+            <a:avLst>
+              <a:gd name="adj" fmla="val 18947"/>
             </a:avLst>
           </a:prstGeom>
           <a:solidFill>
@@ -2848,7 +3040,7 @@
           </a:solidFill>
           <a:ln w="19050">
             <a:solidFill>
-              <a:srgbClr val="9CC6EC"/>
+              <a:srgbClr val="F2A0A8"/>
             </a:solidFill>
             <a:prstDash val="dash"/>
           </a:ln>
@@ -2870,18 +3062,18 @@
       </p:sp>
       <p:sp>
         <p:nvSpPr>
-          <p:cNvPr id="19" name="記入欄"/>
-          <p:cNvSpPr/>
-          <p:nvPr/>
-        </p:nvSpPr>
-        <p:spPr>
-          <a:xfrm>
-            <a:off x="3257550" y="2038350"/>
-            <a:ext cx="1847850" cy="971550"/>
-          </a:xfrm>
-          <a:prstGeom prst="roundRect">
-            <a:avLst>
-              <a:gd name="adj" fmla="val 17647"/>
+          <p:cNvPr id="23" name="記入欄"/>
+          <p:cNvSpPr/>
+          <p:nvPr/>
+        </p:nvSpPr>
+        <p:spPr>
+          <a:xfrm>
+            <a:off x="3257550" y="2362200"/>
+            <a:ext cx="1847850" cy="904875"/>
+          </a:xfrm>
+          <a:prstGeom prst="roundRect">
+            <a:avLst>
+              <a:gd name="adj" fmla="val 18947"/>
             </a:avLst>
           </a:prstGeom>
           <a:solidFill>
@@ -2889,7 +3081,7 @@
           </a:solidFill>
           <a:ln w="19050">
             <a:solidFill>
-              <a:srgbClr val="F5A285"/>
+              <a:srgbClr val="EDCB45"/>
             </a:solidFill>
             <a:prstDash val="dash"/>
           </a:ln>
@@ -2911,18 +3103,18 @@
       </p:sp>
       <p:sp>
         <p:nvSpPr>
-          <p:cNvPr id="20" name="記入欄"/>
-          <p:cNvSpPr/>
-          <p:nvPr/>
-        </p:nvSpPr>
-        <p:spPr>
-          <a:xfrm>
-            <a:off x="5229225" y="2038350"/>
-            <a:ext cx="1847850" cy="971550"/>
-          </a:xfrm>
-          <a:prstGeom prst="roundRect">
-            <a:avLst>
-              <a:gd name="adj" fmla="val 17647"/>
+          <p:cNvPr id="24" name="記入欄"/>
+          <p:cNvSpPr/>
+          <p:nvPr/>
+        </p:nvSpPr>
+        <p:spPr>
+          <a:xfrm>
+            <a:off x="5229225" y="2362200"/>
+            <a:ext cx="1847850" cy="904875"/>
+          </a:xfrm>
+          <a:prstGeom prst="roundRect">
+            <a:avLst>
+              <a:gd name="adj" fmla="val 18947"/>
             </a:avLst>
           </a:prstGeom>
           <a:solidFill>
@@ -2952,18 +3144,18 @@
       </p:sp>
       <p:sp>
         <p:nvSpPr>
-          <p:cNvPr id="21" name="記入欄"/>
-          <p:cNvSpPr/>
-          <p:nvPr/>
-        </p:nvSpPr>
-        <p:spPr>
-          <a:xfrm>
-            <a:off x="7191375" y="2038350"/>
-            <a:ext cx="1847850" cy="971550"/>
-          </a:xfrm>
-          <a:prstGeom prst="roundRect">
-            <a:avLst>
-              <a:gd name="adj" fmla="val 17647"/>
+          <p:cNvPr id="25" name="記入欄"/>
+          <p:cNvSpPr/>
+          <p:nvPr/>
+        </p:nvSpPr>
+        <p:spPr>
+          <a:xfrm>
+            <a:off x="7191375" y="2362200"/>
+            <a:ext cx="1847850" cy="904875"/>
+          </a:xfrm>
+          <a:prstGeom prst="roundRect">
+            <a:avLst>
+              <a:gd name="adj" fmla="val 18947"/>
             </a:avLst>
           </a:prstGeom>
           <a:solidFill>
@@ -2971,7 +3163,7 @@
           </a:solidFill>
           <a:ln w="19050">
             <a:solidFill>
-              <a:srgbClr val="F2A3B6"/>
+              <a:srgbClr val="A9D77F"/>
             </a:solidFill>
             <a:prstDash val="dash"/>
           </a:ln>
@@ -2993,18 +3185,18 @@
       </p:sp>
       <p:sp>
         <p:nvSpPr>
-          <p:cNvPr id="22" name="記入欄"/>
-          <p:cNvSpPr/>
-          <p:nvPr/>
-        </p:nvSpPr>
-        <p:spPr>
-          <a:xfrm>
-            <a:off x="9163050" y="2038350"/>
-            <a:ext cx="1847850" cy="971550"/>
-          </a:xfrm>
-          <a:prstGeom prst="roundRect">
-            <a:avLst>
-              <a:gd name="adj" fmla="val 17647"/>
+          <p:cNvPr id="26" name="記入欄"/>
+          <p:cNvSpPr/>
+          <p:nvPr/>
+        </p:nvSpPr>
+        <p:spPr>
+          <a:xfrm>
+            <a:off x="9163050" y="2362200"/>
+            <a:ext cx="1847850" cy="904875"/>
+          </a:xfrm>
+          <a:prstGeom prst="roundRect">
+            <a:avLst>
+              <a:gd name="adj" fmla="val 18947"/>
             </a:avLst>
           </a:prstGeom>
           <a:solidFill>
@@ -3012,7 +3204,7 @@
           </a:solidFill>
           <a:ln w="19050">
             <a:solidFill>
-              <a:srgbClr val="EBC864"/>
+              <a:srgbClr val="F5B57A"/>
             </a:solidFill>
             <a:prstDash val="dash"/>
           </a:ln>
@@ -3034,33 +3226,33 @@
       </p:sp>
       <p:sp>
         <p:nvSpPr>
-          <p:cNvPr id="23" name=""/>
-          <p:cNvSpPr/>
-          <p:nvPr/>
-        </p:nvSpPr>
-        <p:spPr>
-          <a:xfrm>
-            <a:off x="762000" y="3438525"/>
+          <p:cNvPr id="27" name=""/>
+          <p:cNvSpPr/>
+          <p:nvPr/>
+        </p:nvSpPr>
+        <p:spPr>
+          <a:xfrm>
+            <a:off x="762000" y="3648075"/>
             <a:ext cx="381000" cy="381000"/>
           </a:xfrm>
           <a:prstGeom prst="ellipse">
             <a:avLst/>
           </a:prstGeom>
           <a:solidFill>
-            <a:srgbClr val="FFE6DC"/>
-          </a:solidFill>
-          <a:ln/>
-        </p:spPr>
-      </p:sp>
-      <p:sp>
-        <p:nvSpPr>
-          <p:cNvPr id="24" name=""/>
+            <a:srgbClr val="EAF2FB"/>
+          </a:solidFill>
+          <a:ln/>
+        </p:spPr>
+      </p:sp>
+      <p:sp>
+        <p:nvSpPr>
+          <p:cNvPr id="28" name=""/>
           <p:cNvSpPr txBox="1"/>
           <p:nvPr/>
         </p:nvSpPr>
         <p:spPr>
           <a:xfrm>
-            <a:off x="723900" y="3524250"/>
+            <a:off x="723900" y="3724275"/>
             <a:ext cx="466725" cy="209550"/>
           </a:xfrm>
           <a:prstGeom prst="rect">
@@ -3077,7 +3269,7 @@
             <a:r>
               <a:rPr sz="1500" b="1">
                 <a:solidFill>
-                  <a:srgbClr val="C23B12"/>
+                  <a:srgbClr val="4B5569"/>
                 </a:solidFill>
                 <a:latin typeface="Arial"/>
                 <a:ea typeface="Arial"/>
@@ -3089,18 +3281,18 @@
       </p:sp>
       <p:sp>
         <p:nvSpPr>
-          <p:cNvPr id="25" name="記入欄"/>
-          <p:cNvSpPr/>
-          <p:nvPr/>
-        </p:nvSpPr>
-        <p:spPr>
-          <a:xfrm>
-            <a:off x="1295400" y="3143250"/>
-            <a:ext cx="1847850" cy="971550"/>
-          </a:xfrm>
-          <a:prstGeom prst="roundRect">
-            <a:avLst>
-              <a:gd name="adj" fmla="val 17647"/>
+          <p:cNvPr id="29" name="記入欄"/>
+          <p:cNvSpPr/>
+          <p:nvPr/>
+        </p:nvSpPr>
+        <p:spPr>
+          <a:xfrm>
+            <a:off x="1295400" y="3381375"/>
+            <a:ext cx="1847850" cy="904875"/>
+          </a:xfrm>
+          <a:prstGeom prst="roundRect">
+            <a:avLst>
+              <a:gd name="adj" fmla="val 18947"/>
             </a:avLst>
           </a:prstGeom>
           <a:solidFill>
@@ -3108,7 +3300,7 @@
           </a:solidFill>
           <a:ln w="19050">
             <a:solidFill>
-              <a:srgbClr val="9CC6EC"/>
+              <a:srgbClr val="F2A0A8"/>
             </a:solidFill>
             <a:prstDash val="dash"/>
           </a:ln>
@@ -3130,18 +3322,18 @@
       </p:sp>
       <p:sp>
         <p:nvSpPr>
-          <p:cNvPr id="26" name="記入欄"/>
-          <p:cNvSpPr/>
-          <p:nvPr/>
-        </p:nvSpPr>
-        <p:spPr>
-          <a:xfrm>
-            <a:off x="3257550" y="3143250"/>
-            <a:ext cx="1847850" cy="971550"/>
-          </a:xfrm>
-          <a:prstGeom prst="roundRect">
-            <a:avLst>
-              <a:gd name="adj" fmla="val 17647"/>
+          <p:cNvPr id="30" name="記入欄"/>
+          <p:cNvSpPr/>
+          <p:nvPr/>
+        </p:nvSpPr>
+        <p:spPr>
+          <a:xfrm>
+            <a:off x="3257550" y="3381375"/>
+            <a:ext cx="1847850" cy="904875"/>
+          </a:xfrm>
+          <a:prstGeom prst="roundRect">
+            <a:avLst>
+              <a:gd name="adj" fmla="val 18947"/>
             </a:avLst>
           </a:prstGeom>
           <a:solidFill>
@@ -3149,7 +3341,7 @@
           </a:solidFill>
           <a:ln w="19050">
             <a:solidFill>
-              <a:srgbClr val="F5A285"/>
+              <a:srgbClr val="EDCB45"/>
             </a:solidFill>
             <a:prstDash val="dash"/>
           </a:ln>
@@ -3171,18 +3363,18 @@
       </p:sp>
       <p:sp>
         <p:nvSpPr>
-          <p:cNvPr id="27" name="記入欄"/>
-          <p:cNvSpPr/>
-          <p:nvPr/>
-        </p:nvSpPr>
-        <p:spPr>
-          <a:xfrm>
-            <a:off x="5229225" y="3143250"/>
-            <a:ext cx="1847850" cy="971550"/>
-          </a:xfrm>
-          <a:prstGeom prst="roundRect">
-            <a:avLst>
-              <a:gd name="adj" fmla="val 17647"/>
+          <p:cNvPr id="31" name="記入欄"/>
+          <p:cNvSpPr/>
+          <p:nvPr/>
+        </p:nvSpPr>
+        <p:spPr>
+          <a:xfrm>
+            <a:off x="5229225" y="3381375"/>
+            <a:ext cx="1847850" cy="904875"/>
+          </a:xfrm>
+          <a:prstGeom prst="roundRect">
+            <a:avLst>
+              <a:gd name="adj" fmla="val 18947"/>
             </a:avLst>
           </a:prstGeom>
           <a:solidFill>
@@ -3212,18 +3404,18 @@
       </p:sp>
       <p:sp>
         <p:nvSpPr>
-          <p:cNvPr id="28" name="記入欄"/>
-          <p:cNvSpPr/>
-          <p:nvPr/>
-        </p:nvSpPr>
-        <p:spPr>
-          <a:xfrm>
-            <a:off x="7191375" y="3143250"/>
-            <a:ext cx="1847850" cy="971550"/>
-          </a:xfrm>
-          <a:prstGeom prst="roundRect">
-            <a:avLst>
-              <a:gd name="adj" fmla="val 17647"/>
+          <p:cNvPr id="32" name="記入欄"/>
+          <p:cNvSpPr/>
+          <p:nvPr/>
+        </p:nvSpPr>
+        <p:spPr>
+          <a:xfrm>
+            <a:off x="7191375" y="3381375"/>
+            <a:ext cx="1847850" cy="904875"/>
+          </a:xfrm>
+          <a:prstGeom prst="roundRect">
+            <a:avLst>
+              <a:gd name="adj" fmla="val 18947"/>
             </a:avLst>
           </a:prstGeom>
           <a:solidFill>
@@ -3231,7 +3423,7 @@
           </a:solidFill>
           <a:ln w="19050">
             <a:solidFill>
-              <a:srgbClr val="F2A3B6"/>
+              <a:srgbClr val="A9D77F"/>
             </a:solidFill>
             <a:prstDash val="dash"/>
           </a:ln>
@@ -3253,18 +3445,18 @@
       </p:sp>
       <p:sp>
         <p:nvSpPr>
-          <p:cNvPr id="29" name="記入欄"/>
-          <p:cNvSpPr/>
-          <p:nvPr/>
-        </p:nvSpPr>
-        <p:spPr>
-          <a:xfrm>
-            <a:off x="9163050" y="3143250"/>
-            <a:ext cx="1847850" cy="971550"/>
-          </a:xfrm>
-          <a:prstGeom prst="roundRect">
-            <a:avLst>
-              <a:gd name="adj" fmla="val 17647"/>
+          <p:cNvPr id="33" name="記入欄"/>
+          <p:cNvSpPr/>
+          <p:nvPr/>
+        </p:nvSpPr>
+        <p:spPr>
+          <a:xfrm>
+            <a:off x="9163050" y="3381375"/>
+            <a:ext cx="1847850" cy="904875"/>
+          </a:xfrm>
+          <a:prstGeom prst="roundRect">
+            <a:avLst>
+              <a:gd name="adj" fmla="val 18947"/>
             </a:avLst>
           </a:prstGeom>
           <a:solidFill>
@@ -3272,7 +3464,7 @@
           </a:solidFill>
           <a:ln w="19050">
             <a:solidFill>
-              <a:srgbClr val="EBC864"/>
+              <a:srgbClr val="F5B57A"/>
             </a:solidFill>
             <a:prstDash val="dash"/>
           </a:ln>
@@ -3294,33 +3486,33 @@
       </p:sp>
       <p:sp>
         <p:nvSpPr>
-          <p:cNvPr id="30" name=""/>
-          <p:cNvSpPr/>
-          <p:nvPr/>
-        </p:nvSpPr>
-        <p:spPr>
-          <a:xfrm>
-            <a:off x="762000" y="4543425"/>
+          <p:cNvPr id="34" name=""/>
+          <p:cNvSpPr/>
+          <p:nvPr/>
+        </p:nvSpPr>
+        <p:spPr>
+          <a:xfrm>
+            <a:off x="762000" y="4667250"/>
             <a:ext cx="381000" cy="381000"/>
           </a:xfrm>
           <a:prstGeom prst="ellipse">
             <a:avLst/>
           </a:prstGeom>
           <a:solidFill>
-            <a:srgbClr val="FFE6DC"/>
-          </a:solidFill>
-          <a:ln/>
-        </p:spPr>
-      </p:sp>
-      <p:sp>
-        <p:nvSpPr>
-          <p:cNvPr id="31" name=""/>
+            <a:srgbClr val="EAF2FB"/>
+          </a:solidFill>
+          <a:ln/>
+        </p:spPr>
+      </p:sp>
+      <p:sp>
+        <p:nvSpPr>
+          <p:cNvPr id="35" name=""/>
           <p:cNvSpPr txBox="1"/>
           <p:nvPr/>
         </p:nvSpPr>
         <p:spPr>
           <a:xfrm>
-            <a:off x="723900" y="4629150"/>
+            <a:off x="723900" y="4743450"/>
             <a:ext cx="466725" cy="209550"/>
           </a:xfrm>
           <a:prstGeom prst="rect">
@@ -3337,7 +3529,7 @@
             <a:r>
               <a:rPr sz="1500" b="1">
                 <a:solidFill>
-                  <a:srgbClr val="C23B12"/>
+                  <a:srgbClr val="4B5569"/>
                 </a:solidFill>
                 <a:latin typeface="Arial"/>
                 <a:ea typeface="Arial"/>
@@ -3349,18 +3541,18 @@
       </p:sp>
       <p:sp>
         <p:nvSpPr>
-          <p:cNvPr id="32" name="記入欄"/>
-          <p:cNvSpPr/>
-          <p:nvPr/>
-        </p:nvSpPr>
-        <p:spPr>
-          <a:xfrm>
-            <a:off x="1295400" y="4248150"/>
-            <a:ext cx="1847850" cy="971550"/>
-          </a:xfrm>
-          <a:prstGeom prst="roundRect">
-            <a:avLst>
-              <a:gd name="adj" fmla="val 17647"/>
+          <p:cNvPr id="36" name="記入欄"/>
+          <p:cNvSpPr/>
+          <p:nvPr/>
+        </p:nvSpPr>
+        <p:spPr>
+          <a:xfrm>
+            <a:off x="1295400" y="4400550"/>
+            <a:ext cx="1847850" cy="904875"/>
+          </a:xfrm>
+          <a:prstGeom prst="roundRect">
+            <a:avLst>
+              <a:gd name="adj" fmla="val 18947"/>
             </a:avLst>
           </a:prstGeom>
           <a:solidFill>
@@ -3368,7 +3560,7 @@
           </a:solidFill>
           <a:ln w="19050">
             <a:solidFill>
-              <a:srgbClr val="9CC6EC"/>
+              <a:srgbClr val="F2A0A8"/>
             </a:solidFill>
             <a:prstDash val="dash"/>
           </a:ln>
@@ -3390,18 +3582,18 @@
       </p:sp>
       <p:sp>
         <p:nvSpPr>
-          <p:cNvPr id="33" name="記入欄"/>
-          <p:cNvSpPr/>
-          <p:nvPr/>
-        </p:nvSpPr>
-        <p:spPr>
-          <a:xfrm>
-            <a:off x="3257550" y="4248150"/>
-            <a:ext cx="1847850" cy="971550"/>
-          </a:xfrm>
-          <a:prstGeom prst="roundRect">
-            <a:avLst>
-              <a:gd name="adj" fmla="val 17647"/>
+          <p:cNvPr id="37" name="記入欄"/>
+          <p:cNvSpPr/>
+          <p:nvPr/>
+        </p:nvSpPr>
+        <p:spPr>
+          <a:xfrm>
+            <a:off x="3257550" y="4400550"/>
+            <a:ext cx="1847850" cy="904875"/>
+          </a:xfrm>
+          <a:prstGeom prst="roundRect">
+            <a:avLst>
+              <a:gd name="adj" fmla="val 18947"/>
             </a:avLst>
           </a:prstGeom>
           <a:solidFill>
@@ -3409,7 +3601,7 @@
           </a:solidFill>
           <a:ln w="19050">
             <a:solidFill>
-              <a:srgbClr val="F5A285"/>
+              <a:srgbClr val="EDCB45"/>
             </a:solidFill>
             <a:prstDash val="dash"/>
           </a:ln>
@@ -3431,18 +3623,18 @@
       </p:sp>
       <p:sp>
         <p:nvSpPr>
-          <p:cNvPr id="34" name="記入欄"/>
-          <p:cNvSpPr/>
-          <p:nvPr/>
-        </p:nvSpPr>
-        <p:spPr>
-          <a:xfrm>
-            <a:off x="5229225" y="4248150"/>
-            <a:ext cx="1847850" cy="971550"/>
-          </a:xfrm>
-          <a:prstGeom prst="roundRect">
-            <a:avLst>
-              <a:gd name="adj" fmla="val 17647"/>
+          <p:cNvPr id="38" name="記入欄"/>
+          <p:cNvSpPr/>
+          <p:nvPr/>
+        </p:nvSpPr>
+        <p:spPr>
+          <a:xfrm>
+            <a:off x="5229225" y="4400550"/>
+            <a:ext cx="1847850" cy="904875"/>
+          </a:xfrm>
+          <a:prstGeom prst="roundRect">
+            <a:avLst>
+              <a:gd name="adj" fmla="val 18947"/>
             </a:avLst>
           </a:prstGeom>
           <a:solidFill>
@@ -3472,18 +3664,18 @@
       </p:sp>
       <p:sp>
         <p:nvSpPr>
-          <p:cNvPr id="35" name="記入欄"/>
-          <p:cNvSpPr/>
-          <p:nvPr/>
-        </p:nvSpPr>
-        <p:spPr>
-          <a:xfrm>
-            <a:off x="7191375" y="4248150"/>
-            <a:ext cx="1847850" cy="971550"/>
-          </a:xfrm>
-          <a:prstGeom prst="roundRect">
-            <a:avLst>
-              <a:gd name="adj" fmla="val 17647"/>
+          <p:cNvPr id="39" name="記入欄"/>
+          <p:cNvSpPr/>
+          <p:nvPr/>
+        </p:nvSpPr>
+        <p:spPr>
+          <a:xfrm>
+            <a:off x="7191375" y="4400550"/>
+            <a:ext cx="1847850" cy="904875"/>
+          </a:xfrm>
+          <a:prstGeom prst="roundRect">
+            <a:avLst>
+              <a:gd name="adj" fmla="val 18947"/>
             </a:avLst>
           </a:prstGeom>
           <a:solidFill>
@@ -3491,7 +3683,7 @@
           </a:solidFill>
           <a:ln w="19050">
             <a:solidFill>
-              <a:srgbClr val="F2A3B6"/>
+              <a:srgbClr val="A9D77F"/>
             </a:solidFill>
             <a:prstDash val="dash"/>
           </a:ln>
@@ -3513,18 +3705,18 @@
       </p:sp>
       <p:sp>
         <p:nvSpPr>
-          <p:cNvPr id="36" name="記入欄"/>
-          <p:cNvSpPr/>
-          <p:nvPr/>
-        </p:nvSpPr>
-        <p:spPr>
-          <a:xfrm>
-            <a:off x="9163050" y="4248150"/>
-            <a:ext cx="1847850" cy="971550"/>
-          </a:xfrm>
-          <a:prstGeom prst="roundRect">
-            <a:avLst>
-              <a:gd name="adj" fmla="val 17647"/>
+          <p:cNvPr id="40" name="記入欄"/>
+          <p:cNvSpPr/>
+          <p:nvPr/>
+        </p:nvSpPr>
+        <p:spPr>
+          <a:xfrm>
+            <a:off x="9163050" y="4400550"/>
+            <a:ext cx="1847850" cy="904875"/>
+          </a:xfrm>
+          <a:prstGeom prst="roundRect">
+            <a:avLst>
+              <a:gd name="adj" fmla="val 18947"/>
             </a:avLst>
           </a:prstGeom>
           <a:solidFill>
@@ -3532,7 +3724,7 @@
           </a:solidFill>
           <a:ln w="19050">
             <a:solidFill>
-              <a:srgbClr val="EBC864"/>
+              <a:srgbClr val="F5B57A"/>
             </a:solidFill>
             <a:prstDash val="dash"/>
           </a:ln>
@@ -3554,33 +3746,33 @@
       </p:sp>
       <p:sp>
         <p:nvSpPr>
-          <p:cNvPr id="37" name=""/>
-          <p:cNvSpPr/>
-          <p:nvPr/>
-        </p:nvSpPr>
-        <p:spPr>
-          <a:xfrm>
-            <a:off x="762000" y="5648325"/>
+          <p:cNvPr id="41" name=""/>
+          <p:cNvSpPr/>
+          <p:nvPr/>
+        </p:nvSpPr>
+        <p:spPr>
+          <a:xfrm>
+            <a:off x="762000" y="5686425"/>
             <a:ext cx="381000" cy="381000"/>
           </a:xfrm>
           <a:prstGeom prst="ellipse">
             <a:avLst/>
           </a:prstGeom>
           <a:solidFill>
-            <a:srgbClr val="FFE6DC"/>
-          </a:solidFill>
-          <a:ln/>
-        </p:spPr>
-      </p:sp>
-      <p:sp>
-        <p:nvSpPr>
-          <p:cNvPr id="38" name=""/>
+            <a:srgbClr val="EAF2FB"/>
+          </a:solidFill>
+          <a:ln/>
+        </p:spPr>
+      </p:sp>
+      <p:sp>
+        <p:nvSpPr>
+          <p:cNvPr id="42" name=""/>
           <p:cNvSpPr txBox="1"/>
           <p:nvPr/>
         </p:nvSpPr>
         <p:spPr>
           <a:xfrm>
-            <a:off x="723900" y="5734050"/>
+            <a:off x="723900" y="5762625"/>
             <a:ext cx="466725" cy="209550"/>
           </a:xfrm>
           <a:prstGeom prst="rect">
@@ -3597,7 +3789,7 @@
             <a:r>
               <a:rPr sz="1500" b="1">
                 <a:solidFill>
-                  <a:srgbClr val="C23B12"/>
+                  <a:srgbClr val="4B5569"/>
                 </a:solidFill>
                 <a:latin typeface="Arial"/>
                 <a:ea typeface="Arial"/>
@@ -3609,18 +3801,18 @@
       </p:sp>
       <p:sp>
         <p:nvSpPr>
-          <p:cNvPr id="39" name="記入欄"/>
-          <p:cNvSpPr/>
-          <p:nvPr/>
-        </p:nvSpPr>
-        <p:spPr>
-          <a:xfrm>
-            <a:off x="1295400" y="5353050"/>
-            <a:ext cx="1847850" cy="971550"/>
-          </a:xfrm>
-          <a:prstGeom prst="roundRect">
-            <a:avLst>
-              <a:gd name="adj" fmla="val 17647"/>
+          <p:cNvPr id="43" name="記入欄"/>
+          <p:cNvSpPr/>
+          <p:nvPr/>
+        </p:nvSpPr>
+        <p:spPr>
+          <a:xfrm>
+            <a:off x="1295400" y="5419725"/>
+            <a:ext cx="1847850" cy="904875"/>
+          </a:xfrm>
+          <a:prstGeom prst="roundRect">
+            <a:avLst>
+              <a:gd name="adj" fmla="val 18947"/>
             </a:avLst>
           </a:prstGeom>
           <a:solidFill>
@@ -3628,7 +3820,7 @@
           </a:solidFill>
           <a:ln w="19050">
             <a:solidFill>
-              <a:srgbClr val="9CC6EC"/>
+              <a:srgbClr val="F2A0A8"/>
             </a:solidFill>
             <a:prstDash val="dash"/>
           </a:ln>
@@ -3650,18 +3842,18 @@
       </p:sp>
       <p:sp>
         <p:nvSpPr>
-          <p:cNvPr id="40" name="記入欄"/>
-          <p:cNvSpPr/>
-          <p:nvPr/>
-        </p:nvSpPr>
-        <p:spPr>
-          <a:xfrm>
-            <a:off x="3257550" y="5353050"/>
-            <a:ext cx="1847850" cy="971550"/>
-          </a:xfrm>
-          <a:prstGeom prst="roundRect">
-            <a:avLst>
-              <a:gd name="adj" fmla="val 17647"/>
+          <p:cNvPr id="44" name="記入欄"/>
+          <p:cNvSpPr/>
+          <p:nvPr/>
+        </p:nvSpPr>
+        <p:spPr>
+          <a:xfrm>
+            <a:off x="3257550" y="5419725"/>
+            <a:ext cx="1847850" cy="904875"/>
+          </a:xfrm>
+          <a:prstGeom prst="roundRect">
+            <a:avLst>
+              <a:gd name="adj" fmla="val 18947"/>
             </a:avLst>
           </a:prstGeom>
           <a:solidFill>
@@ -3669,7 +3861,7 @@
           </a:solidFill>
           <a:ln w="19050">
             <a:solidFill>
-              <a:srgbClr val="F5A285"/>
+              <a:srgbClr val="EDCB45"/>
             </a:solidFill>
             <a:prstDash val="dash"/>
           </a:ln>
@@ -3691,18 +3883,18 @@
       </p:sp>
       <p:sp>
         <p:nvSpPr>
-          <p:cNvPr id="41" name="記入欄"/>
-          <p:cNvSpPr/>
-          <p:nvPr/>
-        </p:nvSpPr>
-        <p:spPr>
-          <a:xfrm>
-            <a:off x="5229225" y="5353050"/>
-            <a:ext cx="1847850" cy="971550"/>
-          </a:xfrm>
-          <a:prstGeom prst="roundRect">
-            <a:avLst>
-              <a:gd name="adj" fmla="val 17647"/>
+          <p:cNvPr id="45" name="記入欄"/>
+          <p:cNvSpPr/>
+          <p:nvPr/>
+        </p:nvSpPr>
+        <p:spPr>
+          <a:xfrm>
+            <a:off x="5229225" y="5419725"/>
+            <a:ext cx="1847850" cy="904875"/>
+          </a:xfrm>
+          <a:prstGeom prst="roundRect">
+            <a:avLst>
+              <a:gd name="adj" fmla="val 18947"/>
             </a:avLst>
           </a:prstGeom>
           <a:solidFill>
@@ -3732,18 +3924,18 @@
       </p:sp>
       <p:sp>
         <p:nvSpPr>
-          <p:cNvPr id="42" name="記入欄"/>
-          <p:cNvSpPr/>
-          <p:nvPr/>
-        </p:nvSpPr>
-        <p:spPr>
-          <a:xfrm>
-            <a:off x="7191375" y="5353050"/>
-            <a:ext cx="1847850" cy="971550"/>
-          </a:xfrm>
-          <a:prstGeom prst="roundRect">
-            <a:avLst>
-              <a:gd name="adj" fmla="val 17647"/>
+          <p:cNvPr id="46" name="記入欄"/>
+          <p:cNvSpPr/>
+          <p:nvPr/>
+        </p:nvSpPr>
+        <p:spPr>
+          <a:xfrm>
+            <a:off x="7191375" y="5419725"/>
+            <a:ext cx="1847850" cy="904875"/>
+          </a:xfrm>
+          <a:prstGeom prst="roundRect">
+            <a:avLst>
+              <a:gd name="adj" fmla="val 18947"/>
             </a:avLst>
           </a:prstGeom>
           <a:solidFill>
@@ -3751,7 +3943,7 @@
           </a:solidFill>
           <a:ln w="19050">
             <a:solidFill>
-              <a:srgbClr val="F2A3B6"/>
+              <a:srgbClr val="A9D77F"/>
             </a:solidFill>
             <a:prstDash val="dash"/>
           </a:ln>
@@ -3773,18 +3965,18 @@
       </p:sp>
       <p:sp>
         <p:nvSpPr>
-          <p:cNvPr id="43" name="記入欄"/>
-          <p:cNvSpPr/>
-          <p:nvPr/>
-        </p:nvSpPr>
-        <p:spPr>
-          <a:xfrm>
-            <a:off x="9163050" y="5353050"/>
-            <a:ext cx="1847850" cy="971550"/>
-          </a:xfrm>
-          <a:prstGeom prst="roundRect">
-            <a:avLst>
-              <a:gd name="adj" fmla="val 17647"/>
+          <p:cNvPr id="47" name="記入欄"/>
+          <p:cNvSpPr/>
+          <p:nvPr/>
+        </p:nvSpPr>
+        <p:spPr>
+          <a:xfrm>
+            <a:off x="9163050" y="5419725"/>
+            <a:ext cx="1847850" cy="904875"/>
+          </a:xfrm>
+          <a:prstGeom prst="roundRect">
+            <a:avLst>
+              <a:gd name="adj" fmla="val 18947"/>
             </a:avLst>
           </a:prstGeom>
           <a:solidFill>
@@ -3792,7 +3984,7 @@
           </a:solidFill>
           <a:ln w="19050">
             <a:solidFill>
-              <a:srgbClr val="EBC864"/>
+              <a:srgbClr val="F5B57A"/>
             </a:solidFill>
             <a:prstDash val="dash"/>
           </a:ln>
@@ -3918,7 +4110,7 @@
             </a:avLst>
           </a:prstGeom>
           <a:solidFill>
-            <a:srgbClr val="D6E9FA"/>
+            <a:srgbClr val="FFDDE0"/>
           </a:solidFill>
           <a:ln/>
         </p:spPr>
@@ -3948,7 +4140,7 @@
             <a:r>
               <a:rPr sz="3300" b="1">
                 <a:solidFill>
-                  <a:srgbClr val="1F5F96"/>
+                  <a:srgbClr val="C42B3B"/>
                 </a:solidFill>
                 <a:latin typeface="Noto Sans JP"/>
                 <a:ea typeface="Noto Sans JP"/>
@@ -3975,7 +4167,7 @@
             </a:avLst>
           </a:prstGeom>
           <a:solidFill>
-            <a:srgbClr val="FFD9E2"/>
+            <a:srgbClr val="DDF1C6"/>
           </a:solidFill>
           <a:ln/>
         </p:spPr>
@@ -4005,7 +4197,7 @@
             <a:r>
               <a:rPr sz="3300" b="1">
                 <a:solidFill>
-                  <a:srgbClr val="B3304F"/>
+                  <a:srgbClr val="3D7A1A"/>
                 </a:solidFill>
                 <a:latin typeface="Noto Sans JP"/>
                 <a:ea typeface="Noto Sans JP"/>
@@ -4032,7 +4224,7 @@
             </a:avLst>
           </a:prstGeom>
           <a:solidFill>
-            <a:srgbClr val="FFEDB8"/>
+            <a:srgbClr val="FFE0C0"/>
           </a:solidFill>
           <a:ln/>
         </p:spPr>
@@ -4062,7 +4254,7 @@
             <a:r>
               <a:rPr sz="3300" b="1">
                 <a:solidFill>
-                  <a:srgbClr val="8A5A00"/>
+                  <a:srgbClr val="B65300"/>
                 </a:solidFill>
                 <a:latin typeface="Noto Sans JP"/>
                 <a:ea typeface="Noto Sans JP"/>
@@ -4309,7 +4501,7 @@
         </p:nvSpPr>
         <p:spPr>
           <a:xfrm>
-            <a:off x="762000" y="1466850"/>
+            <a:off x="762000" y="1485900"/>
             <a:ext cx="1028700" cy="285750"/>
           </a:xfrm>
           <a:prstGeom prst="rect">
@@ -4336,243 +4528,111 @@
           </a:p>
         </p:txBody>
       </p:sp>
-      <p:sp>
-        <p:nvSpPr>
-          <p:cNvPr id="5" name=""/>
-          <p:cNvSpPr/>
-          <p:nvPr/>
-        </p:nvSpPr>
-        <p:spPr>
-          <a:xfrm>
-            <a:off x="2686050" y="1333500"/>
-            <a:ext cx="1428750" cy="552450"/>
-          </a:xfrm>
-          <a:prstGeom prst="roundRect">
-            <a:avLst>
-              <a:gd name="adj" fmla="val 50000"/>
-            </a:avLst>
-          </a:prstGeom>
-          <a:solidFill>
-            <a:srgbClr val="D6E9FA"/>
-          </a:solidFill>
-          <a:ln/>
-        </p:spPr>
-      </p:sp>
-      <p:sp>
-        <p:nvSpPr>
-          <p:cNvPr id="6" name=""/>
+      <p:pic>
+        <p:nvPicPr>
+          <p:cNvPr id="5" name="Image 0" descr="りんご">    </p:cNvPr>
+          <p:cNvPicPr>
+            <a:picLocks noChangeAspect="1"/>
+          </p:cNvPicPr>
+          <p:nvPr/>
+        </p:nvPicPr>
+        <p:blipFill>
+          <a:blip r:embed="rId1"/>
+          <a:stretch>
+            <a:fillRect/>
+          </a:stretch>
+        </p:blipFill>
+        <p:spPr>
+          <a:xfrm>
+            <a:off x="2781300" y="1295400"/>
+            <a:ext cx="666750" cy="666750"/>
+          </a:xfrm>
+          <a:prstGeom prst="rect">
+            <a:avLst/>
+          </a:prstGeom>
+        </p:spPr>
+      </p:pic>
+      <p:pic>
+        <p:nvPicPr>
+          <p:cNvPr id="6" name="Image 1" descr="黄色いバナナ">    </p:cNvPr>
+          <p:cNvPicPr>
+            <a:picLocks noChangeAspect="1"/>
+          </p:cNvPicPr>
+          <p:nvPr/>
+        </p:nvPicPr>
+        <p:blipFill>
+          <a:blip r:embed="rId2"/>
+          <a:stretch>
+            <a:fillRect/>
+          </a:stretch>
+        </p:blipFill>
+        <p:spPr>
+          <a:xfrm>
+            <a:off x="3657600" y="1295400"/>
+            <a:ext cx="666750" cy="666750"/>
+          </a:xfrm>
+          <a:prstGeom prst="rect">
+            <a:avLst/>
+          </a:prstGeom>
+        </p:spPr>
+      </p:pic>
+      <p:pic>
+        <p:nvPicPr>
+          <p:cNvPr id="7" name="Image 2" descr="緑のバナナ">    </p:cNvPr>
+          <p:cNvPicPr>
+            <a:picLocks noChangeAspect="1"/>
+          </p:cNvPicPr>
+          <p:nvPr/>
+        </p:nvPicPr>
+        <p:blipFill>
+          <a:blip r:embed="rId3"/>
+          <a:stretch>
+            <a:fillRect/>
+          </a:stretch>
+        </p:blipFill>
+        <p:spPr>
+          <a:xfrm>
+            <a:off x="4533900" y="1295400"/>
+            <a:ext cx="666750" cy="666750"/>
+          </a:xfrm>
+          <a:prstGeom prst="rect">
+            <a:avLst/>
+          </a:prstGeom>
+        </p:spPr>
+      </p:pic>
+      <p:pic>
+        <p:nvPicPr>
+          <p:cNvPr id="8" name="Image 3" descr="オレンジ">    </p:cNvPr>
+          <p:cNvPicPr>
+            <a:picLocks noChangeAspect="1"/>
+          </p:cNvPicPr>
+          <p:nvPr/>
+        </p:nvPicPr>
+        <p:blipFill>
+          <a:blip r:embed="rId4"/>
+          <a:stretch>
+            <a:fillRect/>
+          </a:stretch>
+        </p:blipFill>
+        <p:spPr>
+          <a:xfrm>
+            <a:off x="5410200" y="1295400"/>
+            <a:ext cx="666750" cy="666750"/>
+          </a:xfrm>
+          <a:prstGeom prst="rect">
+            <a:avLst/>
+          </a:prstGeom>
+        </p:spPr>
+      </p:pic>
+      <p:sp>
+        <p:nvSpPr>
+          <p:cNvPr id="9" name=""/>
           <p:cNvSpPr txBox="1"/>
           <p:nvPr/>
         </p:nvSpPr>
         <p:spPr>
           <a:xfrm>
-            <a:off x="2962275" y="1447800"/>
-            <a:ext cx="866775" cy="333375"/>
-          </a:xfrm>
-          <a:prstGeom prst="rect">
-            <a:avLst/>
-          </a:prstGeom>
-          <a:noFill/>
-          <a:ln/>
-        </p:spPr>
-        <p:txBody>
-          <a:bodyPr wrap="square" lIns="0" tIns="0" rIns="0" bIns="0" anchor="ctr"/>
-          <a:lstStyle/>
-          <a:p>
-            <a:pPr algn="ctr"/>
-            <a:r>
-              <a:rPr sz="1800" b="1">
-                <a:solidFill>
-                  <a:srgbClr val="1F5F96"/>
-                </a:solidFill>
-                <a:latin typeface="Noto Sans JP"/>
-                <a:ea typeface="Noto Sans JP"/>
-              </a:rPr>
-              <a:t>主語</a:t>
-            </a:r>
-          </a:p>
-        </p:txBody>
-      </p:sp>
-      <p:sp>
-        <p:nvSpPr>
-          <p:cNvPr id="7" name=""/>
-          <p:cNvSpPr/>
-          <p:nvPr/>
-        </p:nvSpPr>
-        <p:spPr>
-          <a:xfrm>
-            <a:off x="4229100" y="1333500"/>
-            <a:ext cx="1428750" cy="552450"/>
-          </a:xfrm>
-          <a:prstGeom prst="roundRect">
-            <a:avLst>
-              <a:gd name="adj" fmla="val 50000"/>
-            </a:avLst>
-          </a:prstGeom>
-          <a:solidFill>
-            <a:srgbClr val="F0521E"/>
-          </a:solidFill>
-          <a:ln/>
-        </p:spPr>
-      </p:sp>
-      <p:sp>
-        <p:nvSpPr>
-          <p:cNvPr id="8" name=""/>
-          <p:cNvSpPr txBox="1"/>
-          <p:nvPr/>
-        </p:nvSpPr>
-        <p:spPr>
-          <a:xfrm>
-            <a:off x="4381500" y="1447800"/>
-            <a:ext cx="1133475" cy="333375"/>
-          </a:xfrm>
-          <a:prstGeom prst="rect">
-            <a:avLst/>
-          </a:prstGeom>
-          <a:noFill/>
-          <a:ln/>
-        </p:spPr>
-        <p:txBody>
-          <a:bodyPr wrap="square" lIns="0" tIns="0" rIns="0" bIns="0" anchor="ctr"/>
-          <a:lstStyle/>
-          <a:p>
-            <a:pPr algn="ctr"/>
-            <a:r>
-              <a:rPr sz="1800" b="1">
-                <a:solidFill>
-                  <a:srgbClr val="FFFFFF"/>
-                </a:solidFill>
-                <a:latin typeface="Noto Sans JP"/>
-                <a:ea typeface="Noto Sans JP"/>
-              </a:rPr>
-              <a:t>助動詞</a:t>
-            </a:r>
-          </a:p>
-        </p:txBody>
-      </p:sp>
-      <p:sp>
-        <p:nvSpPr>
-          <p:cNvPr id="9" name=""/>
-          <p:cNvSpPr/>
-          <p:nvPr/>
-        </p:nvSpPr>
-        <p:spPr>
-          <a:xfrm>
-            <a:off x="5772150" y="1333500"/>
-            <a:ext cx="1428750" cy="552450"/>
-          </a:xfrm>
-          <a:prstGeom prst="roundRect">
-            <a:avLst>
-              <a:gd name="adj" fmla="val 50000"/>
-            </a:avLst>
-          </a:prstGeom>
-          <a:solidFill>
-            <a:srgbClr val="FFD9E2"/>
-          </a:solidFill>
-          <a:ln/>
-        </p:spPr>
-      </p:sp>
-      <p:sp>
-        <p:nvSpPr>
-          <p:cNvPr id="10" name=""/>
-          <p:cNvSpPr txBox="1"/>
-          <p:nvPr/>
-        </p:nvSpPr>
-        <p:spPr>
-          <a:xfrm>
-            <a:off x="6048375" y="1447800"/>
-            <a:ext cx="866775" cy="333375"/>
-          </a:xfrm>
-          <a:prstGeom prst="rect">
-            <a:avLst/>
-          </a:prstGeom>
-          <a:noFill/>
-          <a:ln/>
-        </p:spPr>
-        <p:txBody>
-          <a:bodyPr wrap="square" lIns="0" tIns="0" rIns="0" bIns="0" anchor="ctr"/>
-          <a:lstStyle/>
-          <a:p>
-            <a:pPr algn="ctr"/>
-            <a:r>
-              <a:rPr sz="1800" b="1">
-                <a:solidFill>
-                  <a:srgbClr val="B3304F"/>
-                </a:solidFill>
-                <a:latin typeface="Noto Sans JP"/>
-                <a:ea typeface="Noto Sans JP"/>
-              </a:rPr>
-              <a:t>動詞</a:t>
-            </a:r>
-          </a:p>
-        </p:txBody>
-      </p:sp>
-      <p:sp>
-        <p:nvSpPr>
-          <p:cNvPr id="11" name=""/>
-          <p:cNvSpPr/>
-          <p:nvPr/>
-        </p:nvSpPr>
-        <p:spPr>
-          <a:xfrm>
-            <a:off x="7315200" y="1333500"/>
-            <a:ext cx="1428750" cy="552450"/>
-          </a:xfrm>
-          <a:prstGeom prst="roundRect">
-            <a:avLst>
-              <a:gd name="adj" fmla="val 50000"/>
-            </a:avLst>
-          </a:prstGeom>
-          <a:solidFill>
-            <a:srgbClr val="FFEDB8"/>
-          </a:solidFill>
-          <a:ln/>
-        </p:spPr>
-      </p:sp>
-      <p:sp>
-        <p:nvSpPr>
-          <p:cNvPr id="12" name=""/>
-          <p:cNvSpPr txBox="1"/>
-          <p:nvPr/>
-        </p:nvSpPr>
-        <p:spPr>
-          <a:xfrm>
-            <a:off x="7467600" y="1447800"/>
-            <a:ext cx="1133475" cy="333375"/>
-          </a:xfrm>
-          <a:prstGeom prst="rect">
-            <a:avLst/>
-          </a:prstGeom>
-          <a:noFill/>
-          <a:ln/>
-        </p:spPr>
-        <p:txBody>
-          <a:bodyPr wrap="square" lIns="0" tIns="0" rIns="0" bIns="0" anchor="ctr"/>
-          <a:lstStyle/>
-          <a:p>
-            <a:pPr algn="ctr"/>
-            <a:r>
-              <a:rPr sz="1800" b="1">
-                <a:solidFill>
-                  <a:srgbClr val="8A5A00"/>
-                </a:solidFill>
-                <a:latin typeface="Noto Sans JP"/>
-                <a:ea typeface="Noto Sans JP"/>
-              </a:rPr>
-              <a:t>目的語</a:t>
-            </a:r>
-          </a:p>
-        </p:txBody>
-      </p:sp>
-      <p:sp>
-        <p:nvSpPr>
-          <p:cNvPr id="13" name=""/>
-          <p:cNvSpPr txBox="1"/>
-          <p:nvPr/>
-        </p:nvSpPr>
-        <p:spPr>
-          <a:xfrm>
-            <a:off x="762000" y="2152650"/>
+            <a:off x="762000" y="2266950"/>
             <a:ext cx="1028700" cy="285750"/>
           </a:xfrm>
           <a:prstGeom prst="rect">
@@ -4599,243 +4659,111 @@
           </a:p>
         </p:txBody>
       </p:sp>
+      <p:pic>
+        <p:nvPicPr>
+          <p:cNvPr id="10" name="Image 4" descr="黄色いバナナ">    </p:cNvPr>
+          <p:cNvPicPr>
+            <a:picLocks noChangeAspect="1"/>
+          </p:cNvPicPr>
+          <p:nvPr/>
+        </p:nvPicPr>
+        <p:blipFill>
+          <a:blip r:embed="rId5"/>
+          <a:stretch>
+            <a:fillRect/>
+          </a:stretch>
+        </p:blipFill>
+        <p:spPr>
+          <a:xfrm>
+            <a:off x="2781300" y="2076450"/>
+            <a:ext cx="666750" cy="666750"/>
+          </a:xfrm>
+          <a:prstGeom prst="rect">
+            <a:avLst/>
+          </a:prstGeom>
+        </p:spPr>
+      </p:pic>
+      <p:pic>
+        <p:nvPicPr>
+          <p:cNvPr id="11" name="Image 5" descr="りんご">    </p:cNvPr>
+          <p:cNvPicPr>
+            <a:picLocks noChangeAspect="1"/>
+          </p:cNvPicPr>
+          <p:nvPr/>
+        </p:nvPicPr>
+        <p:blipFill>
+          <a:blip r:embed="rId6"/>
+          <a:stretch>
+            <a:fillRect/>
+          </a:stretch>
+        </p:blipFill>
+        <p:spPr>
+          <a:xfrm>
+            <a:off x="3657600" y="2076450"/>
+            <a:ext cx="666750" cy="666750"/>
+          </a:xfrm>
+          <a:prstGeom prst="rect">
+            <a:avLst/>
+          </a:prstGeom>
+        </p:spPr>
+      </p:pic>
+      <p:pic>
+        <p:nvPicPr>
+          <p:cNvPr id="12" name="Image 6" descr="緑のバナナ">    </p:cNvPr>
+          <p:cNvPicPr>
+            <a:picLocks noChangeAspect="1"/>
+          </p:cNvPicPr>
+          <p:nvPr/>
+        </p:nvPicPr>
+        <p:blipFill>
+          <a:blip r:embed="rId7"/>
+          <a:stretch>
+            <a:fillRect/>
+          </a:stretch>
+        </p:blipFill>
+        <p:spPr>
+          <a:xfrm>
+            <a:off x="4533900" y="2076450"/>
+            <a:ext cx="666750" cy="666750"/>
+          </a:xfrm>
+          <a:prstGeom prst="rect">
+            <a:avLst/>
+          </a:prstGeom>
+        </p:spPr>
+      </p:pic>
+      <p:pic>
+        <p:nvPicPr>
+          <p:cNvPr id="13" name="Image 7" descr="オレンジ">    </p:cNvPr>
+          <p:cNvPicPr>
+            <a:picLocks noChangeAspect="1"/>
+          </p:cNvPicPr>
+          <p:nvPr/>
+        </p:nvPicPr>
+        <p:blipFill>
+          <a:blip r:embed="rId8"/>
+          <a:stretch>
+            <a:fillRect/>
+          </a:stretch>
+        </p:blipFill>
+        <p:spPr>
+          <a:xfrm>
+            <a:off x="5410200" y="2076450"/>
+            <a:ext cx="666750" cy="666750"/>
+          </a:xfrm>
+          <a:prstGeom prst="rect">
+            <a:avLst/>
+          </a:prstGeom>
+        </p:spPr>
+      </p:pic>
       <p:sp>
         <p:nvSpPr>
           <p:cNvPr id="14" name=""/>
-          <p:cNvSpPr/>
-          <p:nvPr/>
-        </p:nvSpPr>
-        <p:spPr>
-          <a:xfrm>
-            <a:off x="2686050" y="2019300"/>
-            <a:ext cx="1428750" cy="552450"/>
-          </a:xfrm>
-          <a:prstGeom prst="roundRect">
-            <a:avLst>
-              <a:gd name="adj" fmla="val 50000"/>
-            </a:avLst>
-          </a:prstGeom>
-          <a:solidFill>
-            <a:srgbClr val="F0521E"/>
-          </a:solidFill>
-          <a:ln/>
-        </p:spPr>
-      </p:sp>
-      <p:sp>
-        <p:nvSpPr>
-          <p:cNvPr id="15" name=""/>
           <p:cNvSpPr txBox="1"/>
           <p:nvPr/>
         </p:nvSpPr>
         <p:spPr>
           <a:xfrm>
-            <a:off x="2838450" y="2133600"/>
-            <a:ext cx="1133475" cy="333375"/>
-          </a:xfrm>
-          <a:prstGeom prst="rect">
-            <a:avLst/>
-          </a:prstGeom>
-          <a:noFill/>
-          <a:ln/>
-        </p:spPr>
-        <p:txBody>
-          <a:bodyPr wrap="square" lIns="0" tIns="0" rIns="0" bIns="0" anchor="ctr"/>
-          <a:lstStyle/>
-          <a:p>
-            <a:pPr algn="ctr"/>
-            <a:r>
-              <a:rPr sz="1800" b="1">
-                <a:solidFill>
-                  <a:srgbClr val="FFFFFF"/>
-                </a:solidFill>
-                <a:latin typeface="Noto Sans JP"/>
-                <a:ea typeface="Noto Sans JP"/>
-              </a:rPr>
-              <a:t>助動詞</a:t>
-            </a:r>
-          </a:p>
-        </p:txBody>
-      </p:sp>
-      <p:sp>
-        <p:nvSpPr>
-          <p:cNvPr id="16" name=""/>
-          <p:cNvSpPr/>
-          <p:nvPr/>
-        </p:nvSpPr>
-        <p:spPr>
-          <a:xfrm>
-            <a:off x="4229100" y="2019300"/>
-            <a:ext cx="1428750" cy="552450"/>
-          </a:xfrm>
-          <a:prstGeom prst="roundRect">
-            <a:avLst>
-              <a:gd name="adj" fmla="val 50000"/>
-            </a:avLst>
-          </a:prstGeom>
-          <a:solidFill>
-            <a:srgbClr val="D6E9FA"/>
-          </a:solidFill>
-          <a:ln/>
-        </p:spPr>
-      </p:sp>
-      <p:sp>
-        <p:nvSpPr>
-          <p:cNvPr id="17" name=""/>
-          <p:cNvSpPr txBox="1"/>
-          <p:nvPr/>
-        </p:nvSpPr>
-        <p:spPr>
-          <a:xfrm>
-            <a:off x="4505325" y="2133600"/>
-            <a:ext cx="866775" cy="333375"/>
-          </a:xfrm>
-          <a:prstGeom prst="rect">
-            <a:avLst/>
-          </a:prstGeom>
-          <a:noFill/>
-          <a:ln/>
-        </p:spPr>
-        <p:txBody>
-          <a:bodyPr wrap="square" lIns="0" tIns="0" rIns="0" bIns="0" anchor="ctr"/>
-          <a:lstStyle/>
-          <a:p>
-            <a:pPr algn="ctr"/>
-            <a:r>
-              <a:rPr sz="1800" b="1">
-                <a:solidFill>
-                  <a:srgbClr val="1F5F96"/>
-                </a:solidFill>
-                <a:latin typeface="Noto Sans JP"/>
-                <a:ea typeface="Noto Sans JP"/>
-              </a:rPr>
-              <a:t>主語</a:t>
-            </a:r>
-          </a:p>
-        </p:txBody>
-      </p:sp>
-      <p:sp>
-        <p:nvSpPr>
-          <p:cNvPr id="18" name=""/>
-          <p:cNvSpPr/>
-          <p:nvPr/>
-        </p:nvSpPr>
-        <p:spPr>
-          <a:xfrm>
-            <a:off x="5772150" y="2019300"/>
-            <a:ext cx="1428750" cy="552450"/>
-          </a:xfrm>
-          <a:prstGeom prst="roundRect">
-            <a:avLst>
-              <a:gd name="adj" fmla="val 50000"/>
-            </a:avLst>
-          </a:prstGeom>
-          <a:solidFill>
-            <a:srgbClr val="FFD9E2"/>
-          </a:solidFill>
-          <a:ln/>
-        </p:spPr>
-      </p:sp>
-      <p:sp>
-        <p:nvSpPr>
-          <p:cNvPr id="19" name=""/>
-          <p:cNvSpPr txBox="1"/>
-          <p:nvPr/>
-        </p:nvSpPr>
-        <p:spPr>
-          <a:xfrm>
-            <a:off x="6048375" y="2133600"/>
-            <a:ext cx="866775" cy="333375"/>
-          </a:xfrm>
-          <a:prstGeom prst="rect">
-            <a:avLst/>
-          </a:prstGeom>
-          <a:noFill/>
-          <a:ln/>
-        </p:spPr>
-        <p:txBody>
-          <a:bodyPr wrap="square" lIns="0" tIns="0" rIns="0" bIns="0" anchor="ctr"/>
-          <a:lstStyle/>
-          <a:p>
-            <a:pPr algn="ctr"/>
-            <a:r>
-              <a:rPr sz="1800" b="1">
-                <a:solidFill>
-                  <a:srgbClr val="B3304F"/>
-                </a:solidFill>
-                <a:latin typeface="Noto Sans JP"/>
-                <a:ea typeface="Noto Sans JP"/>
-              </a:rPr>
-              <a:t>動詞</a:t>
-            </a:r>
-          </a:p>
-        </p:txBody>
-      </p:sp>
-      <p:sp>
-        <p:nvSpPr>
-          <p:cNvPr id="20" name=""/>
-          <p:cNvSpPr/>
-          <p:nvPr/>
-        </p:nvSpPr>
-        <p:spPr>
-          <a:xfrm>
-            <a:off x="7315200" y="2019300"/>
-            <a:ext cx="1428750" cy="552450"/>
-          </a:xfrm>
-          <a:prstGeom prst="roundRect">
-            <a:avLst>
-              <a:gd name="adj" fmla="val 50000"/>
-            </a:avLst>
-          </a:prstGeom>
-          <a:solidFill>
-            <a:srgbClr val="FFEDB8"/>
-          </a:solidFill>
-          <a:ln/>
-        </p:spPr>
-      </p:sp>
-      <p:sp>
-        <p:nvSpPr>
-          <p:cNvPr id="21" name=""/>
-          <p:cNvSpPr txBox="1"/>
-          <p:nvPr/>
-        </p:nvSpPr>
-        <p:spPr>
-          <a:xfrm>
-            <a:off x="7467600" y="2133600"/>
-            <a:ext cx="1133475" cy="333375"/>
-          </a:xfrm>
-          <a:prstGeom prst="rect">
-            <a:avLst/>
-          </a:prstGeom>
-          <a:noFill/>
-          <a:ln/>
-        </p:spPr>
-        <p:txBody>
-          <a:bodyPr wrap="square" lIns="0" tIns="0" rIns="0" bIns="0" anchor="ctr"/>
-          <a:lstStyle/>
-          <a:p>
-            <a:pPr algn="ctr"/>
-            <a:r>
-              <a:rPr sz="1800" b="1">
-                <a:solidFill>
-                  <a:srgbClr val="8A5A00"/>
-                </a:solidFill>
-                <a:latin typeface="Noto Sans JP"/>
-                <a:ea typeface="Noto Sans JP"/>
-              </a:rPr>
-              <a:t>目的語</a:t>
-            </a:r>
-          </a:p>
-        </p:txBody>
-      </p:sp>
-      <p:sp>
-        <p:nvSpPr>
-          <p:cNvPr id="22" name=""/>
-          <p:cNvSpPr txBox="1"/>
-          <p:nvPr/>
-        </p:nvSpPr>
-        <p:spPr>
-          <a:xfrm>
-            <a:off x="8886825" y="2057400"/>
+            <a:off x="6315075" y="2171700"/>
             <a:ext cx="638175" cy="466725"/>
           </a:xfrm>
           <a:prstGeom prst="rect">
@@ -4852,7 +4780,7 @@
             <a:r>
               <a:rPr sz="3300" b="1">
                 <a:solidFill>
-                  <a:srgbClr val="F0521E"/>
+                  <a:srgbClr val="1A2238"/>
                 </a:solidFill>
                 <a:latin typeface="Arial"/>
                 <a:ea typeface="Arial"/>
@@ -4864,13 +4792,13 @@
       </p:sp>
       <p:sp>
         <p:nvSpPr>
-          <p:cNvPr id="23" name=""/>
+          <p:cNvPr id="15" name=""/>
           <p:cNvSpPr txBox="1"/>
           <p:nvPr/>
         </p:nvSpPr>
         <p:spPr>
           <a:xfrm>
-            <a:off x="762000" y="2838450"/>
+            <a:off x="762000" y="3048000"/>
             <a:ext cx="1952625" cy="285750"/>
           </a:xfrm>
           <a:prstGeom prst="rect">
@@ -4899,14 +4827,14 @@
       </p:sp>
       <p:sp>
         <p:nvSpPr>
-          <p:cNvPr id="24" name=""/>
-          <p:cNvSpPr/>
-          <p:nvPr/>
-        </p:nvSpPr>
-        <p:spPr>
-          <a:xfrm>
-            <a:off x="2686050" y="2705100"/>
-            <a:ext cx="1428750" cy="552450"/>
+          <p:cNvPr id="16" name=""/>
+          <p:cNvSpPr/>
+          <p:nvPr/>
+        </p:nvSpPr>
+        <p:spPr>
+          <a:xfrm>
+            <a:off x="2781300" y="2952750"/>
+            <a:ext cx="1047750" cy="476250"/>
           </a:xfrm>
           <a:prstGeom prst="roundRect">
             <a:avLst>
@@ -4914,21 +4842,21 @@
             </a:avLst>
           </a:prstGeom>
           <a:solidFill>
-            <a:srgbClr val="D3F0E2"/>
-          </a:solidFill>
-          <a:ln/>
-        </p:spPr>
-      </p:sp>
-      <p:sp>
-        <p:nvSpPr>
-          <p:cNvPr id="25" name=""/>
+            <a:srgbClr val="D6E9FA"/>
+          </a:solidFill>
+          <a:ln/>
+        </p:spPr>
+      </p:sp>
+      <p:sp>
+        <p:nvSpPr>
+          <p:cNvPr id="17" name=""/>
           <p:cNvSpPr txBox="1"/>
           <p:nvPr/>
         </p:nvSpPr>
         <p:spPr>
           <a:xfrm>
-            <a:off x="3095625" y="2847975"/>
-            <a:ext cx="600075" cy="257175"/>
+            <a:off x="3019425" y="3067050"/>
+            <a:ext cx="581025" cy="238125"/>
           </a:xfrm>
           <a:prstGeom prst="rect">
             <a:avLst/>
@@ -4942,9 +4870,9 @@
           <a:p>
             <a:pPr algn="ctr"/>
             <a:r>
-              <a:rPr sz="1800" b="1">
+              <a:rPr sz="1650" b="1">
                 <a:solidFill>
-                  <a:srgbClr val="1F7A52"/>
+                  <a:srgbClr val="1F5F96"/>
                 </a:solidFill>
                 <a:latin typeface="Arial"/>
                 <a:ea typeface="Arial"/>
@@ -4954,243 +4882,111 @@
           </a:p>
         </p:txBody>
       </p:sp>
-      <p:sp>
-        <p:nvSpPr>
-          <p:cNvPr id="26" name=""/>
-          <p:cNvSpPr/>
-          <p:nvPr/>
-        </p:nvSpPr>
-        <p:spPr>
-          <a:xfrm>
-            <a:off x="4229100" y="2705100"/>
-            <a:ext cx="1428750" cy="552450"/>
-          </a:xfrm>
-          <a:prstGeom prst="roundRect">
-            <a:avLst>
-              <a:gd name="adj" fmla="val 50000"/>
-            </a:avLst>
-          </a:prstGeom>
-          <a:solidFill>
-            <a:srgbClr val="F0521E"/>
-          </a:solidFill>
-          <a:ln/>
-        </p:spPr>
-      </p:sp>
-      <p:sp>
-        <p:nvSpPr>
-          <p:cNvPr id="27" name=""/>
+      <p:pic>
+        <p:nvPicPr>
+          <p:cNvPr id="18" name="Image 8" descr="黄色いバナナ">    </p:cNvPr>
+          <p:cNvPicPr>
+            <a:picLocks noChangeAspect="1"/>
+          </p:cNvPicPr>
+          <p:nvPr/>
+        </p:nvPicPr>
+        <p:blipFill>
+          <a:blip r:embed="rId9"/>
+          <a:stretch>
+            <a:fillRect/>
+          </a:stretch>
+        </p:blipFill>
+        <p:spPr>
+          <a:xfrm>
+            <a:off x="4038600" y="2857500"/>
+            <a:ext cx="666750" cy="666750"/>
+          </a:xfrm>
+          <a:prstGeom prst="rect">
+            <a:avLst/>
+          </a:prstGeom>
+        </p:spPr>
+      </p:pic>
+      <p:pic>
+        <p:nvPicPr>
+          <p:cNvPr id="19" name="Image 9" descr="りんご">    </p:cNvPr>
+          <p:cNvPicPr>
+            <a:picLocks noChangeAspect="1"/>
+          </p:cNvPicPr>
+          <p:nvPr/>
+        </p:nvPicPr>
+        <p:blipFill>
+          <a:blip r:embed="rId10"/>
+          <a:stretch>
+            <a:fillRect/>
+          </a:stretch>
+        </p:blipFill>
+        <p:spPr>
+          <a:xfrm>
+            <a:off x="4914900" y="2857500"/>
+            <a:ext cx="666750" cy="666750"/>
+          </a:xfrm>
+          <a:prstGeom prst="rect">
+            <a:avLst/>
+          </a:prstGeom>
+        </p:spPr>
+      </p:pic>
+      <p:pic>
+        <p:nvPicPr>
+          <p:cNvPr id="20" name="Image 10" descr="緑のバナナ">    </p:cNvPr>
+          <p:cNvPicPr>
+            <a:picLocks noChangeAspect="1"/>
+          </p:cNvPicPr>
+          <p:nvPr/>
+        </p:nvPicPr>
+        <p:blipFill>
+          <a:blip r:embed="rId11"/>
+          <a:stretch>
+            <a:fillRect/>
+          </a:stretch>
+        </p:blipFill>
+        <p:spPr>
+          <a:xfrm>
+            <a:off x="5791200" y="2857500"/>
+            <a:ext cx="666750" cy="666750"/>
+          </a:xfrm>
+          <a:prstGeom prst="rect">
+            <a:avLst/>
+          </a:prstGeom>
+        </p:spPr>
+      </p:pic>
+      <p:pic>
+        <p:nvPicPr>
+          <p:cNvPr id="21" name="Image 11" descr="オレンジ">    </p:cNvPr>
+          <p:cNvPicPr>
+            <a:picLocks noChangeAspect="1"/>
+          </p:cNvPicPr>
+          <p:nvPr/>
+        </p:nvPicPr>
+        <p:blipFill>
+          <a:blip r:embed="rId12"/>
+          <a:stretch>
+            <a:fillRect/>
+          </a:stretch>
+        </p:blipFill>
+        <p:spPr>
+          <a:xfrm>
+            <a:off x="6667500" y="2857500"/>
+            <a:ext cx="666750" cy="666750"/>
+          </a:xfrm>
+          <a:prstGeom prst="rect">
+            <a:avLst/>
+          </a:prstGeom>
+        </p:spPr>
+      </p:pic>
+      <p:sp>
+        <p:nvSpPr>
+          <p:cNvPr id="22" name=""/>
           <p:cNvSpPr txBox="1"/>
           <p:nvPr/>
         </p:nvSpPr>
         <p:spPr>
           <a:xfrm>
-            <a:off x="4381500" y="2819400"/>
-            <a:ext cx="1133475" cy="333375"/>
-          </a:xfrm>
-          <a:prstGeom prst="rect">
-            <a:avLst/>
-          </a:prstGeom>
-          <a:noFill/>
-          <a:ln/>
-        </p:spPr>
-        <p:txBody>
-          <a:bodyPr wrap="square" lIns="0" tIns="0" rIns="0" bIns="0" anchor="ctr"/>
-          <a:lstStyle/>
-          <a:p>
-            <a:pPr algn="ctr"/>
-            <a:r>
-              <a:rPr sz="1800" b="1">
-                <a:solidFill>
-                  <a:srgbClr val="FFFFFF"/>
-                </a:solidFill>
-                <a:latin typeface="Noto Sans JP"/>
-                <a:ea typeface="Noto Sans JP"/>
-              </a:rPr>
-              <a:t>助動詞</a:t>
-            </a:r>
-          </a:p>
-        </p:txBody>
-      </p:sp>
-      <p:sp>
-        <p:nvSpPr>
-          <p:cNvPr id="28" name=""/>
-          <p:cNvSpPr/>
-          <p:nvPr/>
-        </p:nvSpPr>
-        <p:spPr>
-          <a:xfrm>
-            <a:off x="5772150" y="2705100"/>
-            <a:ext cx="1428750" cy="552450"/>
-          </a:xfrm>
-          <a:prstGeom prst="roundRect">
-            <a:avLst>
-              <a:gd name="adj" fmla="val 50000"/>
-            </a:avLst>
-          </a:prstGeom>
-          <a:solidFill>
-            <a:srgbClr val="D6E9FA"/>
-          </a:solidFill>
-          <a:ln/>
-        </p:spPr>
-      </p:sp>
-      <p:sp>
-        <p:nvSpPr>
-          <p:cNvPr id="29" name=""/>
-          <p:cNvSpPr txBox="1"/>
-          <p:nvPr/>
-        </p:nvSpPr>
-        <p:spPr>
-          <a:xfrm>
-            <a:off x="6048375" y="2819400"/>
-            <a:ext cx="866775" cy="333375"/>
-          </a:xfrm>
-          <a:prstGeom prst="rect">
-            <a:avLst/>
-          </a:prstGeom>
-          <a:noFill/>
-          <a:ln/>
-        </p:spPr>
-        <p:txBody>
-          <a:bodyPr wrap="square" lIns="0" tIns="0" rIns="0" bIns="0" anchor="ctr"/>
-          <a:lstStyle/>
-          <a:p>
-            <a:pPr algn="ctr"/>
-            <a:r>
-              <a:rPr sz="1800" b="1">
-                <a:solidFill>
-                  <a:srgbClr val="1F5F96"/>
-                </a:solidFill>
-                <a:latin typeface="Noto Sans JP"/>
-                <a:ea typeface="Noto Sans JP"/>
-              </a:rPr>
-              <a:t>主語</a:t>
-            </a:r>
-          </a:p>
-        </p:txBody>
-      </p:sp>
-      <p:sp>
-        <p:nvSpPr>
-          <p:cNvPr id="30" name=""/>
-          <p:cNvSpPr/>
-          <p:nvPr/>
-        </p:nvSpPr>
-        <p:spPr>
-          <a:xfrm>
-            <a:off x="7315200" y="2705100"/>
-            <a:ext cx="1428750" cy="552450"/>
-          </a:xfrm>
-          <a:prstGeom prst="roundRect">
-            <a:avLst>
-              <a:gd name="adj" fmla="val 50000"/>
-            </a:avLst>
-          </a:prstGeom>
-          <a:solidFill>
-            <a:srgbClr val="FFD9E2"/>
-          </a:solidFill>
-          <a:ln/>
-        </p:spPr>
-      </p:sp>
-      <p:sp>
-        <p:nvSpPr>
-          <p:cNvPr id="31" name=""/>
-          <p:cNvSpPr txBox="1"/>
-          <p:nvPr/>
-        </p:nvSpPr>
-        <p:spPr>
-          <a:xfrm>
-            <a:off x="7591425" y="2819400"/>
-            <a:ext cx="866775" cy="333375"/>
-          </a:xfrm>
-          <a:prstGeom prst="rect">
-            <a:avLst/>
-          </a:prstGeom>
-          <a:noFill/>
-          <a:ln/>
-        </p:spPr>
-        <p:txBody>
-          <a:bodyPr wrap="square" lIns="0" tIns="0" rIns="0" bIns="0" anchor="ctr"/>
-          <a:lstStyle/>
-          <a:p>
-            <a:pPr algn="ctr"/>
-            <a:r>
-              <a:rPr sz="1800" b="1">
-                <a:solidFill>
-                  <a:srgbClr val="B3304F"/>
-                </a:solidFill>
-                <a:latin typeface="Noto Sans JP"/>
-                <a:ea typeface="Noto Sans JP"/>
-              </a:rPr>
-              <a:t>動詞</a:t>
-            </a:r>
-          </a:p>
-        </p:txBody>
-      </p:sp>
-      <p:sp>
-        <p:nvSpPr>
-          <p:cNvPr id="32" name=""/>
-          <p:cNvSpPr/>
-          <p:nvPr/>
-        </p:nvSpPr>
-        <p:spPr>
-          <a:xfrm>
-            <a:off x="8858250" y="2705100"/>
-            <a:ext cx="1428750" cy="552450"/>
-          </a:xfrm>
-          <a:prstGeom prst="roundRect">
-            <a:avLst>
-              <a:gd name="adj" fmla="val 50000"/>
-            </a:avLst>
-          </a:prstGeom>
-          <a:solidFill>
-            <a:srgbClr val="FFEDB8"/>
-          </a:solidFill>
-          <a:ln/>
-        </p:spPr>
-      </p:sp>
-      <p:sp>
-        <p:nvSpPr>
-          <p:cNvPr id="33" name=""/>
-          <p:cNvSpPr txBox="1"/>
-          <p:nvPr/>
-        </p:nvSpPr>
-        <p:spPr>
-          <a:xfrm>
-            <a:off x="9010650" y="2819400"/>
-            <a:ext cx="1133475" cy="333375"/>
-          </a:xfrm>
-          <a:prstGeom prst="rect">
-            <a:avLst/>
-          </a:prstGeom>
-          <a:noFill/>
-          <a:ln/>
-        </p:spPr>
-        <p:txBody>
-          <a:bodyPr wrap="square" lIns="0" tIns="0" rIns="0" bIns="0" anchor="ctr"/>
-          <a:lstStyle/>
-          <a:p>
-            <a:pPr algn="ctr"/>
-            <a:r>
-              <a:rPr sz="1800" b="1">
-                <a:solidFill>
-                  <a:srgbClr val="8A5A00"/>
-                </a:solidFill>
-                <a:latin typeface="Noto Sans JP"/>
-                <a:ea typeface="Noto Sans JP"/>
-              </a:rPr>
-              <a:t>目的語</a:t>
-            </a:r>
-          </a:p>
-        </p:txBody>
-      </p:sp>
-      <p:sp>
-        <p:nvSpPr>
-          <p:cNvPr id="34" name=""/>
-          <p:cNvSpPr txBox="1"/>
-          <p:nvPr/>
-        </p:nvSpPr>
-        <p:spPr>
-          <a:xfrm>
-            <a:off x="10429875" y="2743200"/>
+            <a:off x="7572375" y="2952750"/>
             <a:ext cx="638175" cy="466725"/>
           </a:xfrm>
           <a:prstGeom prst="rect">
@@ -5207,7 +5003,7 @@
             <a:r>
               <a:rPr sz="3300" b="1">
                 <a:solidFill>
-                  <a:srgbClr val="F0521E"/>
+                  <a:srgbClr val="1A2238"/>
                 </a:solidFill>
                 <a:latin typeface="Arial"/>
                 <a:ea typeface="Arial"/>
@@ -5219,13 +5015,13 @@
       </p:sp>
       <p:sp>
         <p:nvSpPr>
-          <p:cNvPr id="35" name=""/>
+          <p:cNvPr id="23" name=""/>
           <p:cNvSpPr txBox="1"/>
           <p:nvPr/>
         </p:nvSpPr>
         <p:spPr>
           <a:xfrm>
-            <a:off x="762000" y="3524250"/>
+            <a:off x="762000" y="3829050"/>
             <a:ext cx="1028700" cy="285750"/>
           </a:xfrm>
           <a:prstGeom prst="rect">
@@ -5252,16 +5048,64 @@
           </a:p>
         </p:txBody>
       </p:sp>
-      <p:sp>
-        <p:nvSpPr>
-          <p:cNvPr id="36" name=""/>
-          <p:cNvSpPr/>
-          <p:nvPr/>
-        </p:nvSpPr>
-        <p:spPr>
-          <a:xfrm>
-            <a:off x="2686050" y="3390900"/>
-            <a:ext cx="1428750" cy="552450"/>
+      <p:pic>
+        <p:nvPicPr>
+          <p:cNvPr id="24" name="Image 12" descr="りんご">    </p:cNvPr>
+          <p:cNvPicPr>
+            <a:picLocks noChangeAspect="1"/>
+          </p:cNvPicPr>
+          <p:nvPr/>
+        </p:nvPicPr>
+        <p:blipFill>
+          <a:blip r:embed="rId13"/>
+          <a:stretch>
+            <a:fillRect/>
+          </a:stretch>
+        </p:blipFill>
+        <p:spPr>
+          <a:xfrm>
+            <a:off x="2781300" y="3638550"/>
+            <a:ext cx="666750" cy="666750"/>
+          </a:xfrm>
+          <a:prstGeom prst="rect">
+            <a:avLst/>
+          </a:prstGeom>
+        </p:spPr>
+      </p:pic>
+      <p:pic>
+        <p:nvPicPr>
+          <p:cNvPr id="25" name="Image 13" descr="黄色いバナナ">    </p:cNvPr>
+          <p:cNvPicPr>
+            <a:picLocks noChangeAspect="1"/>
+          </p:cNvPicPr>
+          <p:nvPr/>
+        </p:nvPicPr>
+        <p:blipFill>
+          <a:blip r:embed="rId14"/>
+          <a:stretch>
+            <a:fillRect/>
+          </a:stretch>
+        </p:blipFill>
+        <p:spPr>
+          <a:xfrm>
+            <a:off x="3657600" y="3638550"/>
+            <a:ext cx="666750" cy="666750"/>
+          </a:xfrm>
+          <a:prstGeom prst="rect">
+            <a:avLst/>
+          </a:prstGeom>
+        </p:spPr>
+      </p:pic>
+      <p:sp>
+        <p:nvSpPr>
+          <p:cNvPr id="26" name=""/>
+          <p:cNvSpPr/>
+          <p:nvPr/>
+        </p:nvSpPr>
+        <p:spPr>
+          <a:xfrm>
+            <a:off x="4533900" y="3733800"/>
+            <a:ext cx="1047750" cy="476250"/>
           </a:xfrm>
           <a:prstGeom prst="roundRect">
             <a:avLst>
@@ -5269,21 +5113,21 @@
             </a:avLst>
           </a:prstGeom>
           <a:solidFill>
-            <a:srgbClr val="D6E9FA"/>
-          </a:solidFill>
-          <a:ln/>
-        </p:spPr>
-      </p:sp>
-      <p:sp>
-        <p:nvSpPr>
-          <p:cNvPr id="37" name=""/>
+            <a:srgbClr val="1A2238"/>
+          </a:solidFill>
+          <a:ln/>
+        </p:spPr>
+      </p:sp>
+      <p:sp>
+        <p:nvSpPr>
+          <p:cNvPr id="27" name=""/>
           <p:cNvSpPr txBox="1"/>
           <p:nvPr/>
         </p:nvSpPr>
         <p:spPr>
           <a:xfrm>
-            <a:off x="2962275" y="3505200"/>
-            <a:ext cx="866775" cy="333375"/>
+            <a:off x="4619625" y="3848100"/>
+            <a:ext cx="876300" cy="238125"/>
           </a:xfrm>
           <a:prstGeom prst="rect">
             <a:avLst/>
@@ -5297,121 +5141,7 @@
           <a:p>
             <a:pPr algn="ctr"/>
             <a:r>
-              <a:rPr sz="1800" b="1">
-                <a:solidFill>
-                  <a:srgbClr val="1F5F96"/>
-                </a:solidFill>
-                <a:latin typeface="Noto Sans JP"/>
-                <a:ea typeface="Noto Sans JP"/>
-              </a:rPr>
-              <a:t>主語</a:t>
-            </a:r>
-          </a:p>
-        </p:txBody>
-      </p:sp>
-      <p:sp>
-        <p:nvSpPr>
-          <p:cNvPr id="38" name=""/>
-          <p:cNvSpPr/>
-          <p:nvPr/>
-        </p:nvSpPr>
-        <p:spPr>
-          <a:xfrm>
-            <a:off x="4229100" y="3390900"/>
-            <a:ext cx="1428750" cy="552450"/>
-          </a:xfrm>
-          <a:prstGeom prst="roundRect">
-            <a:avLst>
-              <a:gd name="adj" fmla="val 50000"/>
-            </a:avLst>
-          </a:prstGeom>
-          <a:solidFill>
-            <a:srgbClr val="F0521E"/>
-          </a:solidFill>
-          <a:ln/>
-        </p:spPr>
-      </p:sp>
-      <p:sp>
-        <p:nvSpPr>
-          <p:cNvPr id="39" name=""/>
-          <p:cNvSpPr txBox="1"/>
-          <p:nvPr/>
-        </p:nvSpPr>
-        <p:spPr>
-          <a:xfrm>
-            <a:off x="4381500" y="3505200"/>
-            <a:ext cx="1133475" cy="333375"/>
-          </a:xfrm>
-          <a:prstGeom prst="rect">
-            <a:avLst/>
-          </a:prstGeom>
-          <a:noFill/>
-          <a:ln/>
-        </p:spPr>
-        <p:txBody>
-          <a:bodyPr wrap="square" lIns="0" tIns="0" rIns="0" bIns="0" anchor="ctr"/>
-          <a:lstStyle/>
-          <a:p>
-            <a:pPr algn="ctr"/>
-            <a:r>
-              <a:rPr sz="1800" b="1">
-                <a:solidFill>
-                  <a:srgbClr val="FFFFFF"/>
-                </a:solidFill>
-                <a:latin typeface="Noto Sans JP"/>
-                <a:ea typeface="Noto Sans JP"/>
-              </a:rPr>
-              <a:t>助動詞</a:t>
-            </a:r>
-          </a:p>
-        </p:txBody>
-      </p:sp>
-      <p:sp>
-        <p:nvSpPr>
-          <p:cNvPr id="40" name=""/>
-          <p:cNvSpPr/>
-          <p:nvPr/>
-        </p:nvSpPr>
-        <p:spPr>
-          <a:xfrm>
-            <a:off x="5772150" y="3390900"/>
-            <a:ext cx="1428750" cy="552450"/>
-          </a:xfrm>
-          <a:prstGeom prst="roundRect">
-            <a:avLst>
-              <a:gd name="adj" fmla="val 50000"/>
-            </a:avLst>
-          </a:prstGeom>
-          <a:solidFill>
-            <a:srgbClr val="1A2238"/>
-          </a:solidFill>
-          <a:ln/>
-        </p:spPr>
-      </p:sp>
-      <p:sp>
-        <p:nvSpPr>
-          <p:cNvPr id="41" name=""/>
-          <p:cNvSpPr txBox="1"/>
-          <p:nvPr/>
-        </p:nvSpPr>
-        <p:spPr>
-          <a:xfrm>
-            <a:off x="6019800" y="3533775"/>
-            <a:ext cx="933450" cy="257175"/>
-          </a:xfrm>
-          <a:prstGeom prst="rect">
-            <a:avLst/>
-          </a:prstGeom>
-          <a:noFill/>
-          <a:ln/>
-        </p:spPr>
-        <p:txBody>
-          <a:bodyPr wrap="square" lIns="0" tIns="0" rIns="0" bIns="0" anchor="ctr"/>
-          <a:lstStyle/>
-          <a:p>
-            <a:pPr algn="ctr"/>
-            <a:r>
-              <a:rPr sz="1800" b="1">
+              <a:rPr sz="1650" b="1">
                 <a:solidFill>
                   <a:srgbClr val="FFFFFF"/>
                 </a:solidFill>
@@ -5423,152 +5153,110 @@
           </a:p>
         </p:txBody>
       </p:sp>
-      <p:sp>
-        <p:nvSpPr>
-          <p:cNvPr id="42" name=""/>
-          <p:cNvSpPr/>
-          <p:nvPr/>
-        </p:nvSpPr>
-        <p:spPr>
-          <a:xfrm>
-            <a:off x="7315200" y="3390900"/>
-            <a:ext cx="1428750" cy="552450"/>
-          </a:xfrm>
-          <a:prstGeom prst="roundRect">
-            <a:avLst>
-              <a:gd name="adj" fmla="val 50000"/>
-            </a:avLst>
-          </a:prstGeom>
-          <a:solidFill>
-            <a:srgbClr val="FFD9E2"/>
-          </a:solidFill>
-          <a:ln/>
-        </p:spPr>
-      </p:sp>
-      <p:sp>
-        <p:nvSpPr>
-          <p:cNvPr id="43" name=""/>
+      <p:pic>
+        <p:nvPicPr>
+          <p:cNvPr id="28" name="Image 14" descr="緑のバナナ">    </p:cNvPr>
+          <p:cNvPicPr>
+            <a:picLocks noChangeAspect="1"/>
+          </p:cNvPicPr>
+          <p:nvPr/>
+        </p:nvPicPr>
+        <p:blipFill>
+          <a:blip r:embed="rId15"/>
+          <a:stretch>
+            <a:fillRect/>
+          </a:stretch>
+        </p:blipFill>
+        <p:spPr>
+          <a:xfrm>
+            <a:off x="5791200" y="3638550"/>
+            <a:ext cx="666750" cy="666750"/>
+          </a:xfrm>
+          <a:prstGeom prst="rect">
+            <a:avLst/>
+          </a:prstGeom>
+        </p:spPr>
+      </p:pic>
+      <p:pic>
+        <p:nvPicPr>
+          <p:cNvPr id="29" name="Image 15" descr="オレンジ">    </p:cNvPr>
+          <p:cNvPicPr>
+            <a:picLocks noChangeAspect="1"/>
+          </p:cNvPicPr>
+          <p:nvPr/>
+        </p:nvPicPr>
+        <p:blipFill>
+          <a:blip r:embed="rId16"/>
+          <a:stretch>
+            <a:fillRect/>
+          </a:stretch>
+        </p:blipFill>
+        <p:spPr>
+          <a:xfrm>
+            <a:off x="6667500" y="3638550"/>
+            <a:ext cx="666750" cy="666750"/>
+          </a:xfrm>
+          <a:prstGeom prst="rect">
+            <a:avLst/>
+          </a:prstGeom>
+        </p:spPr>
+      </p:pic>
+      <p:sp>
+        <p:nvSpPr>
+          <p:cNvPr id="30" name=""/>
+          <p:cNvSpPr/>
+          <p:nvPr/>
+        </p:nvSpPr>
+        <p:spPr>
+          <a:xfrm>
+            <a:off x="762000" y="4533900"/>
+            <a:ext cx="10668000" cy="1790700"/>
+          </a:xfrm>
+          <a:prstGeom prst="roundRect">
+            <a:avLst>
+              <a:gd name="adj" fmla="val 14894"/>
+            </a:avLst>
+          </a:prstGeom>
+          <a:solidFill>
+            <a:srgbClr val="EAF2FB"/>
+          </a:solidFill>
+          <a:ln/>
+        </p:spPr>
+      </p:sp>
+      <p:pic>
+        <p:nvPicPr>
+          <p:cNvPr id="31" name="Image 16" descr="りんご">    </p:cNvPr>
+          <p:cNvPicPr>
+            <a:picLocks noChangeAspect="1"/>
+          </p:cNvPicPr>
+          <p:nvPr/>
+        </p:nvPicPr>
+        <p:blipFill>
+          <a:blip r:embed="rId17"/>
+          <a:stretch>
+            <a:fillRect/>
+          </a:stretch>
+        </p:blipFill>
+        <p:spPr>
+          <a:xfrm>
+            <a:off x="3267075" y="4752975"/>
+            <a:ext cx="628650" cy="628650"/>
+          </a:xfrm>
+          <a:prstGeom prst="rect">
+            <a:avLst/>
+          </a:prstGeom>
+        </p:spPr>
+      </p:pic>
+      <p:sp>
+        <p:nvSpPr>
+          <p:cNvPr id="32" name=""/>
           <p:cNvSpPr txBox="1"/>
           <p:nvPr/>
         </p:nvSpPr>
         <p:spPr>
           <a:xfrm>
-            <a:off x="7591425" y="3505200"/>
-            <a:ext cx="866775" cy="333375"/>
-          </a:xfrm>
-          <a:prstGeom prst="rect">
-            <a:avLst/>
-          </a:prstGeom>
-          <a:noFill/>
-          <a:ln/>
-        </p:spPr>
-        <p:txBody>
-          <a:bodyPr wrap="square" lIns="0" tIns="0" rIns="0" bIns="0" anchor="ctr"/>
-          <a:lstStyle/>
-          <a:p>
-            <a:pPr algn="ctr"/>
-            <a:r>
-              <a:rPr sz="1800" b="1">
-                <a:solidFill>
-                  <a:srgbClr val="B3304F"/>
-                </a:solidFill>
-                <a:latin typeface="Noto Sans JP"/>
-                <a:ea typeface="Noto Sans JP"/>
-              </a:rPr>
-              <a:t>動詞</a:t>
-            </a:r>
-          </a:p>
-        </p:txBody>
-      </p:sp>
-      <p:sp>
-        <p:nvSpPr>
-          <p:cNvPr id="44" name=""/>
-          <p:cNvSpPr/>
-          <p:nvPr/>
-        </p:nvSpPr>
-        <p:spPr>
-          <a:xfrm>
-            <a:off x="8858250" y="3390900"/>
-            <a:ext cx="1428750" cy="552450"/>
-          </a:xfrm>
-          <a:prstGeom prst="roundRect">
-            <a:avLst>
-              <a:gd name="adj" fmla="val 50000"/>
-            </a:avLst>
-          </a:prstGeom>
-          <a:solidFill>
-            <a:srgbClr val="FFEDB8"/>
-          </a:solidFill>
-          <a:ln/>
-        </p:spPr>
-      </p:sp>
-      <p:sp>
-        <p:nvSpPr>
-          <p:cNvPr id="45" name=""/>
-          <p:cNvSpPr txBox="1"/>
-          <p:nvPr/>
-        </p:nvSpPr>
-        <p:spPr>
-          <a:xfrm>
-            <a:off x="9010650" y="3505200"/>
-            <a:ext cx="1133475" cy="333375"/>
-          </a:xfrm>
-          <a:prstGeom prst="rect">
-            <a:avLst/>
-          </a:prstGeom>
-          <a:noFill/>
-          <a:ln/>
-        </p:spPr>
-        <p:txBody>
-          <a:bodyPr wrap="square" lIns="0" tIns="0" rIns="0" bIns="0" anchor="ctr"/>
-          <a:lstStyle/>
-          <a:p>
-            <a:pPr algn="ctr"/>
-            <a:r>
-              <a:rPr sz="1800" b="1">
-                <a:solidFill>
-                  <a:srgbClr val="8A5A00"/>
-                </a:solidFill>
-                <a:latin typeface="Noto Sans JP"/>
-                <a:ea typeface="Noto Sans JP"/>
-              </a:rPr>
-              <a:t>目的語</a:t>
-            </a:r>
-          </a:p>
-        </p:txBody>
-      </p:sp>
-      <p:sp>
-        <p:nvSpPr>
-          <p:cNvPr id="46" name=""/>
-          <p:cNvSpPr/>
-          <p:nvPr/>
-        </p:nvSpPr>
-        <p:spPr>
-          <a:xfrm>
-            <a:off x="762000" y="4210050"/>
-            <a:ext cx="10668000" cy="2114550"/>
-          </a:xfrm>
-          <a:prstGeom prst="roundRect">
-            <a:avLst>
-              <a:gd name="adj" fmla="val 12613"/>
-            </a:avLst>
-          </a:prstGeom>
-          <a:solidFill>
-            <a:srgbClr val="EAF2FB"/>
-          </a:solidFill>
-          <a:ln/>
-        </p:spPr>
-      </p:sp>
-      <p:sp>
-        <p:nvSpPr>
-          <p:cNvPr id="47" name=""/>
-          <p:cNvSpPr txBox="1"/>
-          <p:nvPr/>
-        </p:nvSpPr>
-        <p:spPr>
-          <a:xfrm>
-            <a:off x="3257550" y="4495800"/>
-            <a:ext cx="1219200" cy="714375"/>
+            <a:off x="3543300" y="5419725"/>
+            <a:ext cx="428625" cy="295275"/>
           </a:xfrm>
           <a:prstGeom prst="rect">
             <a:avLst/>
@@ -5582,42 +5270,7 @@
           <a:p>
             <a:pPr/>
             <a:r>
-              <a:rPr sz="4800" b="1">
-                <a:solidFill>
-                  <a:srgbClr val="1A2238"/>
-                </a:solidFill>
-                <a:latin typeface="Noto Sans JP"/>
-                <a:ea typeface="Noto Sans JP"/>
-              </a:rPr>
-              <a:t>🙋</a:t>
-            </a:r>
-          </a:p>
-        </p:txBody>
-      </p:sp>
-      <p:sp>
-        <p:nvSpPr>
-          <p:cNvPr id="48" name=""/>
-          <p:cNvSpPr txBox="1"/>
-          <p:nvPr/>
-        </p:nvSpPr>
-        <p:spPr>
-          <a:xfrm>
-            <a:off x="3600450" y="5267325"/>
-            <a:ext cx="438150" cy="314325"/>
-          </a:xfrm>
-          <a:prstGeom prst="rect">
-            <a:avLst/>
-          </a:prstGeom>
-          <a:noFill/>
-          <a:ln/>
-        </p:spPr>
-        <p:txBody>
-          <a:bodyPr wrap="square" lIns="0" tIns="0" rIns="0" bIns="0" anchor="ctr"/>
-          <a:lstStyle/>
-          <a:p>
-            <a:pPr/>
-            <a:r>
-              <a:rPr sz="2250" b="1">
+              <a:rPr sz="2100" b="1">
                 <a:solidFill>
                   <a:srgbClr val="1A2238"/>
                 </a:solidFill>
@@ -5631,14 +5284,14 @@
       </p:sp>
       <p:sp>
         <p:nvSpPr>
-          <p:cNvPr id="49" name=""/>
-          <p:cNvSpPr/>
-          <p:nvPr/>
-        </p:nvSpPr>
-        <p:spPr>
-          <a:xfrm>
-            <a:off x="3028950" y="5648325"/>
-            <a:ext cx="1219200" cy="381000"/>
+          <p:cNvPr id="33" name=""/>
+          <p:cNvSpPr/>
+          <p:nvPr/>
+        </p:nvSpPr>
+        <p:spPr>
+          <a:xfrm>
+            <a:off x="3009900" y="5762625"/>
+            <a:ext cx="1143000" cy="342900"/>
           </a:xfrm>
           <a:prstGeom prst="roundRect">
             <a:avLst>
@@ -5646,21 +5299,21 @@
             </a:avLst>
           </a:prstGeom>
           <a:solidFill>
-            <a:srgbClr val="D6E9FA"/>
-          </a:solidFill>
-          <a:ln/>
-        </p:spPr>
-      </p:sp>
-      <p:sp>
-        <p:nvSpPr>
-          <p:cNvPr id="50" name=""/>
+            <a:srgbClr val="FFDDE0"/>
+          </a:solidFill>
+          <a:ln/>
+        </p:spPr>
+      </p:sp>
+      <p:sp>
+        <p:nvSpPr>
+          <p:cNvPr id="34" name=""/>
           <p:cNvSpPr txBox="1"/>
           <p:nvPr/>
         </p:nvSpPr>
         <p:spPr>
           <a:xfrm>
-            <a:off x="3267075" y="5715000"/>
-            <a:ext cx="733425" cy="247650"/>
+            <a:off x="3219450" y="5819775"/>
+            <a:ext cx="714375" cy="238125"/>
           </a:xfrm>
           <a:prstGeom prst="rect">
             <a:avLst/>
@@ -5674,9 +5327,9 @@
           <a:p>
             <a:pPr algn="ctr"/>
             <a:r>
-              <a:rPr sz="1350" b="1">
+              <a:rPr sz="1300" b="1">
                 <a:solidFill>
-                  <a:srgbClr val="1F5F96"/>
+                  <a:srgbClr val="C42B3B"/>
                 </a:solidFill>
                 <a:latin typeface="Noto Sans JP"/>
                 <a:ea typeface="Noto Sans JP"/>
@@ -5686,16 +5339,40 @@
           </a:p>
         </p:txBody>
       </p:sp>
-      <p:sp>
-        <p:nvSpPr>
-          <p:cNvPr id="51" name=""/>
+      <p:pic>
+        <p:nvPicPr>
+          <p:cNvPr id="35" name="Image 17" descr="黄色いバナナ">    </p:cNvPr>
+          <p:cNvPicPr>
+            <a:picLocks noChangeAspect="1"/>
+          </p:cNvPicPr>
+          <p:nvPr/>
+        </p:nvPicPr>
+        <p:blipFill>
+          <a:blip r:embed="rId18"/>
+          <a:stretch>
+            <a:fillRect/>
+          </a:stretch>
+        </p:blipFill>
+        <p:spPr>
+          <a:xfrm>
+            <a:off x="4943475" y="4752975"/>
+            <a:ext cx="628650" cy="628650"/>
+          </a:xfrm>
+          <a:prstGeom prst="rect">
+            <a:avLst/>
+          </a:prstGeom>
+        </p:spPr>
+      </p:pic>
+      <p:sp>
+        <p:nvSpPr>
+          <p:cNvPr id="36" name=""/>
           <p:cNvSpPr txBox="1"/>
           <p:nvPr/>
         </p:nvSpPr>
         <p:spPr>
           <a:xfrm>
-            <a:off x="4895850" y="4495800"/>
-            <a:ext cx="1219200" cy="714375"/>
+            <a:off x="5029200" y="5419725"/>
+            <a:ext cx="866775" cy="295275"/>
           </a:xfrm>
           <a:prstGeom prst="rect">
             <a:avLst/>
@@ -5709,42 +5386,7 @@
           <a:p>
             <a:pPr/>
             <a:r>
-              <a:rPr sz="4800" b="1">
-                <a:solidFill>
-                  <a:srgbClr val="1A2238"/>
-                </a:solidFill>
-                <a:latin typeface="Noto Sans JP"/>
-                <a:ea typeface="Noto Sans JP"/>
-              </a:rPr>
-              <a:t>💪</a:t>
-            </a:r>
-          </a:p>
-        </p:txBody>
-      </p:sp>
-      <p:sp>
-        <p:nvSpPr>
-          <p:cNvPr id="52" name=""/>
-          <p:cNvSpPr txBox="1"/>
-          <p:nvPr/>
-        </p:nvSpPr>
-        <p:spPr>
-          <a:xfrm>
-            <a:off x="5029200" y="5267325"/>
-            <a:ext cx="904875" cy="314325"/>
-          </a:xfrm>
-          <a:prstGeom prst="rect">
-            <a:avLst/>
-          </a:prstGeom>
-          <a:noFill/>
-          <a:ln/>
-        </p:spPr>
-        <p:txBody>
-          <a:bodyPr wrap="square" lIns="0" tIns="0" rIns="0" bIns="0" anchor="ctr"/>
-          <a:lstStyle/>
-          <a:p>
-            <a:pPr/>
-            <a:r>
-              <a:rPr sz="2250" b="1">
+              <a:rPr sz="2100" b="1">
                 <a:solidFill>
                   <a:srgbClr val="1A2238"/>
                 </a:solidFill>
@@ -5758,14 +5400,14 @@
       </p:sp>
       <p:sp>
         <p:nvSpPr>
-          <p:cNvPr id="53" name=""/>
-          <p:cNvSpPr/>
-          <p:nvPr/>
-        </p:nvSpPr>
-        <p:spPr>
-          <a:xfrm>
-            <a:off x="4667250" y="5648325"/>
-            <a:ext cx="1219200" cy="381000"/>
+          <p:cNvPr id="37" name=""/>
+          <p:cNvSpPr/>
+          <p:nvPr/>
+        </p:nvSpPr>
+        <p:spPr>
+          <a:xfrm>
+            <a:off x="4686300" y="5762625"/>
+            <a:ext cx="1143000" cy="342900"/>
           </a:xfrm>
           <a:prstGeom prst="roundRect">
             <a:avLst>
@@ -5773,21 +5415,21 @@
             </a:avLst>
           </a:prstGeom>
           <a:solidFill>
-            <a:srgbClr val="F0521E"/>
-          </a:solidFill>
-          <a:ln/>
-        </p:spPr>
-      </p:sp>
-      <p:sp>
-        <p:nvSpPr>
-          <p:cNvPr id="54" name=""/>
+            <a:srgbClr val="FFE98A"/>
+          </a:solidFill>
+          <a:ln/>
+        </p:spPr>
+      </p:sp>
+      <p:sp>
+        <p:nvSpPr>
+          <p:cNvPr id="38" name=""/>
           <p:cNvSpPr txBox="1"/>
           <p:nvPr/>
         </p:nvSpPr>
         <p:spPr>
           <a:xfrm>
-            <a:off x="4810125" y="5715000"/>
-            <a:ext cx="933450" cy="247650"/>
+            <a:off x="4810125" y="5819775"/>
+            <a:ext cx="904875" cy="238125"/>
           </a:xfrm>
           <a:prstGeom prst="rect">
             <a:avLst/>
@@ -5801,9 +5443,9 @@
           <a:p>
             <a:pPr algn="ctr"/>
             <a:r>
-              <a:rPr sz="1350" b="1">
+              <a:rPr sz="1300" b="1">
                 <a:solidFill>
-                  <a:srgbClr val="FFFFFF"/>
+                  <a:srgbClr val="7A5A00"/>
                 </a:solidFill>
                 <a:latin typeface="Noto Sans JP"/>
                 <a:ea typeface="Noto Sans JP"/>
@@ -5813,16 +5455,40 @@
           </a:p>
         </p:txBody>
       </p:sp>
-      <p:sp>
-        <p:nvSpPr>
-          <p:cNvPr id="55" name=""/>
+      <p:pic>
+        <p:nvPicPr>
+          <p:cNvPr id="39" name="Image 18" descr="緑のバナナ">    </p:cNvPr>
+          <p:cNvPicPr>
+            <a:picLocks noChangeAspect="1"/>
+          </p:cNvPicPr>
+          <p:nvPr/>
+        </p:nvPicPr>
+        <p:blipFill>
+          <a:blip r:embed="rId19"/>
+          <a:stretch>
+            <a:fillRect/>
+          </a:stretch>
+        </p:blipFill>
+        <p:spPr>
+          <a:xfrm>
+            <a:off x="6619875" y="4752975"/>
+            <a:ext cx="628650" cy="628650"/>
+          </a:xfrm>
+          <a:prstGeom prst="rect">
+            <a:avLst/>
+          </a:prstGeom>
+        </p:spPr>
+      </p:pic>
+      <p:sp>
+        <p:nvSpPr>
+          <p:cNvPr id="40" name=""/>
           <p:cNvSpPr txBox="1"/>
           <p:nvPr/>
         </p:nvSpPr>
         <p:spPr>
           <a:xfrm>
-            <a:off x="6534150" y="4495800"/>
-            <a:ext cx="1219200" cy="714375"/>
+            <a:off x="6743700" y="5419725"/>
+            <a:ext cx="790575" cy="295275"/>
           </a:xfrm>
           <a:prstGeom prst="rect">
             <a:avLst/>
@@ -5836,42 +5502,7 @@
           <a:p>
             <a:pPr/>
             <a:r>
-              <a:rPr sz="4800" b="1">
-                <a:solidFill>
-                  <a:srgbClr val="1A2238"/>
-                </a:solidFill>
-                <a:latin typeface="Noto Sans JP"/>
-                <a:ea typeface="Noto Sans JP"/>
-              </a:rPr>
-              <a:t>😋</a:t>
-            </a:r>
-          </a:p>
-        </p:txBody>
-      </p:sp>
-      <p:sp>
-        <p:nvSpPr>
-          <p:cNvPr id="56" name=""/>
-          <p:cNvSpPr txBox="1"/>
-          <p:nvPr/>
-        </p:nvSpPr>
-        <p:spPr>
-          <a:xfrm>
-            <a:off x="6705600" y="5267325"/>
-            <a:ext cx="819150" cy="314325"/>
-          </a:xfrm>
-          <a:prstGeom prst="rect">
-            <a:avLst/>
-          </a:prstGeom>
-          <a:noFill/>
-          <a:ln/>
-        </p:spPr>
-        <p:txBody>
-          <a:bodyPr wrap="square" lIns="0" tIns="0" rIns="0" bIns="0" anchor="ctr"/>
-          <a:lstStyle/>
-          <a:p>
-            <a:pPr/>
-            <a:r>
-              <a:rPr sz="2250" b="1">
+              <a:rPr sz="2100" b="1">
                 <a:solidFill>
                   <a:srgbClr val="1A2238"/>
                 </a:solidFill>
@@ -5885,14 +5516,14 @@
       </p:sp>
       <p:sp>
         <p:nvSpPr>
-          <p:cNvPr id="57" name=""/>
-          <p:cNvSpPr/>
-          <p:nvPr/>
-        </p:nvSpPr>
-        <p:spPr>
-          <a:xfrm>
-            <a:off x="6305550" y="5648325"/>
-            <a:ext cx="1219200" cy="381000"/>
+          <p:cNvPr id="41" name=""/>
+          <p:cNvSpPr/>
+          <p:nvPr/>
+        </p:nvSpPr>
+        <p:spPr>
+          <a:xfrm>
+            <a:off x="6362700" y="5762625"/>
+            <a:ext cx="1143000" cy="342900"/>
           </a:xfrm>
           <a:prstGeom prst="roundRect">
             <a:avLst>
@@ -5900,21 +5531,21 @@
             </a:avLst>
           </a:prstGeom>
           <a:solidFill>
-            <a:srgbClr val="FFD9E2"/>
-          </a:solidFill>
-          <a:ln/>
-        </p:spPr>
-      </p:sp>
-      <p:sp>
-        <p:nvSpPr>
-          <p:cNvPr id="58" name=""/>
+            <a:srgbClr val="DDF1C6"/>
+          </a:solidFill>
+          <a:ln/>
+        </p:spPr>
+      </p:sp>
+      <p:sp>
+        <p:nvSpPr>
+          <p:cNvPr id="42" name=""/>
           <p:cNvSpPr txBox="1"/>
           <p:nvPr/>
         </p:nvSpPr>
         <p:spPr>
           <a:xfrm>
-            <a:off x="6543675" y="5715000"/>
-            <a:ext cx="733425" cy="247650"/>
+            <a:off x="6572250" y="5819775"/>
+            <a:ext cx="714375" cy="238125"/>
           </a:xfrm>
           <a:prstGeom prst="rect">
             <a:avLst/>
@@ -5928,9 +5559,9 @@
           <a:p>
             <a:pPr algn="ctr"/>
             <a:r>
-              <a:rPr sz="1350" b="1">
+              <a:rPr sz="1300" b="1">
                 <a:solidFill>
-                  <a:srgbClr val="B3304F"/>
+                  <a:srgbClr val="3D7A1A"/>
                 </a:solidFill>
                 <a:latin typeface="Noto Sans JP"/>
                 <a:ea typeface="Noto Sans JP"/>
@@ -5940,16 +5571,40 @@
           </a:p>
         </p:txBody>
       </p:sp>
-      <p:sp>
-        <p:nvSpPr>
-          <p:cNvPr id="59" name=""/>
+      <p:pic>
+        <p:nvPicPr>
+          <p:cNvPr id="43" name="Image 19" descr="オレンジ">    </p:cNvPr>
+          <p:cNvPicPr>
+            <a:picLocks noChangeAspect="1"/>
+          </p:cNvPicPr>
+          <p:nvPr/>
+        </p:nvPicPr>
+        <p:blipFill>
+          <a:blip r:embed="rId20"/>
+          <a:stretch>
+            <a:fillRect/>
+          </a:stretch>
+        </p:blipFill>
+        <p:spPr>
+          <a:xfrm>
+            <a:off x="8296275" y="4752975"/>
+            <a:ext cx="628650" cy="628650"/>
+          </a:xfrm>
+          <a:prstGeom prst="rect">
+            <a:avLst/>
+          </a:prstGeom>
+        </p:spPr>
+      </p:pic>
+      <p:sp>
+        <p:nvSpPr>
+          <p:cNvPr id="44" name=""/>
           <p:cNvSpPr txBox="1"/>
           <p:nvPr/>
         </p:nvSpPr>
         <p:spPr>
           <a:xfrm>
-            <a:off x="8172450" y="4495800"/>
-            <a:ext cx="1219200" cy="714375"/>
+            <a:off x="8229600" y="5419725"/>
+            <a:ext cx="1228725" cy="295275"/>
           </a:xfrm>
           <a:prstGeom prst="rect">
             <a:avLst/>
@@ -5963,42 +5618,7 @@
           <a:p>
             <a:pPr/>
             <a:r>
-              <a:rPr sz="4800" b="1">
-                <a:solidFill>
-                  <a:srgbClr val="1A2238"/>
-                </a:solidFill>
-                <a:latin typeface="Noto Sans JP"/>
-                <a:ea typeface="Noto Sans JP"/>
-              </a:rPr>
-              <a:t>🍣</a:t>
-            </a:r>
-          </a:p>
-        </p:txBody>
-      </p:sp>
-      <p:sp>
-        <p:nvSpPr>
-          <p:cNvPr id="60" name=""/>
-          <p:cNvSpPr txBox="1"/>
-          <p:nvPr/>
-        </p:nvSpPr>
-        <p:spPr>
-          <a:xfrm>
-            <a:off x="8143875" y="5267325"/>
-            <a:ext cx="1295400" cy="314325"/>
-          </a:xfrm>
-          <a:prstGeom prst="rect">
-            <a:avLst/>
-          </a:prstGeom>
-          <a:noFill/>
-          <a:ln/>
-        </p:spPr>
-        <p:txBody>
-          <a:bodyPr wrap="square" lIns="0" tIns="0" rIns="0" bIns="0" anchor="ctr"/>
-          <a:lstStyle/>
-          <a:p>
-            <a:pPr/>
-            <a:r>
-              <a:rPr sz="2250" b="1">
+              <a:rPr sz="2100" b="1">
                 <a:solidFill>
                   <a:srgbClr val="1A2238"/>
                 </a:solidFill>
@@ -6012,14 +5632,14 @@
       </p:sp>
       <p:sp>
         <p:nvSpPr>
-          <p:cNvPr id="61" name=""/>
-          <p:cNvSpPr/>
-          <p:nvPr/>
-        </p:nvSpPr>
-        <p:spPr>
-          <a:xfrm>
-            <a:off x="7943850" y="5648325"/>
-            <a:ext cx="1219200" cy="381000"/>
+          <p:cNvPr id="45" name=""/>
+          <p:cNvSpPr/>
+          <p:nvPr/>
+        </p:nvSpPr>
+        <p:spPr>
+          <a:xfrm>
+            <a:off x="8039100" y="5762625"/>
+            <a:ext cx="1143000" cy="342900"/>
           </a:xfrm>
           <a:prstGeom prst="roundRect">
             <a:avLst>
@@ -6027,21 +5647,21 @@
             </a:avLst>
           </a:prstGeom>
           <a:solidFill>
-            <a:srgbClr val="FFEDB8"/>
-          </a:solidFill>
-          <a:ln/>
-        </p:spPr>
-      </p:sp>
-      <p:sp>
-        <p:nvSpPr>
-          <p:cNvPr id="62" name=""/>
+            <a:srgbClr val="FFE0C0"/>
+          </a:solidFill>
+          <a:ln/>
+        </p:spPr>
+      </p:sp>
+      <p:sp>
+        <p:nvSpPr>
+          <p:cNvPr id="46" name=""/>
           <p:cNvSpPr txBox="1"/>
           <p:nvPr/>
         </p:nvSpPr>
         <p:spPr>
           <a:xfrm>
-            <a:off x="8086725" y="5715000"/>
-            <a:ext cx="933450" cy="247650"/>
+            <a:off x="8162925" y="5819775"/>
+            <a:ext cx="904875" cy="238125"/>
           </a:xfrm>
           <a:prstGeom prst="rect">
             <a:avLst/>
@@ -6055,9 +5675,9 @@
           <a:p>
             <a:pPr algn="ctr"/>
             <a:r>
-              <a:rPr sz="1350" b="1">
+              <a:rPr sz="1300" b="1">
                 <a:solidFill>
-                  <a:srgbClr val="8A5A00"/>
+                  <a:srgbClr val="B65300"/>
                 </a:solidFill>
                 <a:latin typeface="Noto Sans JP"/>
                 <a:ea typeface="Noto Sans JP"/>
@@ -6156,16 +5776,40 @@
           </a:p>
         </p:txBody>
       </p:sp>
-      <p:sp>
-        <p:nvSpPr>
-          <p:cNvPr id="4" name=""/>
-          <p:cNvSpPr/>
-          <p:nvPr/>
-        </p:nvSpPr>
-        <p:spPr>
-          <a:xfrm>
-            <a:off x="762000" y="1333500"/>
-            <a:ext cx="1714500" cy="762000"/>
+      <p:pic>
+        <p:nvPicPr>
+          <p:cNvPr id="4" name="Image 0" descr="りんご">    </p:cNvPr>
+          <p:cNvPicPr>
+            <a:picLocks noChangeAspect="1"/>
+          </p:cNvPicPr>
+          <p:nvPr/>
+        </p:nvPicPr>
+        <p:blipFill>
+          <a:blip r:embed="rId1"/>
+          <a:stretch>
+            <a:fillRect/>
+          </a:stretch>
+        </p:blipFill>
+        <p:spPr>
+          <a:xfrm>
+            <a:off x="981075" y="1276350"/>
+            <a:ext cx="990600" cy="990600"/>
+          </a:xfrm>
+          <a:prstGeom prst="rect">
+            <a:avLst/>
+          </a:prstGeom>
+        </p:spPr>
+      </p:pic>
+      <p:sp>
+        <p:nvSpPr>
+          <p:cNvPr id="5" name=""/>
+          <p:cNvSpPr/>
+          <p:nvPr/>
+        </p:nvSpPr>
+        <p:spPr>
+          <a:xfrm>
+            <a:off x="885825" y="2362200"/>
+            <a:ext cx="1181100" cy="361950"/>
           </a:xfrm>
           <a:prstGeom prst="roundRect">
             <a:avLst>
@@ -6173,21 +5817,21 @@
             </a:avLst>
           </a:prstGeom>
           <a:solidFill>
-            <a:srgbClr val="D6E9FA"/>
-          </a:solidFill>
-          <a:ln/>
-        </p:spPr>
-      </p:sp>
-      <p:sp>
-        <p:nvSpPr>
-          <p:cNvPr id="5" name=""/>
+            <a:srgbClr val="FFDDE0"/>
+          </a:solidFill>
+          <a:ln/>
+        </p:spPr>
+      </p:sp>
+      <p:sp>
+        <p:nvSpPr>
+          <p:cNvPr id="6" name=""/>
           <p:cNvSpPr txBox="1"/>
           <p:nvPr/>
         </p:nvSpPr>
         <p:spPr>
           <a:xfrm>
-            <a:off x="1095375" y="1495425"/>
-            <a:ext cx="1047750" cy="438150"/>
+            <a:off x="1095375" y="2419350"/>
+            <a:ext cx="762000" cy="257175"/>
           </a:xfrm>
           <a:prstGeom prst="rect">
             <a:avLst/>
@@ -6201,9 +5845,9 @@
           <a:p>
             <a:pPr algn="ctr"/>
             <a:r>
-              <a:rPr sz="2400" b="1">
+              <a:rPr sz="1450" b="1">
                 <a:solidFill>
-                  <a:srgbClr val="1F5F96"/>
+                  <a:srgbClr val="C42B3B"/>
                 </a:solidFill>
                 <a:latin typeface="Noto Sans JP"/>
                 <a:ea typeface="Noto Sans JP"/>
@@ -6213,16 +5857,40 @@
           </a:p>
         </p:txBody>
       </p:sp>
-      <p:sp>
-        <p:nvSpPr>
-          <p:cNvPr id="6" name=""/>
-          <p:cNvSpPr/>
-          <p:nvPr/>
-        </p:nvSpPr>
-        <p:spPr>
-          <a:xfrm>
-            <a:off x="2609850" y="1333500"/>
-            <a:ext cx="1714500" cy="762000"/>
+      <p:pic>
+        <p:nvPicPr>
+          <p:cNvPr id="7" name="Image 1" descr="黄色いバナナ">    </p:cNvPr>
+          <p:cNvPicPr>
+            <a:picLocks noChangeAspect="1"/>
+          </p:cNvPicPr>
+          <p:nvPr/>
+        </p:nvPicPr>
+        <p:blipFill>
+          <a:blip r:embed="rId2"/>
+          <a:stretch>
+            <a:fillRect/>
+          </a:stretch>
+        </p:blipFill>
+        <p:spPr>
+          <a:xfrm>
+            <a:off x="2581275" y="1276350"/>
+            <a:ext cx="990600" cy="990600"/>
+          </a:xfrm>
+          <a:prstGeom prst="rect">
+            <a:avLst/>
+          </a:prstGeom>
+        </p:spPr>
+      </p:pic>
+      <p:sp>
+        <p:nvSpPr>
+          <p:cNvPr id="8" name=""/>
+          <p:cNvSpPr/>
+          <p:nvPr/>
+        </p:nvSpPr>
+        <p:spPr>
+          <a:xfrm>
+            <a:off x="2486025" y="2362200"/>
+            <a:ext cx="1181100" cy="361950"/>
           </a:xfrm>
           <a:prstGeom prst="roundRect">
             <a:avLst>
@@ -6230,21 +5898,21 @@
             </a:avLst>
           </a:prstGeom>
           <a:solidFill>
-            <a:srgbClr val="F0521E"/>
-          </a:solidFill>
-          <a:ln/>
-        </p:spPr>
-      </p:sp>
-      <p:sp>
-        <p:nvSpPr>
-          <p:cNvPr id="7" name=""/>
+            <a:srgbClr val="FFE98A"/>
+          </a:solidFill>
+          <a:ln/>
+        </p:spPr>
+      </p:sp>
+      <p:sp>
+        <p:nvSpPr>
+          <p:cNvPr id="9" name=""/>
           <p:cNvSpPr txBox="1"/>
           <p:nvPr/>
         </p:nvSpPr>
         <p:spPr>
           <a:xfrm>
-            <a:off x="2771775" y="1495425"/>
-            <a:ext cx="1390650" cy="438150"/>
+            <a:off x="2590800" y="2419350"/>
+            <a:ext cx="971550" cy="257175"/>
           </a:xfrm>
           <a:prstGeom prst="rect">
             <a:avLst/>
@@ -6258,9 +5926,9 @@
           <a:p>
             <a:pPr algn="ctr"/>
             <a:r>
-              <a:rPr sz="2400" b="1">
+              <a:rPr sz="1450" b="1">
                 <a:solidFill>
-                  <a:srgbClr val="FFFFFF"/>
+                  <a:srgbClr val="7A5A00"/>
                 </a:solidFill>
                 <a:latin typeface="Noto Sans JP"/>
                 <a:ea typeface="Noto Sans JP"/>
@@ -6270,16 +5938,40 @@
           </a:p>
         </p:txBody>
       </p:sp>
-      <p:sp>
-        <p:nvSpPr>
-          <p:cNvPr id="8" name=""/>
-          <p:cNvSpPr/>
-          <p:nvPr/>
-        </p:nvSpPr>
-        <p:spPr>
-          <a:xfrm>
-            <a:off x="4457700" y="1333500"/>
-            <a:ext cx="1714500" cy="762000"/>
+      <p:pic>
+        <p:nvPicPr>
+          <p:cNvPr id="10" name="Image 2" descr="緑のバナナ">    </p:cNvPr>
+          <p:cNvPicPr>
+            <a:picLocks noChangeAspect="1"/>
+          </p:cNvPicPr>
+          <p:nvPr/>
+        </p:nvPicPr>
+        <p:blipFill>
+          <a:blip r:embed="rId3"/>
+          <a:stretch>
+            <a:fillRect/>
+          </a:stretch>
+        </p:blipFill>
+        <p:spPr>
+          <a:xfrm>
+            <a:off x="4181475" y="1276350"/>
+            <a:ext cx="990600" cy="990600"/>
+          </a:xfrm>
+          <a:prstGeom prst="rect">
+            <a:avLst/>
+          </a:prstGeom>
+        </p:spPr>
+      </p:pic>
+      <p:sp>
+        <p:nvSpPr>
+          <p:cNvPr id="11" name=""/>
+          <p:cNvSpPr/>
+          <p:nvPr/>
+        </p:nvSpPr>
+        <p:spPr>
+          <a:xfrm>
+            <a:off x="4086225" y="2362200"/>
+            <a:ext cx="1181100" cy="361950"/>
           </a:xfrm>
           <a:prstGeom prst="roundRect">
             <a:avLst>
@@ -6287,21 +5979,21 @@
             </a:avLst>
           </a:prstGeom>
           <a:solidFill>
-            <a:srgbClr val="FFD9E2"/>
-          </a:solidFill>
-          <a:ln/>
-        </p:spPr>
-      </p:sp>
-      <p:sp>
-        <p:nvSpPr>
-          <p:cNvPr id="9" name=""/>
+            <a:srgbClr val="DDF1C6"/>
+          </a:solidFill>
+          <a:ln/>
+        </p:spPr>
+      </p:sp>
+      <p:sp>
+        <p:nvSpPr>
+          <p:cNvPr id="12" name=""/>
           <p:cNvSpPr txBox="1"/>
           <p:nvPr/>
         </p:nvSpPr>
         <p:spPr>
           <a:xfrm>
-            <a:off x="4791075" y="1495425"/>
-            <a:ext cx="1047750" cy="438150"/>
+            <a:off x="4295775" y="2419350"/>
+            <a:ext cx="762000" cy="257175"/>
           </a:xfrm>
           <a:prstGeom prst="rect">
             <a:avLst/>
@@ -6315,9 +6007,9 @@
           <a:p>
             <a:pPr algn="ctr"/>
             <a:r>
-              <a:rPr sz="2400" b="1">
+              <a:rPr sz="1450" b="1">
                 <a:solidFill>
-                  <a:srgbClr val="B3304F"/>
+                  <a:srgbClr val="3D7A1A"/>
                 </a:solidFill>
                 <a:latin typeface="Noto Sans JP"/>
                 <a:ea typeface="Noto Sans JP"/>
@@ -6327,16 +6019,40 @@
           </a:p>
         </p:txBody>
       </p:sp>
-      <p:sp>
-        <p:nvSpPr>
-          <p:cNvPr id="10" name=""/>
-          <p:cNvSpPr/>
-          <p:nvPr/>
-        </p:nvSpPr>
-        <p:spPr>
-          <a:xfrm>
-            <a:off x="6305550" y="1333500"/>
-            <a:ext cx="1714500" cy="762000"/>
+      <p:pic>
+        <p:nvPicPr>
+          <p:cNvPr id="13" name="Image 3" descr="オレンジ">    </p:cNvPr>
+          <p:cNvPicPr>
+            <a:picLocks noChangeAspect="1"/>
+          </p:cNvPicPr>
+          <p:nvPr/>
+        </p:nvPicPr>
+        <p:blipFill>
+          <a:blip r:embed="rId4"/>
+          <a:stretch>
+            <a:fillRect/>
+          </a:stretch>
+        </p:blipFill>
+        <p:spPr>
+          <a:xfrm>
+            <a:off x="5781675" y="1276350"/>
+            <a:ext cx="990600" cy="990600"/>
+          </a:xfrm>
+          <a:prstGeom prst="rect">
+            <a:avLst/>
+          </a:prstGeom>
+        </p:spPr>
+      </p:pic>
+      <p:sp>
+        <p:nvSpPr>
+          <p:cNvPr id="14" name=""/>
+          <p:cNvSpPr/>
+          <p:nvPr/>
+        </p:nvSpPr>
+        <p:spPr>
+          <a:xfrm>
+            <a:off x="5686425" y="2362200"/>
+            <a:ext cx="1181100" cy="361950"/>
           </a:xfrm>
           <a:prstGeom prst="roundRect">
             <a:avLst>
@@ -6344,21 +6060,21 @@
             </a:avLst>
           </a:prstGeom>
           <a:solidFill>
-            <a:srgbClr val="FFEDB8"/>
-          </a:solidFill>
-          <a:ln/>
-        </p:spPr>
-      </p:sp>
-      <p:sp>
-        <p:nvSpPr>
-          <p:cNvPr id="11" name=""/>
+            <a:srgbClr val="FFE0C0"/>
+          </a:solidFill>
+          <a:ln/>
+        </p:spPr>
+      </p:sp>
+      <p:sp>
+        <p:nvSpPr>
+          <p:cNvPr id="15" name=""/>
           <p:cNvSpPr txBox="1"/>
           <p:nvPr/>
         </p:nvSpPr>
         <p:spPr>
           <a:xfrm>
-            <a:off x="6467475" y="1495425"/>
-            <a:ext cx="1390650" cy="438150"/>
+            <a:off x="5791200" y="2419350"/>
+            <a:ext cx="971550" cy="257175"/>
           </a:xfrm>
           <a:prstGeom prst="rect">
             <a:avLst/>
@@ -6372,9 +6088,9 @@
           <a:p>
             <a:pPr algn="ctr"/>
             <a:r>
-              <a:rPr sz="2400" b="1">
+              <a:rPr sz="1450" b="1">
                 <a:solidFill>
-                  <a:srgbClr val="8A5A00"/>
+                  <a:srgbClr val="B65300"/>
                 </a:solidFill>
                 <a:latin typeface="Noto Sans JP"/>
                 <a:ea typeface="Noto Sans JP"/>
@@ -6386,18 +6102,18 @@
       </p:sp>
       <p:sp>
         <p:nvSpPr>
-          <p:cNvPr id="12" name="記入欄"/>
-          <p:cNvSpPr/>
-          <p:nvPr/>
-        </p:nvSpPr>
-        <p:spPr>
-          <a:xfrm>
-            <a:off x="762000" y="2400300"/>
-            <a:ext cx="10668000" cy="3924300"/>
-          </a:xfrm>
-          <a:prstGeom prst="roundRect">
-            <a:avLst>
-              <a:gd name="adj" fmla="val 6796"/>
+          <p:cNvPr id="16" name="記入欄"/>
+          <p:cNvSpPr/>
+          <p:nvPr/>
+        </p:nvSpPr>
+        <p:spPr>
+          <a:xfrm>
+            <a:off x="762000" y="2952750"/>
+            <a:ext cx="10668000" cy="3371850"/>
+          </a:xfrm>
+          <a:prstGeom prst="roundRect">
+            <a:avLst>
+              <a:gd name="adj" fmla="val 7910"/>
             </a:avLst>
           </a:prstGeom>
           <a:solidFill>
@@ -6509,16 +6225,40 @@
           </a:p>
         </p:txBody>
       </p:sp>
-      <p:sp>
-        <p:nvSpPr>
-          <p:cNvPr id="4" name=""/>
-          <p:cNvSpPr/>
-          <p:nvPr/>
-        </p:nvSpPr>
-        <p:spPr>
-          <a:xfrm>
-            <a:off x="762000" y="1333500"/>
-            <a:ext cx="1714500" cy="762000"/>
+      <p:pic>
+        <p:nvPicPr>
+          <p:cNvPr id="4" name="Image 0" descr="黄色いバナナ">    </p:cNvPr>
+          <p:cNvPicPr>
+            <a:picLocks noChangeAspect="1"/>
+          </p:cNvPicPr>
+          <p:nvPr/>
+        </p:nvPicPr>
+        <p:blipFill>
+          <a:blip r:embed="rId1"/>
+          <a:stretch>
+            <a:fillRect/>
+          </a:stretch>
+        </p:blipFill>
+        <p:spPr>
+          <a:xfrm>
+            <a:off x="981075" y="1276350"/>
+            <a:ext cx="990600" cy="990600"/>
+          </a:xfrm>
+          <a:prstGeom prst="rect">
+            <a:avLst/>
+          </a:prstGeom>
+        </p:spPr>
+      </p:pic>
+      <p:sp>
+        <p:nvSpPr>
+          <p:cNvPr id="5" name=""/>
+          <p:cNvSpPr/>
+          <p:nvPr/>
+        </p:nvSpPr>
+        <p:spPr>
+          <a:xfrm>
+            <a:off x="885825" y="2362200"/>
+            <a:ext cx="1181100" cy="361950"/>
           </a:xfrm>
           <a:prstGeom prst="roundRect">
             <a:avLst>
@@ -6526,21 +6266,21 @@
             </a:avLst>
           </a:prstGeom>
           <a:solidFill>
-            <a:srgbClr val="F0521E"/>
-          </a:solidFill>
-          <a:ln/>
-        </p:spPr>
-      </p:sp>
-      <p:sp>
-        <p:nvSpPr>
-          <p:cNvPr id="5" name=""/>
+            <a:srgbClr val="FFE98A"/>
+          </a:solidFill>
+          <a:ln/>
+        </p:spPr>
+      </p:sp>
+      <p:sp>
+        <p:nvSpPr>
+          <p:cNvPr id="6" name=""/>
           <p:cNvSpPr txBox="1"/>
           <p:nvPr/>
         </p:nvSpPr>
         <p:spPr>
           <a:xfrm>
-            <a:off x="923925" y="1495425"/>
-            <a:ext cx="1390650" cy="438150"/>
+            <a:off x="990600" y="2419350"/>
+            <a:ext cx="971550" cy="257175"/>
           </a:xfrm>
           <a:prstGeom prst="rect">
             <a:avLst/>
@@ -6554,9 +6294,9 @@
           <a:p>
             <a:pPr algn="ctr"/>
             <a:r>
-              <a:rPr sz="2400" b="1">
+              <a:rPr sz="1450" b="1">
                 <a:solidFill>
-                  <a:srgbClr val="FFFFFF"/>
+                  <a:srgbClr val="7A5A00"/>
                 </a:solidFill>
                 <a:latin typeface="Noto Sans JP"/>
                 <a:ea typeface="Noto Sans JP"/>
@@ -6566,16 +6306,40 @@
           </a:p>
         </p:txBody>
       </p:sp>
-      <p:sp>
-        <p:nvSpPr>
-          <p:cNvPr id="6" name=""/>
-          <p:cNvSpPr/>
-          <p:nvPr/>
-        </p:nvSpPr>
-        <p:spPr>
-          <a:xfrm>
-            <a:off x="2609850" y="1333500"/>
-            <a:ext cx="1714500" cy="762000"/>
+      <p:pic>
+        <p:nvPicPr>
+          <p:cNvPr id="7" name="Image 1" descr="りんご">    </p:cNvPr>
+          <p:cNvPicPr>
+            <a:picLocks noChangeAspect="1"/>
+          </p:cNvPicPr>
+          <p:nvPr/>
+        </p:nvPicPr>
+        <p:blipFill>
+          <a:blip r:embed="rId2"/>
+          <a:stretch>
+            <a:fillRect/>
+          </a:stretch>
+        </p:blipFill>
+        <p:spPr>
+          <a:xfrm>
+            <a:off x="2581275" y="1276350"/>
+            <a:ext cx="990600" cy="990600"/>
+          </a:xfrm>
+          <a:prstGeom prst="rect">
+            <a:avLst/>
+          </a:prstGeom>
+        </p:spPr>
+      </p:pic>
+      <p:sp>
+        <p:nvSpPr>
+          <p:cNvPr id="8" name=""/>
+          <p:cNvSpPr/>
+          <p:nvPr/>
+        </p:nvSpPr>
+        <p:spPr>
+          <a:xfrm>
+            <a:off x="2486025" y="2362200"/>
+            <a:ext cx="1181100" cy="361950"/>
           </a:xfrm>
           <a:prstGeom prst="roundRect">
             <a:avLst>
@@ -6583,21 +6347,21 @@
             </a:avLst>
           </a:prstGeom>
           <a:solidFill>
-            <a:srgbClr val="D6E9FA"/>
-          </a:solidFill>
-          <a:ln/>
-        </p:spPr>
-      </p:sp>
-      <p:sp>
-        <p:nvSpPr>
-          <p:cNvPr id="7" name=""/>
+            <a:srgbClr val="FFDDE0"/>
+          </a:solidFill>
+          <a:ln/>
+        </p:spPr>
+      </p:sp>
+      <p:sp>
+        <p:nvSpPr>
+          <p:cNvPr id="9" name=""/>
           <p:cNvSpPr txBox="1"/>
           <p:nvPr/>
         </p:nvSpPr>
         <p:spPr>
           <a:xfrm>
-            <a:off x="2943225" y="1495425"/>
-            <a:ext cx="1047750" cy="438150"/>
+            <a:off x="2695575" y="2419350"/>
+            <a:ext cx="762000" cy="257175"/>
           </a:xfrm>
           <a:prstGeom prst="rect">
             <a:avLst/>
@@ -6611,9 +6375,9 @@
           <a:p>
             <a:pPr algn="ctr"/>
             <a:r>
-              <a:rPr sz="2400" b="1">
+              <a:rPr sz="1450" b="1">
                 <a:solidFill>
-                  <a:srgbClr val="1F5F96"/>
+                  <a:srgbClr val="C42B3B"/>
                 </a:solidFill>
                 <a:latin typeface="Noto Sans JP"/>
                 <a:ea typeface="Noto Sans JP"/>
@@ -6623,16 +6387,40 @@
           </a:p>
         </p:txBody>
       </p:sp>
-      <p:sp>
-        <p:nvSpPr>
-          <p:cNvPr id="8" name=""/>
-          <p:cNvSpPr/>
-          <p:nvPr/>
-        </p:nvSpPr>
-        <p:spPr>
-          <a:xfrm>
-            <a:off x="4457700" y="1333500"/>
-            <a:ext cx="1714500" cy="762000"/>
+      <p:pic>
+        <p:nvPicPr>
+          <p:cNvPr id="10" name="Image 2" descr="緑のバナナ">    </p:cNvPr>
+          <p:cNvPicPr>
+            <a:picLocks noChangeAspect="1"/>
+          </p:cNvPicPr>
+          <p:nvPr/>
+        </p:nvPicPr>
+        <p:blipFill>
+          <a:blip r:embed="rId3"/>
+          <a:stretch>
+            <a:fillRect/>
+          </a:stretch>
+        </p:blipFill>
+        <p:spPr>
+          <a:xfrm>
+            <a:off x="4181475" y="1276350"/>
+            <a:ext cx="990600" cy="990600"/>
+          </a:xfrm>
+          <a:prstGeom prst="rect">
+            <a:avLst/>
+          </a:prstGeom>
+        </p:spPr>
+      </p:pic>
+      <p:sp>
+        <p:nvSpPr>
+          <p:cNvPr id="11" name=""/>
+          <p:cNvSpPr/>
+          <p:nvPr/>
+        </p:nvSpPr>
+        <p:spPr>
+          <a:xfrm>
+            <a:off x="4086225" y="2362200"/>
+            <a:ext cx="1181100" cy="361950"/>
           </a:xfrm>
           <a:prstGeom prst="roundRect">
             <a:avLst>
@@ -6640,21 +6428,21 @@
             </a:avLst>
           </a:prstGeom>
           <a:solidFill>
-            <a:srgbClr val="FFD9E2"/>
-          </a:solidFill>
-          <a:ln/>
-        </p:spPr>
-      </p:sp>
-      <p:sp>
-        <p:nvSpPr>
-          <p:cNvPr id="9" name=""/>
+            <a:srgbClr val="DDF1C6"/>
+          </a:solidFill>
+          <a:ln/>
+        </p:spPr>
+      </p:sp>
+      <p:sp>
+        <p:nvSpPr>
+          <p:cNvPr id="12" name=""/>
           <p:cNvSpPr txBox="1"/>
           <p:nvPr/>
         </p:nvSpPr>
         <p:spPr>
           <a:xfrm>
-            <a:off x="4791075" y="1495425"/>
-            <a:ext cx="1047750" cy="438150"/>
+            <a:off x="4295775" y="2419350"/>
+            <a:ext cx="762000" cy="257175"/>
           </a:xfrm>
           <a:prstGeom prst="rect">
             <a:avLst/>
@@ -6668,9 +6456,9 @@
           <a:p>
             <a:pPr algn="ctr"/>
             <a:r>
-              <a:rPr sz="2400" b="1">
+              <a:rPr sz="1450" b="1">
                 <a:solidFill>
-                  <a:srgbClr val="B3304F"/>
+                  <a:srgbClr val="3D7A1A"/>
                 </a:solidFill>
                 <a:latin typeface="Noto Sans JP"/>
                 <a:ea typeface="Noto Sans JP"/>
@@ -6680,16 +6468,40 @@
           </a:p>
         </p:txBody>
       </p:sp>
-      <p:sp>
-        <p:nvSpPr>
-          <p:cNvPr id="10" name=""/>
-          <p:cNvSpPr/>
-          <p:nvPr/>
-        </p:nvSpPr>
-        <p:spPr>
-          <a:xfrm>
-            <a:off x="6305550" y="1333500"/>
-            <a:ext cx="1714500" cy="762000"/>
+      <p:pic>
+        <p:nvPicPr>
+          <p:cNvPr id="13" name="Image 3" descr="オレンジ">    </p:cNvPr>
+          <p:cNvPicPr>
+            <a:picLocks noChangeAspect="1"/>
+          </p:cNvPicPr>
+          <p:nvPr/>
+        </p:nvPicPr>
+        <p:blipFill>
+          <a:blip r:embed="rId4"/>
+          <a:stretch>
+            <a:fillRect/>
+          </a:stretch>
+        </p:blipFill>
+        <p:spPr>
+          <a:xfrm>
+            <a:off x="5781675" y="1276350"/>
+            <a:ext cx="990600" cy="990600"/>
+          </a:xfrm>
+          <a:prstGeom prst="rect">
+            <a:avLst/>
+          </a:prstGeom>
+        </p:spPr>
+      </p:pic>
+      <p:sp>
+        <p:nvSpPr>
+          <p:cNvPr id="14" name=""/>
+          <p:cNvSpPr/>
+          <p:nvPr/>
+        </p:nvSpPr>
+        <p:spPr>
+          <a:xfrm>
+            <a:off x="5686425" y="2362200"/>
+            <a:ext cx="1181100" cy="361950"/>
           </a:xfrm>
           <a:prstGeom prst="roundRect">
             <a:avLst>
@@ -6697,21 +6509,21 @@
             </a:avLst>
           </a:prstGeom>
           <a:solidFill>
-            <a:srgbClr val="FFEDB8"/>
-          </a:solidFill>
-          <a:ln/>
-        </p:spPr>
-      </p:sp>
-      <p:sp>
-        <p:nvSpPr>
-          <p:cNvPr id="11" name=""/>
+            <a:srgbClr val="FFE0C0"/>
+          </a:solidFill>
+          <a:ln/>
+        </p:spPr>
+      </p:sp>
+      <p:sp>
+        <p:nvSpPr>
+          <p:cNvPr id="15" name=""/>
           <p:cNvSpPr txBox="1"/>
           <p:nvPr/>
         </p:nvSpPr>
         <p:spPr>
           <a:xfrm>
-            <a:off x="6467475" y="1495425"/>
-            <a:ext cx="1390650" cy="438150"/>
+            <a:off x="5791200" y="2419350"/>
+            <a:ext cx="971550" cy="257175"/>
           </a:xfrm>
           <a:prstGeom prst="rect">
             <a:avLst/>
@@ -6725,9 +6537,9 @@
           <a:p>
             <a:pPr algn="ctr"/>
             <a:r>
-              <a:rPr sz="2400" b="1">
+              <a:rPr sz="1450" b="1">
                 <a:solidFill>
-                  <a:srgbClr val="8A5A00"/>
+                  <a:srgbClr val="B65300"/>
                 </a:solidFill>
                 <a:latin typeface="Noto Sans JP"/>
                 <a:ea typeface="Noto Sans JP"/>
@@ -6739,13 +6551,13 @@
       </p:sp>
       <p:sp>
         <p:nvSpPr>
-          <p:cNvPr id="12" name=""/>
+          <p:cNvPr id="16" name=""/>
           <p:cNvSpPr txBox="1"/>
           <p:nvPr/>
         </p:nvSpPr>
         <p:spPr>
           <a:xfrm>
-            <a:off x="8172450" y="1371600"/>
+            <a:off x="7010400" y="1428750"/>
             <a:ext cx="771525" cy="685800"/>
           </a:xfrm>
           <a:prstGeom prst="rect">
@@ -6758,11 +6570,11 @@
           <a:bodyPr wrap="square" lIns="0" tIns="0" rIns="0" bIns="0" anchor="ctr"/>
           <a:lstStyle/>
           <a:p>
-            <a:pPr/>
+            <a:pPr algn="ctr"/>
             <a:r>
               <a:rPr sz="4800" b="1">
                 <a:solidFill>
-                  <a:srgbClr val="F0521E"/>
+                  <a:srgbClr val="1A2238"/>
                 </a:solidFill>
                 <a:latin typeface="Arial"/>
                 <a:ea typeface="Arial"/>
@@ -6774,18 +6586,18 @@
       </p:sp>
       <p:sp>
         <p:nvSpPr>
-          <p:cNvPr id="13" name="記入欄"/>
-          <p:cNvSpPr/>
-          <p:nvPr/>
-        </p:nvSpPr>
-        <p:spPr>
-          <a:xfrm>
-            <a:off x="762000" y="2400300"/>
-            <a:ext cx="10668000" cy="3924300"/>
-          </a:xfrm>
-          <a:prstGeom prst="roundRect">
-            <a:avLst>
-              <a:gd name="adj" fmla="val 6796"/>
+          <p:cNvPr id="17" name="記入欄"/>
+          <p:cNvSpPr/>
+          <p:nvPr/>
+        </p:nvSpPr>
+        <p:spPr>
+          <a:xfrm>
+            <a:off x="762000" y="2952750"/>
+            <a:ext cx="10668000" cy="3371850"/>
+          </a:xfrm>
+          <a:prstGeom prst="roundRect">
+            <a:avLst>
+              <a:gd name="adj" fmla="val 7910"/>
             </a:avLst>
           </a:prstGeom>
           <a:solidFill>
@@ -6905,8 +6717,8 @@
         </p:nvSpPr>
         <p:spPr>
           <a:xfrm>
-            <a:off x="762000" y="1333500"/>
-            <a:ext cx="1714500" cy="762000"/>
+            <a:off x="809625" y="1466850"/>
+            <a:ext cx="1333500" cy="609600"/>
           </a:xfrm>
           <a:prstGeom prst="roundRect">
             <a:avLst>
@@ -6914,7 +6726,7 @@
             </a:avLst>
           </a:prstGeom>
           <a:solidFill>
-            <a:srgbClr val="D3F0E2"/>
+            <a:srgbClr val="D6E9FA"/>
           </a:solidFill>
           <a:ln/>
         </p:spPr>
@@ -6927,8 +6739,8 @@
         </p:nvSpPr>
         <p:spPr>
           <a:xfrm>
-            <a:off x="1276350" y="1543050"/>
-            <a:ext cx="685800" cy="342900"/>
+            <a:off x="1143000" y="1609725"/>
+            <a:ext cx="666750" cy="314325"/>
           </a:xfrm>
           <a:prstGeom prst="rect">
             <a:avLst/>
@@ -6942,9 +6754,9 @@
           <a:p>
             <a:pPr algn="ctr"/>
             <a:r>
-              <a:rPr sz="2400" b="1">
+              <a:rPr sz="2250" b="1">
                 <a:solidFill>
-                  <a:srgbClr val="1F7A52"/>
+                  <a:srgbClr val="1F5F96"/>
                 </a:solidFill>
                 <a:latin typeface="Arial"/>
                 <a:ea typeface="Arial"/>
@@ -6954,16 +6766,40 @@
           </a:p>
         </p:txBody>
       </p:sp>
-      <p:sp>
-        <p:nvSpPr>
-          <p:cNvPr id="6" name=""/>
-          <p:cNvSpPr/>
-          <p:nvPr/>
-        </p:nvSpPr>
-        <p:spPr>
-          <a:xfrm>
-            <a:off x="2609850" y="1333500"/>
-            <a:ext cx="1714500" cy="762000"/>
+      <p:pic>
+        <p:nvPicPr>
+          <p:cNvPr id="6" name="Image 0" descr="黄色いバナナ">    </p:cNvPr>
+          <p:cNvPicPr>
+            <a:picLocks noChangeAspect="1"/>
+          </p:cNvPicPr>
+          <p:nvPr/>
+        </p:nvPicPr>
+        <p:blipFill>
+          <a:blip r:embed="rId1"/>
+          <a:stretch>
+            <a:fillRect/>
+          </a:stretch>
+        </p:blipFill>
+        <p:spPr>
+          <a:xfrm>
+            <a:off x="2581275" y="1276350"/>
+            <a:ext cx="990600" cy="990600"/>
+          </a:xfrm>
+          <a:prstGeom prst="rect">
+            <a:avLst/>
+          </a:prstGeom>
+        </p:spPr>
+      </p:pic>
+      <p:sp>
+        <p:nvSpPr>
+          <p:cNvPr id="7" name=""/>
+          <p:cNvSpPr/>
+          <p:nvPr/>
+        </p:nvSpPr>
+        <p:spPr>
+          <a:xfrm>
+            <a:off x="2486025" y="2362200"/>
+            <a:ext cx="1181100" cy="361950"/>
           </a:xfrm>
           <a:prstGeom prst="roundRect">
             <a:avLst>
@@ -6971,21 +6807,21 @@
             </a:avLst>
           </a:prstGeom>
           <a:solidFill>
-            <a:srgbClr val="F0521E"/>
-          </a:solidFill>
-          <a:ln/>
-        </p:spPr>
-      </p:sp>
-      <p:sp>
-        <p:nvSpPr>
-          <p:cNvPr id="7" name=""/>
+            <a:srgbClr val="FFE98A"/>
+          </a:solidFill>
+          <a:ln/>
+        </p:spPr>
+      </p:sp>
+      <p:sp>
+        <p:nvSpPr>
+          <p:cNvPr id="8" name=""/>
           <p:cNvSpPr txBox="1"/>
           <p:nvPr/>
         </p:nvSpPr>
         <p:spPr>
           <a:xfrm>
-            <a:off x="2771775" y="1495425"/>
-            <a:ext cx="1390650" cy="438150"/>
+            <a:off x="2590800" y="2419350"/>
+            <a:ext cx="971550" cy="257175"/>
           </a:xfrm>
           <a:prstGeom prst="rect">
             <a:avLst/>
@@ -6999,9 +6835,9 @@
           <a:p>
             <a:pPr algn="ctr"/>
             <a:r>
-              <a:rPr sz="2400" b="1">
+              <a:rPr sz="1450" b="1">
                 <a:solidFill>
-                  <a:srgbClr val="FFFFFF"/>
+                  <a:srgbClr val="7A5A00"/>
                 </a:solidFill>
                 <a:latin typeface="Noto Sans JP"/>
                 <a:ea typeface="Noto Sans JP"/>
@@ -7011,16 +6847,40 @@
           </a:p>
         </p:txBody>
       </p:sp>
-      <p:sp>
-        <p:nvSpPr>
-          <p:cNvPr id="8" name=""/>
-          <p:cNvSpPr/>
-          <p:nvPr/>
-        </p:nvSpPr>
-        <p:spPr>
-          <a:xfrm>
-            <a:off x="4457700" y="1333500"/>
-            <a:ext cx="1714500" cy="762000"/>
+      <p:pic>
+        <p:nvPicPr>
+          <p:cNvPr id="9" name="Image 1" descr="りんご">    </p:cNvPr>
+          <p:cNvPicPr>
+            <a:picLocks noChangeAspect="1"/>
+          </p:cNvPicPr>
+          <p:nvPr/>
+        </p:nvPicPr>
+        <p:blipFill>
+          <a:blip r:embed="rId2"/>
+          <a:stretch>
+            <a:fillRect/>
+          </a:stretch>
+        </p:blipFill>
+        <p:spPr>
+          <a:xfrm>
+            <a:off x="4181475" y="1276350"/>
+            <a:ext cx="990600" cy="990600"/>
+          </a:xfrm>
+          <a:prstGeom prst="rect">
+            <a:avLst/>
+          </a:prstGeom>
+        </p:spPr>
+      </p:pic>
+      <p:sp>
+        <p:nvSpPr>
+          <p:cNvPr id="10" name=""/>
+          <p:cNvSpPr/>
+          <p:nvPr/>
+        </p:nvSpPr>
+        <p:spPr>
+          <a:xfrm>
+            <a:off x="4086225" y="2362200"/>
+            <a:ext cx="1181100" cy="361950"/>
           </a:xfrm>
           <a:prstGeom prst="roundRect">
             <a:avLst>
@@ -7028,21 +6888,21 @@
             </a:avLst>
           </a:prstGeom>
           <a:solidFill>
-            <a:srgbClr val="D6E9FA"/>
-          </a:solidFill>
-          <a:ln/>
-        </p:spPr>
-      </p:sp>
-      <p:sp>
-        <p:nvSpPr>
-          <p:cNvPr id="9" name=""/>
+            <a:srgbClr val="FFDDE0"/>
+          </a:solidFill>
+          <a:ln/>
+        </p:spPr>
+      </p:sp>
+      <p:sp>
+        <p:nvSpPr>
+          <p:cNvPr id="11" name=""/>
           <p:cNvSpPr txBox="1"/>
           <p:nvPr/>
         </p:nvSpPr>
         <p:spPr>
           <a:xfrm>
-            <a:off x="4791075" y="1495425"/>
-            <a:ext cx="1047750" cy="438150"/>
+            <a:off x="4295775" y="2419350"/>
+            <a:ext cx="762000" cy="257175"/>
           </a:xfrm>
           <a:prstGeom prst="rect">
             <a:avLst/>
@@ -7056,9 +6916,9 @@
           <a:p>
             <a:pPr algn="ctr"/>
             <a:r>
-              <a:rPr sz="2400" b="1">
+              <a:rPr sz="1450" b="1">
                 <a:solidFill>
-                  <a:srgbClr val="1F5F96"/>
+                  <a:srgbClr val="C42B3B"/>
                 </a:solidFill>
                 <a:latin typeface="Noto Sans JP"/>
                 <a:ea typeface="Noto Sans JP"/>
@@ -7068,16 +6928,40 @@
           </a:p>
         </p:txBody>
       </p:sp>
-      <p:sp>
-        <p:nvSpPr>
-          <p:cNvPr id="10" name=""/>
-          <p:cNvSpPr/>
-          <p:nvPr/>
-        </p:nvSpPr>
-        <p:spPr>
-          <a:xfrm>
-            <a:off x="6305550" y="1333500"/>
-            <a:ext cx="1714500" cy="762000"/>
+      <p:pic>
+        <p:nvPicPr>
+          <p:cNvPr id="12" name="Image 2" descr="緑のバナナ">    </p:cNvPr>
+          <p:cNvPicPr>
+            <a:picLocks noChangeAspect="1"/>
+          </p:cNvPicPr>
+          <p:nvPr/>
+        </p:nvPicPr>
+        <p:blipFill>
+          <a:blip r:embed="rId3"/>
+          <a:stretch>
+            <a:fillRect/>
+          </a:stretch>
+        </p:blipFill>
+        <p:spPr>
+          <a:xfrm>
+            <a:off x="5781675" y="1276350"/>
+            <a:ext cx="990600" cy="990600"/>
+          </a:xfrm>
+          <a:prstGeom prst="rect">
+            <a:avLst/>
+          </a:prstGeom>
+        </p:spPr>
+      </p:pic>
+      <p:sp>
+        <p:nvSpPr>
+          <p:cNvPr id="13" name=""/>
+          <p:cNvSpPr/>
+          <p:nvPr/>
+        </p:nvSpPr>
+        <p:spPr>
+          <a:xfrm>
+            <a:off x="5686425" y="2362200"/>
+            <a:ext cx="1181100" cy="361950"/>
           </a:xfrm>
           <a:prstGeom prst="roundRect">
             <a:avLst>
@@ -7085,21 +6969,21 @@
             </a:avLst>
           </a:prstGeom>
           <a:solidFill>
-            <a:srgbClr val="FFD9E2"/>
-          </a:solidFill>
-          <a:ln/>
-        </p:spPr>
-      </p:sp>
-      <p:sp>
-        <p:nvSpPr>
-          <p:cNvPr id="11" name=""/>
+            <a:srgbClr val="DDF1C6"/>
+          </a:solidFill>
+          <a:ln/>
+        </p:spPr>
+      </p:sp>
+      <p:sp>
+        <p:nvSpPr>
+          <p:cNvPr id="14" name=""/>
           <p:cNvSpPr txBox="1"/>
           <p:nvPr/>
         </p:nvSpPr>
         <p:spPr>
           <a:xfrm>
-            <a:off x="6638925" y="1495425"/>
-            <a:ext cx="1047750" cy="438150"/>
+            <a:off x="5895975" y="2419350"/>
+            <a:ext cx="762000" cy="257175"/>
           </a:xfrm>
           <a:prstGeom prst="rect">
             <a:avLst/>
@@ -7113,9 +6997,9 @@
           <a:p>
             <a:pPr algn="ctr"/>
             <a:r>
-              <a:rPr sz="2400" b="1">
+              <a:rPr sz="1450" b="1">
                 <a:solidFill>
-                  <a:srgbClr val="B3304F"/>
+                  <a:srgbClr val="3D7A1A"/>
                 </a:solidFill>
                 <a:latin typeface="Noto Sans JP"/>
                 <a:ea typeface="Noto Sans JP"/>
@@ -7125,16 +7009,40 @@
           </a:p>
         </p:txBody>
       </p:sp>
-      <p:sp>
-        <p:nvSpPr>
-          <p:cNvPr id="12" name=""/>
-          <p:cNvSpPr/>
-          <p:nvPr/>
-        </p:nvSpPr>
-        <p:spPr>
-          <a:xfrm>
-            <a:off x="8153400" y="1333500"/>
-            <a:ext cx="1714500" cy="762000"/>
+      <p:pic>
+        <p:nvPicPr>
+          <p:cNvPr id="15" name="Image 3" descr="オレンジ">    </p:cNvPr>
+          <p:cNvPicPr>
+            <a:picLocks noChangeAspect="1"/>
+          </p:cNvPicPr>
+          <p:nvPr/>
+        </p:nvPicPr>
+        <p:blipFill>
+          <a:blip r:embed="rId4"/>
+          <a:stretch>
+            <a:fillRect/>
+          </a:stretch>
+        </p:blipFill>
+        <p:spPr>
+          <a:xfrm>
+            <a:off x="7381875" y="1276350"/>
+            <a:ext cx="990600" cy="990600"/>
+          </a:xfrm>
+          <a:prstGeom prst="rect">
+            <a:avLst/>
+          </a:prstGeom>
+        </p:spPr>
+      </p:pic>
+      <p:sp>
+        <p:nvSpPr>
+          <p:cNvPr id="16" name=""/>
+          <p:cNvSpPr/>
+          <p:nvPr/>
+        </p:nvSpPr>
+        <p:spPr>
+          <a:xfrm>
+            <a:off x="7286625" y="2362200"/>
+            <a:ext cx="1181100" cy="361950"/>
           </a:xfrm>
           <a:prstGeom prst="roundRect">
             <a:avLst>
@@ -7142,21 +7050,21 @@
             </a:avLst>
           </a:prstGeom>
           <a:solidFill>
-            <a:srgbClr val="FFEDB8"/>
-          </a:solidFill>
-          <a:ln/>
-        </p:spPr>
-      </p:sp>
-      <p:sp>
-        <p:nvSpPr>
-          <p:cNvPr id="13" name=""/>
+            <a:srgbClr val="FFE0C0"/>
+          </a:solidFill>
+          <a:ln/>
+        </p:spPr>
+      </p:sp>
+      <p:sp>
+        <p:nvSpPr>
+          <p:cNvPr id="17" name=""/>
           <p:cNvSpPr txBox="1"/>
           <p:nvPr/>
         </p:nvSpPr>
         <p:spPr>
           <a:xfrm>
-            <a:off x="8315325" y="1495425"/>
-            <a:ext cx="1390650" cy="438150"/>
+            <a:off x="7391400" y="2419350"/>
+            <a:ext cx="971550" cy="257175"/>
           </a:xfrm>
           <a:prstGeom prst="rect">
             <a:avLst/>
@@ -7170,9 +7078,9 @@
           <a:p>
             <a:pPr algn="ctr"/>
             <a:r>
-              <a:rPr sz="2400" b="1">
+              <a:rPr sz="1450" b="1">
                 <a:solidFill>
-                  <a:srgbClr val="8A5A00"/>
+                  <a:srgbClr val="B65300"/>
                 </a:solidFill>
                 <a:latin typeface="Noto Sans JP"/>
                 <a:ea typeface="Noto Sans JP"/>
@@ -7184,13 +7092,13 @@
       </p:sp>
       <p:sp>
         <p:nvSpPr>
-          <p:cNvPr id="14" name=""/>
+          <p:cNvPr id="18" name=""/>
           <p:cNvSpPr txBox="1"/>
           <p:nvPr/>
         </p:nvSpPr>
         <p:spPr>
           <a:xfrm>
-            <a:off x="10020300" y="1371600"/>
+            <a:off x="8610600" y="1428750"/>
             <a:ext cx="771525" cy="685800"/>
           </a:xfrm>
           <a:prstGeom prst="rect">
@@ -7203,11 +7111,11 @@
           <a:bodyPr wrap="square" lIns="0" tIns="0" rIns="0" bIns="0" anchor="ctr"/>
           <a:lstStyle/>
           <a:p>
-            <a:pPr/>
+            <a:pPr algn="ctr"/>
             <a:r>
               <a:rPr sz="4800" b="1">
                 <a:solidFill>
-                  <a:srgbClr val="F0521E"/>
+                  <a:srgbClr val="1A2238"/>
                 </a:solidFill>
                 <a:latin typeface="Arial"/>
                 <a:ea typeface="Arial"/>
@@ -7219,18 +7127,18 @@
       </p:sp>
       <p:sp>
         <p:nvSpPr>
-          <p:cNvPr id="15" name="記入欄"/>
-          <p:cNvSpPr/>
-          <p:nvPr/>
-        </p:nvSpPr>
-        <p:spPr>
-          <a:xfrm>
-            <a:off x="762000" y="2400300"/>
-            <a:ext cx="10668000" cy="3924300"/>
-          </a:xfrm>
-          <a:prstGeom prst="roundRect">
-            <a:avLst>
-              <a:gd name="adj" fmla="val 6796"/>
+          <p:cNvPr id="19" name="記入欄"/>
+          <p:cNvSpPr/>
+          <p:nvPr/>
+        </p:nvSpPr>
+        <p:spPr>
+          <a:xfrm>
+            <a:off x="762000" y="2952750"/>
+            <a:ext cx="10668000" cy="3371850"/>
+          </a:xfrm>
+          <a:prstGeom prst="roundRect">
+            <a:avLst>
+              <a:gd name="adj" fmla="val 7910"/>
             </a:avLst>
           </a:prstGeom>
           <a:solidFill>
@@ -7342,16 +7250,40 @@
           </a:p>
         </p:txBody>
       </p:sp>
-      <p:sp>
-        <p:nvSpPr>
-          <p:cNvPr id="4" name=""/>
-          <p:cNvSpPr/>
-          <p:nvPr/>
-        </p:nvSpPr>
-        <p:spPr>
-          <a:xfrm>
-            <a:off x="762000" y="1333500"/>
-            <a:ext cx="1714500" cy="762000"/>
+      <p:pic>
+        <p:nvPicPr>
+          <p:cNvPr id="4" name="Image 0" descr="りんご">    </p:cNvPr>
+          <p:cNvPicPr>
+            <a:picLocks noChangeAspect="1"/>
+          </p:cNvPicPr>
+          <p:nvPr/>
+        </p:nvPicPr>
+        <p:blipFill>
+          <a:blip r:embed="rId1"/>
+          <a:stretch>
+            <a:fillRect/>
+          </a:stretch>
+        </p:blipFill>
+        <p:spPr>
+          <a:xfrm>
+            <a:off x="981075" y="1276350"/>
+            <a:ext cx="990600" cy="990600"/>
+          </a:xfrm>
+          <a:prstGeom prst="rect">
+            <a:avLst/>
+          </a:prstGeom>
+        </p:spPr>
+      </p:pic>
+      <p:sp>
+        <p:nvSpPr>
+          <p:cNvPr id="5" name=""/>
+          <p:cNvSpPr/>
+          <p:nvPr/>
+        </p:nvSpPr>
+        <p:spPr>
+          <a:xfrm>
+            <a:off x="885825" y="2362200"/>
+            <a:ext cx="1181100" cy="361950"/>
           </a:xfrm>
           <a:prstGeom prst="roundRect">
             <a:avLst>
@@ -7359,21 +7291,21 @@
             </a:avLst>
           </a:prstGeom>
           <a:solidFill>
-            <a:srgbClr val="D6E9FA"/>
-          </a:solidFill>
-          <a:ln/>
-        </p:spPr>
-      </p:sp>
-      <p:sp>
-        <p:nvSpPr>
-          <p:cNvPr id="5" name=""/>
+            <a:srgbClr val="FFDDE0"/>
+          </a:solidFill>
+          <a:ln/>
+        </p:spPr>
+      </p:sp>
+      <p:sp>
+        <p:nvSpPr>
+          <p:cNvPr id="6" name=""/>
           <p:cNvSpPr txBox="1"/>
           <p:nvPr/>
         </p:nvSpPr>
         <p:spPr>
           <a:xfrm>
-            <a:off x="1095375" y="1495425"/>
-            <a:ext cx="1047750" cy="438150"/>
+            <a:off x="1095375" y="2419350"/>
+            <a:ext cx="762000" cy="257175"/>
           </a:xfrm>
           <a:prstGeom prst="rect">
             <a:avLst/>
@@ -7387,9 +7319,9 @@
           <a:p>
             <a:pPr algn="ctr"/>
             <a:r>
-              <a:rPr sz="2400" b="1">
+              <a:rPr sz="1450" b="1">
                 <a:solidFill>
-                  <a:srgbClr val="1F5F96"/>
+                  <a:srgbClr val="C42B3B"/>
                 </a:solidFill>
                 <a:latin typeface="Noto Sans JP"/>
                 <a:ea typeface="Noto Sans JP"/>
@@ -7399,16 +7331,40 @@
           </a:p>
         </p:txBody>
       </p:sp>
-      <p:sp>
-        <p:nvSpPr>
-          <p:cNvPr id="6" name=""/>
-          <p:cNvSpPr/>
-          <p:nvPr/>
-        </p:nvSpPr>
-        <p:spPr>
-          <a:xfrm>
-            <a:off x="2609850" y="1333500"/>
-            <a:ext cx="1714500" cy="762000"/>
+      <p:pic>
+        <p:nvPicPr>
+          <p:cNvPr id="7" name="Image 1" descr="黄色いバナナ">    </p:cNvPr>
+          <p:cNvPicPr>
+            <a:picLocks noChangeAspect="1"/>
+          </p:cNvPicPr>
+          <p:nvPr/>
+        </p:nvPicPr>
+        <p:blipFill>
+          <a:blip r:embed="rId2"/>
+          <a:stretch>
+            <a:fillRect/>
+          </a:stretch>
+        </p:blipFill>
+        <p:spPr>
+          <a:xfrm>
+            <a:off x="2581275" y="1276350"/>
+            <a:ext cx="990600" cy="990600"/>
+          </a:xfrm>
+          <a:prstGeom prst="rect">
+            <a:avLst/>
+          </a:prstGeom>
+        </p:spPr>
+      </p:pic>
+      <p:sp>
+        <p:nvSpPr>
+          <p:cNvPr id="8" name=""/>
+          <p:cNvSpPr/>
+          <p:nvPr/>
+        </p:nvSpPr>
+        <p:spPr>
+          <a:xfrm>
+            <a:off x="2486025" y="2362200"/>
+            <a:ext cx="1181100" cy="361950"/>
           </a:xfrm>
           <a:prstGeom prst="roundRect">
             <a:avLst>
@@ -7416,21 +7372,21 @@
             </a:avLst>
           </a:prstGeom>
           <a:solidFill>
-            <a:srgbClr val="F0521E"/>
-          </a:solidFill>
-          <a:ln/>
-        </p:spPr>
-      </p:sp>
-      <p:sp>
-        <p:nvSpPr>
-          <p:cNvPr id="7" name=""/>
+            <a:srgbClr val="FFE98A"/>
+          </a:solidFill>
+          <a:ln/>
+        </p:spPr>
+      </p:sp>
+      <p:sp>
+        <p:nvSpPr>
+          <p:cNvPr id="9" name=""/>
           <p:cNvSpPr txBox="1"/>
           <p:nvPr/>
         </p:nvSpPr>
         <p:spPr>
           <a:xfrm>
-            <a:off x="2771775" y="1495425"/>
-            <a:ext cx="1390650" cy="438150"/>
+            <a:off x="2590800" y="2419350"/>
+            <a:ext cx="971550" cy="257175"/>
           </a:xfrm>
           <a:prstGeom prst="rect">
             <a:avLst/>
@@ -7444,9 +7400,9 @@
           <a:p>
             <a:pPr algn="ctr"/>
             <a:r>
-              <a:rPr sz="2400" b="1">
+              <a:rPr sz="1450" b="1">
                 <a:solidFill>
-                  <a:srgbClr val="FFFFFF"/>
+                  <a:srgbClr val="7A5A00"/>
                 </a:solidFill>
                 <a:latin typeface="Noto Sans JP"/>
                 <a:ea typeface="Noto Sans JP"/>
@@ -7458,14 +7414,14 @@
       </p:sp>
       <p:sp>
         <p:nvSpPr>
-          <p:cNvPr id="8" name=""/>
-          <p:cNvSpPr/>
-          <p:nvPr/>
-        </p:nvSpPr>
-        <p:spPr>
-          <a:xfrm>
-            <a:off x="4457700" y="1333500"/>
-            <a:ext cx="1714500" cy="762000"/>
+          <p:cNvPr id="10" name=""/>
+          <p:cNvSpPr/>
+          <p:nvPr/>
+        </p:nvSpPr>
+        <p:spPr>
+          <a:xfrm>
+            <a:off x="4010025" y="1466850"/>
+            <a:ext cx="1333500" cy="609600"/>
           </a:xfrm>
           <a:prstGeom prst="roundRect">
             <a:avLst>
@@ -7480,14 +7436,14 @@
       </p:sp>
       <p:sp>
         <p:nvSpPr>
-          <p:cNvPr id="9" name=""/>
+          <p:cNvPr id="11" name=""/>
           <p:cNvSpPr txBox="1"/>
           <p:nvPr/>
         </p:nvSpPr>
         <p:spPr>
           <a:xfrm>
-            <a:off x="4752975" y="1543050"/>
-            <a:ext cx="1123950" cy="342900"/>
+            <a:off x="4143375" y="1609725"/>
+            <a:ext cx="1076325" cy="314325"/>
           </a:xfrm>
           <a:prstGeom prst="rect">
             <a:avLst/>
@@ -7501,7 +7457,7 @@
           <a:p>
             <a:pPr algn="ctr"/>
             <a:r>
-              <a:rPr sz="2400" b="1">
+              <a:rPr sz="2250" b="1">
                 <a:solidFill>
                   <a:srgbClr val="FFFFFF"/>
                 </a:solidFill>
@@ -7513,16 +7469,40 @@
           </a:p>
         </p:txBody>
       </p:sp>
-      <p:sp>
-        <p:nvSpPr>
-          <p:cNvPr id="10" name=""/>
-          <p:cNvSpPr/>
-          <p:nvPr/>
-        </p:nvSpPr>
-        <p:spPr>
-          <a:xfrm>
-            <a:off x="6305550" y="1333500"/>
-            <a:ext cx="1714500" cy="762000"/>
+      <p:pic>
+        <p:nvPicPr>
+          <p:cNvPr id="12" name="Image 2" descr="緑のバナナ">    </p:cNvPr>
+          <p:cNvPicPr>
+            <a:picLocks noChangeAspect="1"/>
+          </p:cNvPicPr>
+          <p:nvPr/>
+        </p:nvPicPr>
+        <p:blipFill>
+          <a:blip r:embed="rId3"/>
+          <a:stretch>
+            <a:fillRect/>
+          </a:stretch>
+        </p:blipFill>
+        <p:spPr>
+          <a:xfrm>
+            <a:off x="5781675" y="1276350"/>
+            <a:ext cx="990600" cy="990600"/>
+          </a:xfrm>
+          <a:prstGeom prst="rect">
+            <a:avLst/>
+          </a:prstGeom>
+        </p:spPr>
+      </p:pic>
+      <p:sp>
+        <p:nvSpPr>
+          <p:cNvPr id="13" name=""/>
+          <p:cNvSpPr/>
+          <p:nvPr/>
+        </p:nvSpPr>
+        <p:spPr>
+          <a:xfrm>
+            <a:off x="5686425" y="2362200"/>
+            <a:ext cx="1181100" cy="361950"/>
           </a:xfrm>
           <a:prstGeom prst="roundRect">
             <a:avLst>
@@ -7530,21 +7510,21 @@
             </a:avLst>
           </a:prstGeom>
           <a:solidFill>
-            <a:srgbClr val="FFD9E2"/>
-          </a:solidFill>
-          <a:ln/>
-        </p:spPr>
-      </p:sp>
-      <p:sp>
-        <p:nvSpPr>
-          <p:cNvPr id="11" name=""/>
+            <a:srgbClr val="DDF1C6"/>
+          </a:solidFill>
+          <a:ln/>
+        </p:spPr>
+      </p:sp>
+      <p:sp>
+        <p:nvSpPr>
+          <p:cNvPr id="14" name=""/>
           <p:cNvSpPr txBox="1"/>
           <p:nvPr/>
         </p:nvSpPr>
         <p:spPr>
           <a:xfrm>
-            <a:off x="6638925" y="1495425"/>
-            <a:ext cx="1047750" cy="438150"/>
+            <a:off x="5895975" y="2419350"/>
+            <a:ext cx="762000" cy="257175"/>
           </a:xfrm>
           <a:prstGeom prst="rect">
             <a:avLst/>
@@ -7558,9 +7538,9 @@
           <a:p>
             <a:pPr algn="ctr"/>
             <a:r>
-              <a:rPr sz="2400" b="1">
+              <a:rPr sz="1450" b="1">
                 <a:solidFill>
-                  <a:srgbClr val="B3304F"/>
+                  <a:srgbClr val="3D7A1A"/>
                 </a:solidFill>
                 <a:latin typeface="Noto Sans JP"/>
                 <a:ea typeface="Noto Sans JP"/>
@@ -7570,16 +7550,40 @@
           </a:p>
         </p:txBody>
       </p:sp>
-      <p:sp>
-        <p:nvSpPr>
-          <p:cNvPr id="12" name=""/>
-          <p:cNvSpPr/>
-          <p:nvPr/>
-        </p:nvSpPr>
-        <p:spPr>
-          <a:xfrm>
-            <a:off x="8153400" y="1333500"/>
-            <a:ext cx="1714500" cy="762000"/>
+      <p:pic>
+        <p:nvPicPr>
+          <p:cNvPr id="15" name="Image 3" descr="オレンジ">    </p:cNvPr>
+          <p:cNvPicPr>
+            <a:picLocks noChangeAspect="1"/>
+          </p:cNvPicPr>
+          <p:nvPr/>
+        </p:nvPicPr>
+        <p:blipFill>
+          <a:blip r:embed="rId4"/>
+          <a:stretch>
+            <a:fillRect/>
+          </a:stretch>
+        </p:blipFill>
+        <p:spPr>
+          <a:xfrm>
+            <a:off x="7381875" y="1276350"/>
+            <a:ext cx="990600" cy="990600"/>
+          </a:xfrm>
+          <a:prstGeom prst="rect">
+            <a:avLst/>
+          </a:prstGeom>
+        </p:spPr>
+      </p:pic>
+      <p:sp>
+        <p:nvSpPr>
+          <p:cNvPr id="16" name=""/>
+          <p:cNvSpPr/>
+          <p:nvPr/>
+        </p:nvSpPr>
+        <p:spPr>
+          <a:xfrm>
+            <a:off x="7286625" y="2362200"/>
+            <a:ext cx="1181100" cy="361950"/>
           </a:xfrm>
           <a:prstGeom prst="roundRect">
             <a:avLst>
@@ -7587,21 +7591,21 @@
             </a:avLst>
           </a:prstGeom>
           <a:solidFill>
-            <a:srgbClr val="FFEDB8"/>
-          </a:solidFill>
-          <a:ln/>
-        </p:spPr>
-      </p:sp>
-      <p:sp>
-        <p:nvSpPr>
-          <p:cNvPr id="13" name=""/>
+            <a:srgbClr val="FFE0C0"/>
+          </a:solidFill>
+          <a:ln/>
+        </p:spPr>
+      </p:sp>
+      <p:sp>
+        <p:nvSpPr>
+          <p:cNvPr id="17" name=""/>
           <p:cNvSpPr txBox="1"/>
           <p:nvPr/>
         </p:nvSpPr>
         <p:spPr>
           <a:xfrm>
-            <a:off x="8315325" y="1495425"/>
-            <a:ext cx="1390650" cy="438150"/>
+            <a:off x="7391400" y="2419350"/>
+            <a:ext cx="971550" cy="257175"/>
           </a:xfrm>
           <a:prstGeom prst="rect">
             <a:avLst/>
@@ -7615,9 +7619,9 @@
           <a:p>
             <a:pPr algn="ctr"/>
             <a:r>
-              <a:rPr sz="2400" b="1">
+              <a:rPr sz="1450" b="1">
                 <a:solidFill>
-                  <a:srgbClr val="8A5A00"/>
+                  <a:srgbClr val="B65300"/>
                 </a:solidFill>
                 <a:latin typeface="Noto Sans JP"/>
                 <a:ea typeface="Noto Sans JP"/>
@@ -7629,18 +7633,18 @@
       </p:sp>
       <p:sp>
         <p:nvSpPr>
-          <p:cNvPr id="14" name="記入欄"/>
-          <p:cNvSpPr/>
-          <p:nvPr/>
-        </p:nvSpPr>
-        <p:spPr>
-          <a:xfrm>
-            <a:off x="762000" y="2400300"/>
-            <a:ext cx="10668000" cy="3924300"/>
-          </a:xfrm>
-          <a:prstGeom prst="roundRect">
-            <a:avLst>
-              <a:gd name="adj" fmla="val 6796"/>
+          <p:cNvPr id="18" name="記入欄"/>
+          <p:cNvSpPr/>
+          <p:nvPr/>
+        </p:nvSpPr>
+        <p:spPr>
+          <a:xfrm>
+            <a:off x="762000" y="2952750"/>
+            <a:ext cx="10668000" cy="3371850"/>
+          </a:xfrm>
+          <a:prstGeom prst="roundRect">
+            <a:avLst>
+              <a:gd name="adj" fmla="val 7910"/>
             </a:avLst>
           </a:prstGeom>
           <a:solidFill>
@@ -7809,16 +7813,40 @@
           </a:p>
         </p:txBody>
       </p:sp>
-      <p:sp>
-        <p:nvSpPr>
-          <p:cNvPr id="6" name=""/>
-          <p:cNvSpPr/>
-          <p:nvPr/>
-        </p:nvSpPr>
-        <p:spPr>
-          <a:xfrm>
-            <a:off x="1295400" y="1333500"/>
-            <a:ext cx="2343150" cy="571500"/>
+      <p:pic>
+        <p:nvPicPr>
+          <p:cNvPr id="6" name="Image 0" descr="りんご">    </p:cNvPr>
+          <p:cNvPicPr>
+            <a:picLocks noChangeAspect="1"/>
+          </p:cNvPicPr>
+          <p:nvPr/>
+        </p:nvPicPr>
+        <p:blipFill>
+          <a:blip r:embed="rId1"/>
+          <a:stretch>
+            <a:fillRect/>
+          </a:stretch>
+        </p:blipFill>
+        <p:spPr>
+          <a:xfrm>
+            <a:off x="2171700" y="1295400"/>
+            <a:ext cx="590550" cy="590550"/>
+          </a:xfrm>
+          <a:prstGeom prst="rect">
+            <a:avLst/>
+          </a:prstGeom>
+        </p:spPr>
+      </p:pic>
+      <p:sp>
+        <p:nvSpPr>
+          <p:cNvPr id="7" name=""/>
+          <p:cNvSpPr/>
+          <p:nvPr/>
+        </p:nvSpPr>
+        <p:spPr>
+          <a:xfrm>
+            <a:off x="1295400" y="1943100"/>
+            <a:ext cx="2343150" cy="304800"/>
           </a:xfrm>
           <a:prstGeom prst="roundRect">
             <a:avLst>
@@ -7826,21 +7854,21 @@
             </a:avLst>
           </a:prstGeom>
           <a:solidFill>
-            <a:srgbClr val="D6E9FA"/>
-          </a:solidFill>
-          <a:ln/>
-        </p:spPr>
-      </p:sp>
-      <p:sp>
-        <p:nvSpPr>
-          <p:cNvPr id="7" name=""/>
+            <a:srgbClr val="FFDDE0"/>
+          </a:solidFill>
+          <a:ln/>
+        </p:spPr>
+      </p:sp>
+      <p:sp>
+        <p:nvSpPr>
+          <p:cNvPr id="8" name=""/>
           <p:cNvSpPr txBox="1"/>
           <p:nvPr/>
         </p:nvSpPr>
         <p:spPr>
           <a:xfrm>
-            <a:off x="2028825" y="1457325"/>
-            <a:ext cx="866775" cy="333375"/>
+            <a:off x="2105025" y="1981200"/>
+            <a:ext cx="714375" cy="238125"/>
           </a:xfrm>
           <a:prstGeom prst="rect">
             <a:avLst/>
@@ -7854,9 +7882,9 @@
           <a:p>
             <a:pPr algn="ctr"/>
             <a:r>
-              <a:rPr sz="1800" b="1">
+              <a:rPr sz="1300" b="1">
                 <a:solidFill>
-                  <a:srgbClr val="1F5F96"/>
+                  <a:srgbClr val="C42B3B"/>
                 </a:solidFill>
                 <a:latin typeface="Noto Sans JP"/>
                 <a:ea typeface="Noto Sans JP"/>
@@ -7866,16 +7894,40 @@
           </a:p>
         </p:txBody>
       </p:sp>
-      <p:sp>
-        <p:nvSpPr>
-          <p:cNvPr id="8" name=""/>
-          <p:cNvSpPr/>
-          <p:nvPr/>
-        </p:nvSpPr>
-        <p:spPr>
-          <a:xfrm>
-            <a:off x="3752850" y="1333500"/>
-            <a:ext cx="2343150" cy="571500"/>
+      <p:pic>
+        <p:nvPicPr>
+          <p:cNvPr id="9" name="Image 1" descr="黄色いバナナ">    </p:cNvPr>
+          <p:cNvPicPr>
+            <a:picLocks noChangeAspect="1"/>
+          </p:cNvPicPr>
+          <p:nvPr/>
+        </p:nvPicPr>
+        <p:blipFill>
+          <a:blip r:embed="rId2"/>
+          <a:stretch>
+            <a:fillRect/>
+          </a:stretch>
+        </p:blipFill>
+        <p:spPr>
+          <a:xfrm>
+            <a:off x="4629150" y="1295400"/>
+            <a:ext cx="590550" cy="590550"/>
+          </a:xfrm>
+          <a:prstGeom prst="rect">
+            <a:avLst/>
+          </a:prstGeom>
+        </p:spPr>
+      </p:pic>
+      <p:sp>
+        <p:nvSpPr>
+          <p:cNvPr id="10" name=""/>
+          <p:cNvSpPr/>
+          <p:nvPr/>
+        </p:nvSpPr>
+        <p:spPr>
+          <a:xfrm>
+            <a:off x="3752850" y="1943100"/>
+            <a:ext cx="2343150" cy="304800"/>
           </a:xfrm>
           <a:prstGeom prst="roundRect">
             <a:avLst>
@@ -7883,21 +7935,21 @@
             </a:avLst>
           </a:prstGeom>
           <a:solidFill>
-            <a:srgbClr val="F0521E"/>
-          </a:solidFill>
-          <a:ln/>
-        </p:spPr>
-      </p:sp>
-      <p:sp>
-        <p:nvSpPr>
-          <p:cNvPr id="9" name=""/>
+            <a:srgbClr val="FFE98A"/>
+          </a:solidFill>
+          <a:ln/>
+        </p:spPr>
+      </p:sp>
+      <p:sp>
+        <p:nvSpPr>
+          <p:cNvPr id="11" name=""/>
           <p:cNvSpPr txBox="1"/>
           <p:nvPr/>
         </p:nvSpPr>
         <p:spPr>
           <a:xfrm>
-            <a:off x="4362450" y="1457325"/>
-            <a:ext cx="1133475" cy="333375"/>
+            <a:off x="4476750" y="1981200"/>
+            <a:ext cx="904875" cy="238125"/>
           </a:xfrm>
           <a:prstGeom prst="rect">
             <a:avLst/>
@@ -7911,9 +7963,9 @@
           <a:p>
             <a:pPr algn="ctr"/>
             <a:r>
-              <a:rPr sz="1800" b="1">
+              <a:rPr sz="1300" b="1">
                 <a:solidFill>
-                  <a:srgbClr val="FFFFFF"/>
+                  <a:srgbClr val="7A5A00"/>
                 </a:solidFill>
                 <a:latin typeface="Noto Sans JP"/>
                 <a:ea typeface="Noto Sans JP"/>
@@ -7923,16 +7975,40 @@
           </a:p>
         </p:txBody>
       </p:sp>
-      <p:sp>
-        <p:nvSpPr>
-          <p:cNvPr id="10" name=""/>
-          <p:cNvSpPr/>
-          <p:nvPr/>
-        </p:nvSpPr>
-        <p:spPr>
-          <a:xfrm>
-            <a:off x="6210300" y="1333500"/>
-            <a:ext cx="2343150" cy="571500"/>
+      <p:pic>
+        <p:nvPicPr>
+          <p:cNvPr id="12" name="Image 2" descr="緑のバナナ">    </p:cNvPr>
+          <p:cNvPicPr>
+            <a:picLocks noChangeAspect="1"/>
+          </p:cNvPicPr>
+          <p:nvPr/>
+        </p:nvPicPr>
+        <p:blipFill>
+          <a:blip r:embed="rId3"/>
+          <a:stretch>
+            <a:fillRect/>
+          </a:stretch>
+        </p:blipFill>
+        <p:spPr>
+          <a:xfrm>
+            <a:off x="7086600" y="1295400"/>
+            <a:ext cx="590550" cy="590550"/>
+          </a:xfrm>
+          <a:prstGeom prst="rect">
+            <a:avLst/>
+          </a:prstGeom>
+        </p:spPr>
+      </p:pic>
+      <p:sp>
+        <p:nvSpPr>
+          <p:cNvPr id="13" name=""/>
+          <p:cNvSpPr/>
+          <p:nvPr/>
+        </p:nvSpPr>
+        <p:spPr>
+          <a:xfrm>
+            <a:off x="6210300" y="1943100"/>
+            <a:ext cx="2343150" cy="304800"/>
           </a:xfrm>
           <a:prstGeom prst="roundRect">
             <a:avLst>
@@ -7940,21 +8016,21 @@
             </a:avLst>
           </a:prstGeom>
           <a:solidFill>
-            <a:srgbClr val="FFD9E2"/>
-          </a:solidFill>
-          <a:ln/>
-        </p:spPr>
-      </p:sp>
-      <p:sp>
-        <p:nvSpPr>
-          <p:cNvPr id="11" name=""/>
+            <a:srgbClr val="DDF1C6"/>
+          </a:solidFill>
+          <a:ln/>
+        </p:spPr>
+      </p:sp>
+      <p:sp>
+        <p:nvSpPr>
+          <p:cNvPr id="14" name=""/>
           <p:cNvSpPr txBox="1"/>
           <p:nvPr/>
         </p:nvSpPr>
         <p:spPr>
           <a:xfrm>
-            <a:off x="6943725" y="1457325"/>
-            <a:ext cx="866775" cy="333375"/>
+            <a:off x="7019925" y="1981200"/>
+            <a:ext cx="714375" cy="238125"/>
           </a:xfrm>
           <a:prstGeom prst="rect">
             <a:avLst/>
@@ -7968,9 +8044,9 @@
           <a:p>
             <a:pPr algn="ctr"/>
             <a:r>
-              <a:rPr sz="1800" b="1">
+              <a:rPr sz="1300" b="1">
                 <a:solidFill>
-                  <a:srgbClr val="B3304F"/>
+                  <a:srgbClr val="3D7A1A"/>
                 </a:solidFill>
                 <a:latin typeface="Noto Sans JP"/>
                 <a:ea typeface="Noto Sans JP"/>
@@ -7980,16 +8056,40 @@
           </a:p>
         </p:txBody>
       </p:sp>
-      <p:sp>
-        <p:nvSpPr>
-          <p:cNvPr id="12" name=""/>
-          <p:cNvSpPr/>
-          <p:nvPr/>
-        </p:nvSpPr>
-        <p:spPr>
-          <a:xfrm>
-            <a:off x="8667750" y="1333500"/>
-            <a:ext cx="2343150" cy="571500"/>
+      <p:pic>
+        <p:nvPicPr>
+          <p:cNvPr id="15" name="Image 3" descr="オレンジ">    </p:cNvPr>
+          <p:cNvPicPr>
+            <a:picLocks noChangeAspect="1"/>
+          </p:cNvPicPr>
+          <p:nvPr/>
+        </p:nvPicPr>
+        <p:blipFill>
+          <a:blip r:embed="rId4"/>
+          <a:stretch>
+            <a:fillRect/>
+          </a:stretch>
+        </p:blipFill>
+        <p:spPr>
+          <a:xfrm>
+            <a:off x="9544050" y="1295400"/>
+            <a:ext cx="590550" cy="590550"/>
+          </a:xfrm>
+          <a:prstGeom prst="rect">
+            <a:avLst/>
+          </a:prstGeom>
+        </p:spPr>
+      </p:pic>
+      <p:sp>
+        <p:nvSpPr>
+          <p:cNvPr id="16" name=""/>
+          <p:cNvSpPr/>
+          <p:nvPr/>
+        </p:nvSpPr>
+        <p:spPr>
+          <a:xfrm>
+            <a:off x="8667750" y="1943100"/>
+            <a:ext cx="2343150" cy="304800"/>
           </a:xfrm>
           <a:prstGeom prst="roundRect">
             <a:avLst>
@@ -7997,21 +8097,21 @@
             </a:avLst>
           </a:prstGeom>
           <a:solidFill>
-            <a:srgbClr val="FFEDB8"/>
-          </a:solidFill>
-          <a:ln/>
-        </p:spPr>
-      </p:sp>
-      <p:sp>
-        <p:nvSpPr>
-          <p:cNvPr id="13" name=""/>
+            <a:srgbClr val="FFE0C0"/>
+          </a:solidFill>
+          <a:ln/>
+        </p:spPr>
+      </p:sp>
+      <p:sp>
+        <p:nvSpPr>
+          <p:cNvPr id="17" name=""/>
           <p:cNvSpPr txBox="1"/>
           <p:nvPr/>
         </p:nvSpPr>
         <p:spPr>
           <a:xfrm>
-            <a:off x="9277350" y="1457325"/>
-            <a:ext cx="1133475" cy="333375"/>
+            <a:off x="9391650" y="1981200"/>
+            <a:ext cx="904875" cy="238125"/>
           </a:xfrm>
           <a:prstGeom prst="rect">
             <a:avLst/>
@@ -8025,9 +8125,9 @@
           <a:p>
             <a:pPr algn="ctr"/>
             <a:r>
-              <a:rPr sz="1800" b="1">
+              <a:rPr sz="1300" b="1">
                 <a:solidFill>
-                  <a:srgbClr val="8A5A00"/>
+                  <a:srgbClr val="B65300"/>
                 </a:solidFill>
                 <a:latin typeface="Noto Sans JP"/>
                 <a:ea typeface="Noto Sans JP"/>
@@ -8039,33 +8139,33 @@
       </p:sp>
       <p:sp>
         <p:nvSpPr>
-          <p:cNvPr id="14" name=""/>
-          <p:cNvSpPr/>
-          <p:nvPr/>
-        </p:nvSpPr>
-        <p:spPr>
-          <a:xfrm>
-            <a:off x="762000" y="2333625"/>
+          <p:cNvPr id="18" name=""/>
+          <p:cNvSpPr/>
+          <p:nvPr/>
+        </p:nvSpPr>
+        <p:spPr>
+          <a:xfrm>
+            <a:off x="762000" y="2628900"/>
             <a:ext cx="381000" cy="381000"/>
           </a:xfrm>
           <a:prstGeom prst="ellipse">
             <a:avLst/>
           </a:prstGeom>
           <a:solidFill>
-            <a:srgbClr val="FFE6DC"/>
-          </a:solidFill>
-          <a:ln/>
-        </p:spPr>
-      </p:sp>
-      <p:sp>
-        <p:nvSpPr>
-          <p:cNvPr id="15" name=""/>
+            <a:srgbClr val="EAF2FB"/>
+          </a:solidFill>
+          <a:ln/>
+        </p:spPr>
+      </p:sp>
+      <p:sp>
+        <p:nvSpPr>
+          <p:cNvPr id="19" name=""/>
           <p:cNvSpPr txBox="1"/>
           <p:nvPr/>
         </p:nvSpPr>
         <p:spPr>
           <a:xfrm>
-            <a:off x="723900" y="2419350"/>
+            <a:off x="723900" y="2705100"/>
             <a:ext cx="466725" cy="209550"/>
           </a:xfrm>
           <a:prstGeom prst="rect">
@@ -8082,7 +8182,7 @@
             <a:r>
               <a:rPr sz="1500" b="1">
                 <a:solidFill>
-                  <a:srgbClr val="C23B12"/>
+                  <a:srgbClr val="4B5569"/>
                 </a:solidFill>
                 <a:latin typeface="Arial"/>
                 <a:ea typeface="Arial"/>
@@ -8094,18 +8194,18 @@
       </p:sp>
       <p:sp>
         <p:nvSpPr>
-          <p:cNvPr id="16" name="記入欄"/>
-          <p:cNvSpPr/>
-          <p:nvPr/>
-        </p:nvSpPr>
-        <p:spPr>
-          <a:xfrm>
-            <a:off x="1295400" y="2038350"/>
-            <a:ext cx="2343150" cy="971550"/>
-          </a:xfrm>
-          <a:prstGeom prst="roundRect">
-            <a:avLst>
-              <a:gd name="adj" fmla="val 17647"/>
+          <p:cNvPr id="20" name="記入欄"/>
+          <p:cNvSpPr/>
+          <p:nvPr/>
+        </p:nvSpPr>
+        <p:spPr>
+          <a:xfrm>
+            <a:off x="1295400" y="2362200"/>
+            <a:ext cx="2343150" cy="904875"/>
+          </a:xfrm>
+          <a:prstGeom prst="roundRect">
+            <a:avLst>
+              <a:gd name="adj" fmla="val 18947"/>
             </a:avLst>
           </a:prstGeom>
           <a:solidFill>
@@ -8113,7 +8213,7 @@
           </a:solidFill>
           <a:ln w="19050">
             <a:solidFill>
-              <a:srgbClr val="9CC6EC"/>
+              <a:srgbClr val="F2A0A8"/>
             </a:solidFill>
             <a:prstDash val="dash"/>
           </a:ln>
@@ -8135,18 +8235,18 @@
       </p:sp>
       <p:sp>
         <p:nvSpPr>
-          <p:cNvPr id="17" name="記入欄"/>
-          <p:cNvSpPr/>
-          <p:nvPr/>
-        </p:nvSpPr>
-        <p:spPr>
-          <a:xfrm>
-            <a:off x="3752850" y="2038350"/>
-            <a:ext cx="2343150" cy="971550"/>
-          </a:xfrm>
-          <a:prstGeom prst="roundRect">
-            <a:avLst>
-              <a:gd name="adj" fmla="val 17647"/>
+          <p:cNvPr id="21" name="記入欄"/>
+          <p:cNvSpPr/>
+          <p:nvPr/>
+        </p:nvSpPr>
+        <p:spPr>
+          <a:xfrm>
+            <a:off x="3752850" y="2362200"/>
+            <a:ext cx="2343150" cy="904875"/>
+          </a:xfrm>
+          <a:prstGeom prst="roundRect">
+            <a:avLst>
+              <a:gd name="adj" fmla="val 18947"/>
             </a:avLst>
           </a:prstGeom>
           <a:solidFill>
@@ -8154,7 +8254,7 @@
           </a:solidFill>
           <a:ln w="19050">
             <a:solidFill>
-              <a:srgbClr val="F5A285"/>
+              <a:srgbClr val="EDCB45"/>
             </a:solidFill>
             <a:prstDash val="dash"/>
           </a:ln>
@@ -8176,18 +8276,18 @@
       </p:sp>
       <p:sp>
         <p:nvSpPr>
-          <p:cNvPr id="18" name="記入欄"/>
-          <p:cNvSpPr/>
-          <p:nvPr/>
-        </p:nvSpPr>
-        <p:spPr>
-          <a:xfrm>
-            <a:off x="6210300" y="2038350"/>
-            <a:ext cx="2343150" cy="971550"/>
-          </a:xfrm>
-          <a:prstGeom prst="roundRect">
-            <a:avLst>
-              <a:gd name="adj" fmla="val 17647"/>
+          <p:cNvPr id="22" name="記入欄"/>
+          <p:cNvSpPr/>
+          <p:nvPr/>
+        </p:nvSpPr>
+        <p:spPr>
+          <a:xfrm>
+            <a:off x="6210300" y="2362200"/>
+            <a:ext cx="2343150" cy="904875"/>
+          </a:xfrm>
+          <a:prstGeom prst="roundRect">
+            <a:avLst>
+              <a:gd name="adj" fmla="val 18947"/>
             </a:avLst>
           </a:prstGeom>
           <a:solidFill>
@@ -8195,7 +8295,7 @@
           </a:solidFill>
           <a:ln w="19050">
             <a:solidFill>
-              <a:srgbClr val="F2A3B6"/>
+              <a:srgbClr val="A9D77F"/>
             </a:solidFill>
             <a:prstDash val="dash"/>
           </a:ln>
@@ -8217,18 +8317,18 @@
       </p:sp>
       <p:sp>
         <p:nvSpPr>
-          <p:cNvPr id="19" name="記入欄"/>
-          <p:cNvSpPr/>
-          <p:nvPr/>
-        </p:nvSpPr>
-        <p:spPr>
-          <a:xfrm>
-            <a:off x="8667750" y="2038350"/>
-            <a:ext cx="2343150" cy="971550"/>
-          </a:xfrm>
-          <a:prstGeom prst="roundRect">
-            <a:avLst>
-              <a:gd name="adj" fmla="val 17647"/>
+          <p:cNvPr id="23" name="記入欄"/>
+          <p:cNvSpPr/>
+          <p:nvPr/>
+        </p:nvSpPr>
+        <p:spPr>
+          <a:xfrm>
+            <a:off x="8667750" y="2362200"/>
+            <a:ext cx="2343150" cy="904875"/>
+          </a:xfrm>
+          <a:prstGeom prst="roundRect">
+            <a:avLst>
+              <a:gd name="adj" fmla="val 18947"/>
             </a:avLst>
           </a:prstGeom>
           <a:solidFill>
@@ -8236,7 +8336,7 @@
           </a:solidFill>
           <a:ln w="19050">
             <a:solidFill>
-              <a:srgbClr val="EBC864"/>
+              <a:srgbClr val="F5B57A"/>
             </a:solidFill>
             <a:prstDash val="dash"/>
           </a:ln>
@@ -8258,33 +8358,33 @@
       </p:sp>
       <p:sp>
         <p:nvSpPr>
-          <p:cNvPr id="20" name=""/>
-          <p:cNvSpPr/>
-          <p:nvPr/>
-        </p:nvSpPr>
-        <p:spPr>
-          <a:xfrm>
-            <a:off x="762000" y="3438525"/>
+          <p:cNvPr id="24" name=""/>
+          <p:cNvSpPr/>
+          <p:nvPr/>
+        </p:nvSpPr>
+        <p:spPr>
+          <a:xfrm>
+            <a:off x="762000" y="3648075"/>
             <a:ext cx="381000" cy="381000"/>
           </a:xfrm>
           <a:prstGeom prst="ellipse">
             <a:avLst/>
           </a:prstGeom>
           <a:solidFill>
-            <a:srgbClr val="FFE6DC"/>
-          </a:solidFill>
-          <a:ln/>
-        </p:spPr>
-      </p:sp>
-      <p:sp>
-        <p:nvSpPr>
-          <p:cNvPr id="21" name=""/>
+            <a:srgbClr val="EAF2FB"/>
+          </a:solidFill>
+          <a:ln/>
+        </p:spPr>
+      </p:sp>
+      <p:sp>
+        <p:nvSpPr>
+          <p:cNvPr id="25" name=""/>
           <p:cNvSpPr txBox="1"/>
           <p:nvPr/>
         </p:nvSpPr>
         <p:spPr>
           <a:xfrm>
-            <a:off x="723900" y="3524250"/>
+            <a:off x="723900" y="3724275"/>
             <a:ext cx="466725" cy="209550"/>
           </a:xfrm>
           <a:prstGeom prst="rect">
@@ -8301,7 +8401,7 @@
             <a:r>
               <a:rPr sz="1500" b="1">
                 <a:solidFill>
-                  <a:srgbClr val="C23B12"/>
+                  <a:srgbClr val="4B5569"/>
                 </a:solidFill>
                 <a:latin typeface="Arial"/>
                 <a:ea typeface="Arial"/>
@@ -8313,18 +8413,18 @@
       </p:sp>
       <p:sp>
         <p:nvSpPr>
-          <p:cNvPr id="22" name="記入欄"/>
-          <p:cNvSpPr/>
-          <p:nvPr/>
-        </p:nvSpPr>
-        <p:spPr>
-          <a:xfrm>
-            <a:off x="1295400" y="3143250"/>
-            <a:ext cx="2343150" cy="971550"/>
-          </a:xfrm>
-          <a:prstGeom prst="roundRect">
-            <a:avLst>
-              <a:gd name="adj" fmla="val 17647"/>
+          <p:cNvPr id="26" name="記入欄"/>
+          <p:cNvSpPr/>
+          <p:nvPr/>
+        </p:nvSpPr>
+        <p:spPr>
+          <a:xfrm>
+            <a:off x="1295400" y="3381375"/>
+            <a:ext cx="2343150" cy="904875"/>
+          </a:xfrm>
+          <a:prstGeom prst="roundRect">
+            <a:avLst>
+              <a:gd name="adj" fmla="val 18947"/>
             </a:avLst>
           </a:prstGeom>
           <a:solidFill>
@@ -8332,7 +8432,7 @@
           </a:solidFill>
           <a:ln w="19050">
             <a:solidFill>
-              <a:srgbClr val="9CC6EC"/>
+              <a:srgbClr val="F2A0A8"/>
             </a:solidFill>
             <a:prstDash val="dash"/>
           </a:ln>
@@ -8354,18 +8454,18 @@
       </p:sp>
       <p:sp>
         <p:nvSpPr>
-          <p:cNvPr id="23" name="記入欄"/>
-          <p:cNvSpPr/>
-          <p:nvPr/>
-        </p:nvSpPr>
-        <p:spPr>
-          <a:xfrm>
-            <a:off x="3752850" y="3143250"/>
-            <a:ext cx="2343150" cy="971550"/>
-          </a:xfrm>
-          <a:prstGeom prst="roundRect">
-            <a:avLst>
-              <a:gd name="adj" fmla="val 17647"/>
+          <p:cNvPr id="27" name="記入欄"/>
+          <p:cNvSpPr/>
+          <p:nvPr/>
+        </p:nvSpPr>
+        <p:spPr>
+          <a:xfrm>
+            <a:off x="3752850" y="3381375"/>
+            <a:ext cx="2343150" cy="904875"/>
+          </a:xfrm>
+          <a:prstGeom prst="roundRect">
+            <a:avLst>
+              <a:gd name="adj" fmla="val 18947"/>
             </a:avLst>
           </a:prstGeom>
           <a:solidFill>
@@ -8373,7 +8473,7 @@
           </a:solidFill>
           <a:ln w="19050">
             <a:solidFill>
-              <a:srgbClr val="F5A285"/>
+              <a:srgbClr val="EDCB45"/>
             </a:solidFill>
             <a:prstDash val="dash"/>
           </a:ln>
@@ -8395,18 +8495,18 @@
       </p:sp>
       <p:sp>
         <p:nvSpPr>
-          <p:cNvPr id="24" name="記入欄"/>
-          <p:cNvSpPr/>
-          <p:nvPr/>
-        </p:nvSpPr>
-        <p:spPr>
-          <a:xfrm>
-            <a:off x="6210300" y="3143250"/>
-            <a:ext cx="2343150" cy="971550"/>
-          </a:xfrm>
-          <a:prstGeom prst="roundRect">
-            <a:avLst>
-              <a:gd name="adj" fmla="val 17647"/>
+          <p:cNvPr id="28" name="記入欄"/>
+          <p:cNvSpPr/>
+          <p:nvPr/>
+        </p:nvSpPr>
+        <p:spPr>
+          <a:xfrm>
+            <a:off x="6210300" y="3381375"/>
+            <a:ext cx="2343150" cy="904875"/>
+          </a:xfrm>
+          <a:prstGeom prst="roundRect">
+            <a:avLst>
+              <a:gd name="adj" fmla="val 18947"/>
             </a:avLst>
           </a:prstGeom>
           <a:solidFill>
@@ -8414,7 +8514,7 @@
           </a:solidFill>
           <a:ln w="19050">
             <a:solidFill>
-              <a:srgbClr val="F2A3B6"/>
+              <a:srgbClr val="A9D77F"/>
             </a:solidFill>
             <a:prstDash val="dash"/>
           </a:ln>
@@ -8436,18 +8536,18 @@
       </p:sp>
       <p:sp>
         <p:nvSpPr>
-          <p:cNvPr id="25" name="記入欄"/>
-          <p:cNvSpPr/>
-          <p:nvPr/>
-        </p:nvSpPr>
-        <p:spPr>
-          <a:xfrm>
-            <a:off x="8667750" y="3143250"/>
-            <a:ext cx="2343150" cy="971550"/>
-          </a:xfrm>
-          <a:prstGeom prst="roundRect">
-            <a:avLst>
-              <a:gd name="adj" fmla="val 17647"/>
+          <p:cNvPr id="29" name="記入欄"/>
+          <p:cNvSpPr/>
+          <p:nvPr/>
+        </p:nvSpPr>
+        <p:spPr>
+          <a:xfrm>
+            <a:off x="8667750" y="3381375"/>
+            <a:ext cx="2343150" cy="904875"/>
+          </a:xfrm>
+          <a:prstGeom prst="roundRect">
+            <a:avLst>
+              <a:gd name="adj" fmla="val 18947"/>
             </a:avLst>
           </a:prstGeom>
           <a:solidFill>
@@ -8455,7 +8555,7 @@
           </a:solidFill>
           <a:ln w="19050">
             <a:solidFill>
-              <a:srgbClr val="EBC864"/>
+              <a:srgbClr val="F5B57A"/>
             </a:solidFill>
             <a:prstDash val="dash"/>
           </a:ln>
@@ -8477,33 +8577,33 @@
       </p:sp>
       <p:sp>
         <p:nvSpPr>
-          <p:cNvPr id="26" name=""/>
-          <p:cNvSpPr/>
-          <p:nvPr/>
-        </p:nvSpPr>
-        <p:spPr>
-          <a:xfrm>
-            <a:off x="762000" y="4543425"/>
+          <p:cNvPr id="30" name=""/>
+          <p:cNvSpPr/>
+          <p:nvPr/>
+        </p:nvSpPr>
+        <p:spPr>
+          <a:xfrm>
+            <a:off x="762000" y="4667250"/>
             <a:ext cx="381000" cy="381000"/>
           </a:xfrm>
           <a:prstGeom prst="ellipse">
             <a:avLst/>
           </a:prstGeom>
           <a:solidFill>
-            <a:srgbClr val="FFE6DC"/>
-          </a:solidFill>
-          <a:ln/>
-        </p:spPr>
-      </p:sp>
-      <p:sp>
-        <p:nvSpPr>
-          <p:cNvPr id="27" name=""/>
+            <a:srgbClr val="EAF2FB"/>
+          </a:solidFill>
+          <a:ln/>
+        </p:spPr>
+      </p:sp>
+      <p:sp>
+        <p:nvSpPr>
+          <p:cNvPr id="31" name=""/>
           <p:cNvSpPr txBox="1"/>
           <p:nvPr/>
         </p:nvSpPr>
         <p:spPr>
           <a:xfrm>
-            <a:off x="723900" y="4629150"/>
+            <a:off x="723900" y="4743450"/>
             <a:ext cx="466725" cy="209550"/>
           </a:xfrm>
           <a:prstGeom prst="rect">
@@ -8520,7 +8620,7 @@
             <a:r>
               <a:rPr sz="1500" b="1">
                 <a:solidFill>
-                  <a:srgbClr val="C23B12"/>
+                  <a:srgbClr val="4B5569"/>
                 </a:solidFill>
                 <a:latin typeface="Arial"/>
                 <a:ea typeface="Arial"/>
@@ -8532,18 +8632,18 @@
       </p:sp>
       <p:sp>
         <p:nvSpPr>
-          <p:cNvPr id="28" name="記入欄"/>
-          <p:cNvSpPr/>
-          <p:nvPr/>
-        </p:nvSpPr>
-        <p:spPr>
-          <a:xfrm>
-            <a:off x="1295400" y="4248150"/>
-            <a:ext cx="2343150" cy="971550"/>
-          </a:xfrm>
-          <a:prstGeom prst="roundRect">
-            <a:avLst>
-              <a:gd name="adj" fmla="val 17647"/>
+          <p:cNvPr id="32" name="記入欄"/>
+          <p:cNvSpPr/>
+          <p:nvPr/>
+        </p:nvSpPr>
+        <p:spPr>
+          <a:xfrm>
+            <a:off x="1295400" y="4400550"/>
+            <a:ext cx="2343150" cy="904875"/>
+          </a:xfrm>
+          <a:prstGeom prst="roundRect">
+            <a:avLst>
+              <a:gd name="adj" fmla="val 18947"/>
             </a:avLst>
           </a:prstGeom>
           <a:solidFill>
@@ -8551,7 +8651,7 @@
           </a:solidFill>
           <a:ln w="19050">
             <a:solidFill>
-              <a:srgbClr val="9CC6EC"/>
+              <a:srgbClr val="F2A0A8"/>
             </a:solidFill>
             <a:prstDash val="dash"/>
           </a:ln>
@@ -8573,18 +8673,18 @@
       </p:sp>
       <p:sp>
         <p:nvSpPr>
-          <p:cNvPr id="29" name="記入欄"/>
-          <p:cNvSpPr/>
-          <p:nvPr/>
-        </p:nvSpPr>
-        <p:spPr>
-          <a:xfrm>
-            <a:off x="3752850" y="4248150"/>
-            <a:ext cx="2343150" cy="971550"/>
-          </a:xfrm>
-          <a:prstGeom prst="roundRect">
-            <a:avLst>
-              <a:gd name="adj" fmla="val 17647"/>
+          <p:cNvPr id="33" name="記入欄"/>
+          <p:cNvSpPr/>
+          <p:nvPr/>
+        </p:nvSpPr>
+        <p:spPr>
+          <a:xfrm>
+            <a:off x="3752850" y="4400550"/>
+            <a:ext cx="2343150" cy="904875"/>
+          </a:xfrm>
+          <a:prstGeom prst="roundRect">
+            <a:avLst>
+              <a:gd name="adj" fmla="val 18947"/>
             </a:avLst>
           </a:prstGeom>
           <a:solidFill>
@@ -8592,7 +8692,7 @@
           </a:solidFill>
           <a:ln w="19050">
             <a:solidFill>
-              <a:srgbClr val="F5A285"/>
+              <a:srgbClr val="EDCB45"/>
             </a:solidFill>
             <a:prstDash val="dash"/>
           </a:ln>
@@ -8614,18 +8714,18 @@
       </p:sp>
       <p:sp>
         <p:nvSpPr>
-          <p:cNvPr id="30" name="記入欄"/>
-          <p:cNvSpPr/>
-          <p:nvPr/>
-        </p:nvSpPr>
-        <p:spPr>
-          <a:xfrm>
-            <a:off x="6210300" y="4248150"/>
-            <a:ext cx="2343150" cy="971550"/>
-          </a:xfrm>
-          <a:prstGeom prst="roundRect">
-            <a:avLst>
-              <a:gd name="adj" fmla="val 17647"/>
+          <p:cNvPr id="34" name="記入欄"/>
+          <p:cNvSpPr/>
+          <p:nvPr/>
+        </p:nvSpPr>
+        <p:spPr>
+          <a:xfrm>
+            <a:off x="6210300" y="4400550"/>
+            <a:ext cx="2343150" cy="904875"/>
+          </a:xfrm>
+          <a:prstGeom prst="roundRect">
+            <a:avLst>
+              <a:gd name="adj" fmla="val 18947"/>
             </a:avLst>
           </a:prstGeom>
           <a:solidFill>
@@ -8633,7 +8733,7 @@
           </a:solidFill>
           <a:ln w="19050">
             <a:solidFill>
-              <a:srgbClr val="F2A3B6"/>
+              <a:srgbClr val="A9D77F"/>
             </a:solidFill>
             <a:prstDash val="dash"/>
           </a:ln>
@@ -8655,18 +8755,18 @@
       </p:sp>
       <p:sp>
         <p:nvSpPr>
-          <p:cNvPr id="31" name="記入欄"/>
-          <p:cNvSpPr/>
-          <p:nvPr/>
-        </p:nvSpPr>
-        <p:spPr>
-          <a:xfrm>
-            <a:off x="8667750" y="4248150"/>
-            <a:ext cx="2343150" cy="971550"/>
-          </a:xfrm>
-          <a:prstGeom prst="roundRect">
-            <a:avLst>
-              <a:gd name="adj" fmla="val 17647"/>
+          <p:cNvPr id="35" name="記入欄"/>
+          <p:cNvSpPr/>
+          <p:nvPr/>
+        </p:nvSpPr>
+        <p:spPr>
+          <a:xfrm>
+            <a:off x="8667750" y="4400550"/>
+            <a:ext cx="2343150" cy="904875"/>
+          </a:xfrm>
+          <a:prstGeom prst="roundRect">
+            <a:avLst>
+              <a:gd name="adj" fmla="val 18947"/>
             </a:avLst>
           </a:prstGeom>
           <a:solidFill>
@@ -8674,7 +8774,7 @@
           </a:solidFill>
           <a:ln w="19050">
             <a:solidFill>
-              <a:srgbClr val="EBC864"/>
+              <a:srgbClr val="F5B57A"/>
             </a:solidFill>
             <a:prstDash val="dash"/>
           </a:ln>
@@ -8696,33 +8796,33 @@
       </p:sp>
       <p:sp>
         <p:nvSpPr>
-          <p:cNvPr id="32" name=""/>
-          <p:cNvSpPr/>
-          <p:nvPr/>
-        </p:nvSpPr>
-        <p:spPr>
-          <a:xfrm>
-            <a:off x="762000" y="5648325"/>
+          <p:cNvPr id="36" name=""/>
+          <p:cNvSpPr/>
+          <p:nvPr/>
+        </p:nvSpPr>
+        <p:spPr>
+          <a:xfrm>
+            <a:off x="762000" y="5686425"/>
             <a:ext cx="381000" cy="381000"/>
           </a:xfrm>
           <a:prstGeom prst="ellipse">
             <a:avLst/>
           </a:prstGeom>
           <a:solidFill>
-            <a:srgbClr val="FFE6DC"/>
-          </a:solidFill>
-          <a:ln/>
-        </p:spPr>
-      </p:sp>
-      <p:sp>
-        <p:nvSpPr>
-          <p:cNvPr id="33" name=""/>
+            <a:srgbClr val="EAF2FB"/>
+          </a:solidFill>
+          <a:ln/>
+        </p:spPr>
+      </p:sp>
+      <p:sp>
+        <p:nvSpPr>
+          <p:cNvPr id="37" name=""/>
           <p:cNvSpPr txBox="1"/>
           <p:nvPr/>
         </p:nvSpPr>
         <p:spPr>
           <a:xfrm>
-            <a:off x="723900" y="5734050"/>
+            <a:off x="723900" y="5762625"/>
             <a:ext cx="466725" cy="209550"/>
           </a:xfrm>
           <a:prstGeom prst="rect">
@@ -8739,7 +8839,7 @@
             <a:r>
               <a:rPr sz="1500" b="1">
                 <a:solidFill>
-                  <a:srgbClr val="C23B12"/>
+                  <a:srgbClr val="4B5569"/>
                 </a:solidFill>
                 <a:latin typeface="Arial"/>
                 <a:ea typeface="Arial"/>
@@ -8751,18 +8851,18 @@
       </p:sp>
       <p:sp>
         <p:nvSpPr>
-          <p:cNvPr id="34" name="記入欄"/>
-          <p:cNvSpPr/>
-          <p:nvPr/>
-        </p:nvSpPr>
-        <p:spPr>
-          <a:xfrm>
-            <a:off x="1295400" y="5353050"/>
-            <a:ext cx="2343150" cy="971550"/>
-          </a:xfrm>
-          <a:prstGeom prst="roundRect">
-            <a:avLst>
-              <a:gd name="adj" fmla="val 17647"/>
+          <p:cNvPr id="38" name="記入欄"/>
+          <p:cNvSpPr/>
+          <p:nvPr/>
+        </p:nvSpPr>
+        <p:spPr>
+          <a:xfrm>
+            <a:off x="1295400" y="5419725"/>
+            <a:ext cx="2343150" cy="904875"/>
+          </a:xfrm>
+          <a:prstGeom prst="roundRect">
+            <a:avLst>
+              <a:gd name="adj" fmla="val 18947"/>
             </a:avLst>
           </a:prstGeom>
           <a:solidFill>
@@ -8770,7 +8870,7 @@
           </a:solidFill>
           <a:ln w="19050">
             <a:solidFill>
-              <a:srgbClr val="9CC6EC"/>
+              <a:srgbClr val="F2A0A8"/>
             </a:solidFill>
             <a:prstDash val="dash"/>
           </a:ln>
@@ -8792,18 +8892,18 @@
       </p:sp>
       <p:sp>
         <p:nvSpPr>
-          <p:cNvPr id="35" name="記入欄"/>
-          <p:cNvSpPr/>
-          <p:nvPr/>
-        </p:nvSpPr>
-        <p:spPr>
-          <a:xfrm>
-            <a:off x="3752850" y="5353050"/>
-            <a:ext cx="2343150" cy="971550"/>
-          </a:xfrm>
-          <a:prstGeom prst="roundRect">
-            <a:avLst>
-              <a:gd name="adj" fmla="val 17647"/>
+          <p:cNvPr id="39" name="記入欄"/>
+          <p:cNvSpPr/>
+          <p:nvPr/>
+        </p:nvSpPr>
+        <p:spPr>
+          <a:xfrm>
+            <a:off x="3752850" y="5419725"/>
+            <a:ext cx="2343150" cy="904875"/>
+          </a:xfrm>
+          <a:prstGeom prst="roundRect">
+            <a:avLst>
+              <a:gd name="adj" fmla="val 18947"/>
             </a:avLst>
           </a:prstGeom>
           <a:solidFill>
@@ -8811,7 +8911,7 @@
           </a:solidFill>
           <a:ln w="19050">
             <a:solidFill>
-              <a:srgbClr val="F5A285"/>
+              <a:srgbClr val="EDCB45"/>
             </a:solidFill>
             <a:prstDash val="dash"/>
           </a:ln>
@@ -8833,18 +8933,18 @@
       </p:sp>
       <p:sp>
         <p:nvSpPr>
-          <p:cNvPr id="36" name="記入欄"/>
-          <p:cNvSpPr/>
-          <p:nvPr/>
-        </p:nvSpPr>
-        <p:spPr>
-          <a:xfrm>
-            <a:off x="6210300" y="5353050"/>
-            <a:ext cx="2343150" cy="971550"/>
-          </a:xfrm>
-          <a:prstGeom prst="roundRect">
-            <a:avLst>
-              <a:gd name="adj" fmla="val 17647"/>
+          <p:cNvPr id="40" name="記入欄"/>
+          <p:cNvSpPr/>
+          <p:nvPr/>
+        </p:nvSpPr>
+        <p:spPr>
+          <a:xfrm>
+            <a:off x="6210300" y="5419725"/>
+            <a:ext cx="2343150" cy="904875"/>
+          </a:xfrm>
+          <a:prstGeom prst="roundRect">
+            <a:avLst>
+              <a:gd name="adj" fmla="val 18947"/>
             </a:avLst>
           </a:prstGeom>
           <a:solidFill>
@@ -8852,7 +8952,7 @@
           </a:solidFill>
           <a:ln w="19050">
             <a:solidFill>
-              <a:srgbClr val="F2A3B6"/>
+              <a:srgbClr val="A9D77F"/>
             </a:solidFill>
             <a:prstDash val="dash"/>
           </a:ln>
@@ -8874,18 +8974,18 @@
       </p:sp>
       <p:sp>
         <p:nvSpPr>
-          <p:cNvPr id="37" name="記入欄"/>
-          <p:cNvSpPr/>
-          <p:nvPr/>
-        </p:nvSpPr>
-        <p:spPr>
-          <a:xfrm>
-            <a:off x="8667750" y="5353050"/>
-            <a:ext cx="2343150" cy="971550"/>
-          </a:xfrm>
-          <a:prstGeom prst="roundRect">
-            <a:avLst>
-              <a:gd name="adj" fmla="val 17647"/>
+          <p:cNvPr id="41" name="記入欄"/>
+          <p:cNvSpPr/>
+          <p:nvPr/>
+        </p:nvSpPr>
+        <p:spPr>
+          <a:xfrm>
+            <a:off x="8667750" y="5419725"/>
+            <a:ext cx="2343150" cy="904875"/>
+          </a:xfrm>
+          <a:prstGeom prst="roundRect">
+            <a:avLst>
+              <a:gd name="adj" fmla="val 18947"/>
             </a:avLst>
           </a:prstGeom>
           <a:solidFill>
@@ -8893,7 +8993,7 @@
           </a:solidFill>
           <a:ln w="19050">
             <a:solidFill>
-              <a:srgbClr val="EBC864"/>
+              <a:srgbClr val="F5B57A"/>
             </a:solidFill>
             <a:prstDash val="dash"/>
           </a:ln>
@@ -9059,16 +9159,40 @@
           </a:p>
         </p:txBody>
       </p:sp>
-      <p:sp>
-        <p:nvSpPr>
-          <p:cNvPr id="6" name=""/>
-          <p:cNvSpPr/>
-          <p:nvPr/>
-        </p:nvSpPr>
-        <p:spPr>
-          <a:xfrm>
-            <a:off x="1295400" y="1333500"/>
-            <a:ext cx="2343150" cy="571500"/>
+      <p:pic>
+        <p:nvPicPr>
+          <p:cNvPr id="6" name="Image 0" descr="黄色いバナナ">    </p:cNvPr>
+          <p:cNvPicPr>
+            <a:picLocks noChangeAspect="1"/>
+          </p:cNvPicPr>
+          <p:nvPr/>
+        </p:nvPicPr>
+        <p:blipFill>
+          <a:blip r:embed="rId1"/>
+          <a:stretch>
+            <a:fillRect/>
+          </a:stretch>
+        </p:blipFill>
+        <p:spPr>
+          <a:xfrm>
+            <a:off x="2171700" y="1295400"/>
+            <a:ext cx="590550" cy="590550"/>
+          </a:xfrm>
+          <a:prstGeom prst="rect">
+            <a:avLst/>
+          </a:prstGeom>
+        </p:spPr>
+      </p:pic>
+      <p:sp>
+        <p:nvSpPr>
+          <p:cNvPr id="7" name=""/>
+          <p:cNvSpPr/>
+          <p:nvPr/>
+        </p:nvSpPr>
+        <p:spPr>
+          <a:xfrm>
+            <a:off x="1295400" y="1943100"/>
+            <a:ext cx="2343150" cy="304800"/>
           </a:xfrm>
           <a:prstGeom prst="roundRect">
             <a:avLst>
@@ -9076,21 +9200,21 @@
             </a:avLst>
           </a:prstGeom>
           <a:solidFill>
-            <a:srgbClr val="F0521E"/>
-          </a:solidFill>
-          <a:ln/>
-        </p:spPr>
-      </p:sp>
-      <p:sp>
-        <p:nvSpPr>
-          <p:cNvPr id="7" name=""/>
+            <a:srgbClr val="FFE98A"/>
+          </a:solidFill>
+          <a:ln/>
+        </p:spPr>
+      </p:sp>
+      <p:sp>
+        <p:nvSpPr>
+          <p:cNvPr id="8" name=""/>
           <p:cNvSpPr txBox="1"/>
           <p:nvPr/>
         </p:nvSpPr>
         <p:spPr>
           <a:xfrm>
-            <a:off x="1905000" y="1457325"/>
-            <a:ext cx="1133475" cy="333375"/>
+            <a:off x="2019300" y="1981200"/>
+            <a:ext cx="904875" cy="238125"/>
           </a:xfrm>
           <a:prstGeom prst="rect">
             <a:avLst/>
@@ -9104,9 +9228,9 @@
           <a:p>
             <a:pPr algn="ctr"/>
             <a:r>
-              <a:rPr sz="1800" b="1">
+              <a:rPr sz="1300" b="1">
                 <a:solidFill>
-                  <a:srgbClr val="FFFFFF"/>
+                  <a:srgbClr val="7A5A00"/>
                 </a:solidFill>
                 <a:latin typeface="Noto Sans JP"/>
                 <a:ea typeface="Noto Sans JP"/>
@@ -9116,16 +9240,40 @@
           </a:p>
         </p:txBody>
       </p:sp>
-      <p:sp>
-        <p:nvSpPr>
-          <p:cNvPr id="8" name=""/>
-          <p:cNvSpPr/>
-          <p:nvPr/>
-        </p:nvSpPr>
-        <p:spPr>
-          <a:xfrm>
-            <a:off x="3752850" y="1333500"/>
-            <a:ext cx="2343150" cy="571500"/>
+      <p:pic>
+        <p:nvPicPr>
+          <p:cNvPr id="9" name="Image 1" descr="りんご">    </p:cNvPr>
+          <p:cNvPicPr>
+            <a:picLocks noChangeAspect="1"/>
+          </p:cNvPicPr>
+          <p:nvPr/>
+        </p:nvPicPr>
+        <p:blipFill>
+          <a:blip r:embed="rId2"/>
+          <a:stretch>
+            <a:fillRect/>
+          </a:stretch>
+        </p:blipFill>
+        <p:spPr>
+          <a:xfrm>
+            <a:off x="4629150" y="1295400"/>
+            <a:ext cx="590550" cy="590550"/>
+          </a:xfrm>
+          <a:prstGeom prst="rect">
+            <a:avLst/>
+          </a:prstGeom>
+        </p:spPr>
+      </p:pic>
+      <p:sp>
+        <p:nvSpPr>
+          <p:cNvPr id="10" name=""/>
+          <p:cNvSpPr/>
+          <p:nvPr/>
+        </p:nvSpPr>
+        <p:spPr>
+          <a:xfrm>
+            <a:off x="3752850" y="1943100"/>
+            <a:ext cx="2343150" cy="304800"/>
           </a:xfrm>
           <a:prstGeom prst="roundRect">
             <a:avLst>
@@ -9133,21 +9281,21 @@
             </a:avLst>
           </a:prstGeom>
           <a:solidFill>
-            <a:srgbClr val="D6E9FA"/>
-          </a:solidFill>
-          <a:ln/>
-        </p:spPr>
-      </p:sp>
-      <p:sp>
-        <p:nvSpPr>
-          <p:cNvPr id="9" name=""/>
+            <a:srgbClr val="FFDDE0"/>
+          </a:solidFill>
+          <a:ln/>
+        </p:spPr>
+      </p:sp>
+      <p:sp>
+        <p:nvSpPr>
+          <p:cNvPr id="11" name=""/>
           <p:cNvSpPr txBox="1"/>
           <p:nvPr/>
         </p:nvSpPr>
         <p:spPr>
           <a:xfrm>
-            <a:off x="4486275" y="1457325"/>
-            <a:ext cx="866775" cy="333375"/>
+            <a:off x="4562475" y="1981200"/>
+            <a:ext cx="714375" cy="238125"/>
           </a:xfrm>
           <a:prstGeom prst="rect">
             <a:avLst/>
@@ -9161,9 +9309,9 @@
           <a:p>
             <a:pPr algn="ctr"/>
             <a:r>
-              <a:rPr sz="1800" b="1">
+              <a:rPr sz="1300" b="1">
                 <a:solidFill>
-                  <a:srgbClr val="1F5F96"/>
+                  <a:srgbClr val="C42B3B"/>
                 </a:solidFill>
                 <a:latin typeface="Noto Sans JP"/>
                 <a:ea typeface="Noto Sans JP"/>
@@ -9173,16 +9321,40 @@
           </a:p>
         </p:txBody>
       </p:sp>
-      <p:sp>
-        <p:nvSpPr>
-          <p:cNvPr id="10" name=""/>
-          <p:cNvSpPr/>
-          <p:nvPr/>
-        </p:nvSpPr>
-        <p:spPr>
-          <a:xfrm>
-            <a:off x="6210300" y="1333500"/>
-            <a:ext cx="2343150" cy="571500"/>
+      <p:pic>
+        <p:nvPicPr>
+          <p:cNvPr id="12" name="Image 2" descr="緑のバナナ">    </p:cNvPr>
+          <p:cNvPicPr>
+            <a:picLocks noChangeAspect="1"/>
+          </p:cNvPicPr>
+          <p:nvPr/>
+        </p:nvPicPr>
+        <p:blipFill>
+          <a:blip r:embed="rId3"/>
+          <a:stretch>
+            <a:fillRect/>
+          </a:stretch>
+        </p:blipFill>
+        <p:spPr>
+          <a:xfrm>
+            <a:off x="7086600" y="1295400"/>
+            <a:ext cx="590550" cy="590550"/>
+          </a:xfrm>
+          <a:prstGeom prst="rect">
+            <a:avLst/>
+          </a:prstGeom>
+        </p:spPr>
+      </p:pic>
+      <p:sp>
+        <p:nvSpPr>
+          <p:cNvPr id="13" name=""/>
+          <p:cNvSpPr/>
+          <p:nvPr/>
+        </p:nvSpPr>
+        <p:spPr>
+          <a:xfrm>
+            <a:off x="6210300" y="1943100"/>
+            <a:ext cx="2343150" cy="304800"/>
           </a:xfrm>
           <a:prstGeom prst="roundRect">
             <a:avLst>
@@ -9190,21 +9362,21 @@
             </a:avLst>
           </a:prstGeom>
           <a:solidFill>
-            <a:srgbClr val="FFD9E2"/>
-          </a:solidFill>
-          <a:ln/>
-        </p:spPr>
-      </p:sp>
-      <p:sp>
-        <p:nvSpPr>
-          <p:cNvPr id="11" name=""/>
+            <a:srgbClr val="DDF1C6"/>
+          </a:solidFill>
+          <a:ln/>
+        </p:spPr>
+      </p:sp>
+      <p:sp>
+        <p:nvSpPr>
+          <p:cNvPr id="14" name=""/>
           <p:cNvSpPr txBox="1"/>
           <p:nvPr/>
         </p:nvSpPr>
         <p:spPr>
           <a:xfrm>
-            <a:off x="6943725" y="1457325"/>
-            <a:ext cx="866775" cy="333375"/>
+            <a:off x="7019925" y="1981200"/>
+            <a:ext cx="714375" cy="238125"/>
           </a:xfrm>
           <a:prstGeom prst="rect">
             <a:avLst/>
@@ -9218,9 +9390,9 @@
           <a:p>
             <a:pPr algn="ctr"/>
             <a:r>
-              <a:rPr sz="1800" b="1">
+              <a:rPr sz="1300" b="1">
                 <a:solidFill>
-                  <a:srgbClr val="B3304F"/>
+                  <a:srgbClr val="3D7A1A"/>
                 </a:solidFill>
                 <a:latin typeface="Noto Sans JP"/>
                 <a:ea typeface="Noto Sans JP"/>
@@ -9230,16 +9402,40 @@
           </a:p>
         </p:txBody>
       </p:sp>
-      <p:sp>
-        <p:nvSpPr>
-          <p:cNvPr id="12" name=""/>
-          <p:cNvSpPr/>
-          <p:nvPr/>
-        </p:nvSpPr>
-        <p:spPr>
-          <a:xfrm>
-            <a:off x="8667750" y="1333500"/>
-            <a:ext cx="2343150" cy="571500"/>
+      <p:pic>
+        <p:nvPicPr>
+          <p:cNvPr id="15" name="Image 3" descr="オレンジ">    </p:cNvPr>
+          <p:cNvPicPr>
+            <a:picLocks noChangeAspect="1"/>
+          </p:cNvPicPr>
+          <p:nvPr/>
+        </p:nvPicPr>
+        <p:blipFill>
+          <a:blip r:embed="rId4"/>
+          <a:stretch>
+            <a:fillRect/>
+          </a:stretch>
+        </p:blipFill>
+        <p:spPr>
+          <a:xfrm>
+            <a:off x="9544050" y="1295400"/>
+            <a:ext cx="590550" cy="590550"/>
+          </a:xfrm>
+          <a:prstGeom prst="rect">
+            <a:avLst/>
+          </a:prstGeom>
+        </p:spPr>
+      </p:pic>
+      <p:sp>
+        <p:nvSpPr>
+          <p:cNvPr id="16" name=""/>
+          <p:cNvSpPr/>
+          <p:nvPr/>
+        </p:nvSpPr>
+        <p:spPr>
+          <a:xfrm>
+            <a:off x="8667750" y="1943100"/>
+            <a:ext cx="2343150" cy="304800"/>
           </a:xfrm>
           <a:prstGeom prst="roundRect">
             <a:avLst>
@@ -9247,21 +9443,21 @@
             </a:avLst>
           </a:prstGeom>
           <a:solidFill>
-            <a:srgbClr val="FFEDB8"/>
-          </a:solidFill>
-          <a:ln/>
-        </p:spPr>
-      </p:sp>
-      <p:sp>
-        <p:nvSpPr>
-          <p:cNvPr id="13" name=""/>
+            <a:srgbClr val="FFE0C0"/>
+          </a:solidFill>
+          <a:ln/>
+        </p:spPr>
+      </p:sp>
+      <p:sp>
+        <p:nvSpPr>
+          <p:cNvPr id="17" name=""/>
           <p:cNvSpPr txBox="1"/>
           <p:nvPr/>
         </p:nvSpPr>
         <p:spPr>
           <a:xfrm>
-            <a:off x="9277350" y="1457325"/>
-            <a:ext cx="1133475" cy="333375"/>
+            <a:off x="9391650" y="1981200"/>
+            <a:ext cx="904875" cy="238125"/>
           </a:xfrm>
           <a:prstGeom prst="rect">
             <a:avLst/>
@@ -9275,9 +9471,9 @@
           <a:p>
             <a:pPr algn="ctr"/>
             <a:r>
-              <a:rPr sz="1800" b="1">
+              <a:rPr sz="1300" b="1">
                 <a:solidFill>
-                  <a:srgbClr val="8A5A00"/>
+                  <a:srgbClr val="B65300"/>
                 </a:solidFill>
                 <a:latin typeface="Noto Sans JP"/>
                 <a:ea typeface="Noto Sans JP"/>
@@ -9289,33 +9485,33 @@
       </p:sp>
       <p:sp>
         <p:nvSpPr>
-          <p:cNvPr id="14" name=""/>
-          <p:cNvSpPr/>
-          <p:nvPr/>
-        </p:nvSpPr>
-        <p:spPr>
-          <a:xfrm>
-            <a:off x="762000" y="2333625"/>
+          <p:cNvPr id="18" name=""/>
+          <p:cNvSpPr/>
+          <p:nvPr/>
+        </p:nvSpPr>
+        <p:spPr>
+          <a:xfrm>
+            <a:off x="762000" y="2628900"/>
             <a:ext cx="381000" cy="381000"/>
           </a:xfrm>
           <a:prstGeom prst="ellipse">
             <a:avLst/>
           </a:prstGeom>
           <a:solidFill>
-            <a:srgbClr val="FFE6DC"/>
-          </a:solidFill>
-          <a:ln/>
-        </p:spPr>
-      </p:sp>
-      <p:sp>
-        <p:nvSpPr>
-          <p:cNvPr id="15" name=""/>
+            <a:srgbClr val="EAF2FB"/>
+          </a:solidFill>
+          <a:ln/>
+        </p:spPr>
+      </p:sp>
+      <p:sp>
+        <p:nvSpPr>
+          <p:cNvPr id="19" name=""/>
           <p:cNvSpPr txBox="1"/>
           <p:nvPr/>
         </p:nvSpPr>
         <p:spPr>
           <a:xfrm>
-            <a:off x="723900" y="2419350"/>
+            <a:off x="723900" y="2705100"/>
             <a:ext cx="466725" cy="209550"/>
           </a:xfrm>
           <a:prstGeom prst="rect">
@@ -9332,7 +9528,7 @@
             <a:r>
               <a:rPr sz="1500" b="1">
                 <a:solidFill>
-                  <a:srgbClr val="C23B12"/>
+                  <a:srgbClr val="4B5569"/>
                 </a:solidFill>
                 <a:latin typeface="Arial"/>
                 <a:ea typeface="Arial"/>
@@ -9344,18 +9540,18 @@
       </p:sp>
       <p:sp>
         <p:nvSpPr>
-          <p:cNvPr id="16" name="記入欄"/>
-          <p:cNvSpPr/>
-          <p:nvPr/>
-        </p:nvSpPr>
-        <p:spPr>
-          <a:xfrm>
-            <a:off x="1295400" y="2038350"/>
-            <a:ext cx="2343150" cy="971550"/>
-          </a:xfrm>
-          <a:prstGeom prst="roundRect">
-            <a:avLst>
-              <a:gd name="adj" fmla="val 17647"/>
+          <p:cNvPr id="20" name="記入欄"/>
+          <p:cNvSpPr/>
+          <p:nvPr/>
+        </p:nvSpPr>
+        <p:spPr>
+          <a:xfrm>
+            <a:off x="1295400" y="2362200"/>
+            <a:ext cx="2343150" cy="904875"/>
+          </a:xfrm>
+          <a:prstGeom prst="roundRect">
+            <a:avLst>
+              <a:gd name="adj" fmla="val 18947"/>
             </a:avLst>
           </a:prstGeom>
           <a:solidFill>
@@ -9363,7 +9559,7 @@
           </a:solidFill>
           <a:ln w="19050">
             <a:solidFill>
-              <a:srgbClr val="F5A285"/>
+              <a:srgbClr val="EDCB45"/>
             </a:solidFill>
             <a:prstDash val="dash"/>
           </a:ln>
@@ -9385,18 +9581,18 @@
       </p:sp>
       <p:sp>
         <p:nvSpPr>
-          <p:cNvPr id="17" name="記入欄"/>
-          <p:cNvSpPr/>
-          <p:nvPr/>
-        </p:nvSpPr>
-        <p:spPr>
-          <a:xfrm>
-            <a:off x="3752850" y="2038350"/>
-            <a:ext cx="2343150" cy="971550"/>
-          </a:xfrm>
-          <a:prstGeom prst="roundRect">
-            <a:avLst>
-              <a:gd name="adj" fmla="val 17647"/>
+          <p:cNvPr id="21" name="記入欄"/>
+          <p:cNvSpPr/>
+          <p:nvPr/>
+        </p:nvSpPr>
+        <p:spPr>
+          <a:xfrm>
+            <a:off x="3752850" y="2362200"/>
+            <a:ext cx="2343150" cy="904875"/>
+          </a:xfrm>
+          <a:prstGeom prst="roundRect">
+            <a:avLst>
+              <a:gd name="adj" fmla="val 18947"/>
             </a:avLst>
           </a:prstGeom>
           <a:solidFill>
@@ -9404,7 +9600,7 @@
           </a:solidFill>
           <a:ln w="19050">
             <a:solidFill>
-              <a:srgbClr val="9CC6EC"/>
+              <a:srgbClr val="F2A0A8"/>
             </a:solidFill>
             <a:prstDash val="dash"/>
           </a:ln>
@@ -9426,18 +9622,18 @@
       </p:sp>
       <p:sp>
         <p:nvSpPr>
-          <p:cNvPr id="18" name="記入欄"/>
-          <p:cNvSpPr/>
-          <p:nvPr/>
-        </p:nvSpPr>
-        <p:spPr>
-          <a:xfrm>
-            <a:off x="6210300" y="2038350"/>
-            <a:ext cx="2343150" cy="971550"/>
-          </a:xfrm>
-          <a:prstGeom prst="roundRect">
-            <a:avLst>
-              <a:gd name="adj" fmla="val 17647"/>
+          <p:cNvPr id="22" name="記入欄"/>
+          <p:cNvSpPr/>
+          <p:nvPr/>
+        </p:nvSpPr>
+        <p:spPr>
+          <a:xfrm>
+            <a:off x="6210300" y="2362200"/>
+            <a:ext cx="2343150" cy="904875"/>
+          </a:xfrm>
+          <a:prstGeom prst="roundRect">
+            <a:avLst>
+              <a:gd name="adj" fmla="val 18947"/>
             </a:avLst>
           </a:prstGeom>
           <a:solidFill>
@@ -9445,7 +9641,7 @@
           </a:solidFill>
           <a:ln w="19050">
             <a:solidFill>
-              <a:srgbClr val="F2A3B6"/>
+              <a:srgbClr val="A9D77F"/>
             </a:solidFill>
             <a:prstDash val="dash"/>
           </a:ln>
@@ -9467,18 +9663,18 @@
       </p:sp>
       <p:sp>
         <p:nvSpPr>
-          <p:cNvPr id="19" name="記入欄"/>
-          <p:cNvSpPr/>
-          <p:nvPr/>
-        </p:nvSpPr>
-        <p:spPr>
-          <a:xfrm>
-            <a:off x="8667750" y="2038350"/>
-            <a:ext cx="2343150" cy="971550"/>
-          </a:xfrm>
-          <a:prstGeom prst="roundRect">
-            <a:avLst>
-              <a:gd name="adj" fmla="val 17647"/>
+          <p:cNvPr id="23" name="記入欄"/>
+          <p:cNvSpPr/>
+          <p:nvPr/>
+        </p:nvSpPr>
+        <p:spPr>
+          <a:xfrm>
+            <a:off x="8667750" y="2362200"/>
+            <a:ext cx="2343150" cy="904875"/>
+          </a:xfrm>
+          <a:prstGeom prst="roundRect">
+            <a:avLst>
+              <a:gd name="adj" fmla="val 18947"/>
             </a:avLst>
           </a:prstGeom>
           <a:solidFill>
@@ -9486,7 +9682,7 @@
           </a:solidFill>
           <a:ln w="19050">
             <a:solidFill>
-              <a:srgbClr val="EBC864"/>
+              <a:srgbClr val="F5B57A"/>
             </a:solidFill>
             <a:prstDash val="dash"/>
           </a:ln>
@@ -9508,13 +9704,13 @@
       </p:sp>
       <p:sp>
         <p:nvSpPr>
-          <p:cNvPr id="20" name=""/>
+          <p:cNvPr id="24" name=""/>
           <p:cNvSpPr txBox="1"/>
           <p:nvPr/>
         </p:nvSpPr>
         <p:spPr>
           <a:xfrm>
-            <a:off x="10972800" y="2314575"/>
+            <a:off x="10972800" y="2600325"/>
             <a:ext cx="609600" cy="419100"/>
           </a:xfrm>
           <a:prstGeom prst="rect">
@@ -9531,7 +9727,7 @@
             <a:r>
               <a:rPr sz="3000" b="1">
                 <a:solidFill>
-                  <a:srgbClr val="F0521E"/>
+                  <a:srgbClr val="1A2238"/>
                 </a:solidFill>
                 <a:latin typeface="Arial"/>
                 <a:ea typeface="Arial"/>
@@ -9543,33 +9739,33 @@
       </p:sp>
       <p:sp>
         <p:nvSpPr>
-          <p:cNvPr id="21" name=""/>
-          <p:cNvSpPr/>
-          <p:nvPr/>
-        </p:nvSpPr>
-        <p:spPr>
-          <a:xfrm>
-            <a:off x="762000" y="3438525"/>
+          <p:cNvPr id="25" name=""/>
+          <p:cNvSpPr/>
+          <p:nvPr/>
+        </p:nvSpPr>
+        <p:spPr>
+          <a:xfrm>
+            <a:off x="762000" y="3648075"/>
             <a:ext cx="381000" cy="381000"/>
           </a:xfrm>
           <a:prstGeom prst="ellipse">
             <a:avLst/>
           </a:prstGeom>
           <a:solidFill>
-            <a:srgbClr val="FFE6DC"/>
-          </a:solidFill>
-          <a:ln/>
-        </p:spPr>
-      </p:sp>
-      <p:sp>
-        <p:nvSpPr>
-          <p:cNvPr id="22" name=""/>
+            <a:srgbClr val="EAF2FB"/>
+          </a:solidFill>
+          <a:ln/>
+        </p:spPr>
+      </p:sp>
+      <p:sp>
+        <p:nvSpPr>
+          <p:cNvPr id="26" name=""/>
           <p:cNvSpPr txBox="1"/>
           <p:nvPr/>
         </p:nvSpPr>
         <p:spPr>
           <a:xfrm>
-            <a:off x="723900" y="3524250"/>
+            <a:off x="723900" y="3724275"/>
             <a:ext cx="466725" cy="209550"/>
           </a:xfrm>
           <a:prstGeom prst="rect">
@@ -9586,7 +9782,7 @@
             <a:r>
               <a:rPr sz="1500" b="1">
                 <a:solidFill>
-                  <a:srgbClr val="C23B12"/>
+                  <a:srgbClr val="4B5569"/>
                 </a:solidFill>
                 <a:latin typeface="Arial"/>
                 <a:ea typeface="Arial"/>
@@ -9598,18 +9794,18 @@
       </p:sp>
       <p:sp>
         <p:nvSpPr>
-          <p:cNvPr id="23" name="記入欄"/>
-          <p:cNvSpPr/>
-          <p:nvPr/>
-        </p:nvSpPr>
-        <p:spPr>
-          <a:xfrm>
-            <a:off x="1295400" y="3143250"/>
-            <a:ext cx="2343150" cy="971550"/>
-          </a:xfrm>
-          <a:prstGeom prst="roundRect">
-            <a:avLst>
-              <a:gd name="adj" fmla="val 17647"/>
+          <p:cNvPr id="27" name="記入欄"/>
+          <p:cNvSpPr/>
+          <p:nvPr/>
+        </p:nvSpPr>
+        <p:spPr>
+          <a:xfrm>
+            <a:off x="1295400" y="3381375"/>
+            <a:ext cx="2343150" cy="904875"/>
+          </a:xfrm>
+          <a:prstGeom prst="roundRect">
+            <a:avLst>
+              <a:gd name="adj" fmla="val 18947"/>
             </a:avLst>
           </a:prstGeom>
           <a:solidFill>
@@ -9617,7 +9813,7 @@
           </a:solidFill>
           <a:ln w="19050">
             <a:solidFill>
-              <a:srgbClr val="F5A285"/>
+              <a:srgbClr val="EDCB45"/>
             </a:solidFill>
             <a:prstDash val="dash"/>
           </a:ln>
@@ -9639,18 +9835,18 @@
       </p:sp>
       <p:sp>
         <p:nvSpPr>
-          <p:cNvPr id="24" name="記入欄"/>
-          <p:cNvSpPr/>
-          <p:nvPr/>
-        </p:nvSpPr>
-        <p:spPr>
-          <a:xfrm>
-            <a:off x="3752850" y="3143250"/>
-            <a:ext cx="2343150" cy="971550"/>
-          </a:xfrm>
-          <a:prstGeom prst="roundRect">
-            <a:avLst>
-              <a:gd name="adj" fmla="val 17647"/>
+          <p:cNvPr id="28" name="記入欄"/>
+          <p:cNvSpPr/>
+          <p:nvPr/>
+        </p:nvSpPr>
+        <p:spPr>
+          <a:xfrm>
+            <a:off x="3752850" y="3381375"/>
+            <a:ext cx="2343150" cy="904875"/>
+          </a:xfrm>
+          <a:prstGeom prst="roundRect">
+            <a:avLst>
+              <a:gd name="adj" fmla="val 18947"/>
             </a:avLst>
           </a:prstGeom>
           <a:solidFill>
@@ -9658,7 +9854,7 @@
           </a:solidFill>
           <a:ln w="19050">
             <a:solidFill>
-              <a:srgbClr val="9CC6EC"/>
+              <a:srgbClr val="F2A0A8"/>
             </a:solidFill>
             <a:prstDash val="dash"/>
           </a:ln>
@@ -9680,18 +9876,18 @@
       </p:sp>
       <p:sp>
         <p:nvSpPr>
-          <p:cNvPr id="25" name="記入欄"/>
-          <p:cNvSpPr/>
-          <p:nvPr/>
-        </p:nvSpPr>
-        <p:spPr>
-          <a:xfrm>
-            <a:off x="6210300" y="3143250"/>
-            <a:ext cx="2343150" cy="971550"/>
-          </a:xfrm>
-          <a:prstGeom prst="roundRect">
-            <a:avLst>
-              <a:gd name="adj" fmla="val 17647"/>
+          <p:cNvPr id="29" name="記入欄"/>
+          <p:cNvSpPr/>
+          <p:nvPr/>
+        </p:nvSpPr>
+        <p:spPr>
+          <a:xfrm>
+            <a:off x="6210300" y="3381375"/>
+            <a:ext cx="2343150" cy="904875"/>
+          </a:xfrm>
+          <a:prstGeom prst="roundRect">
+            <a:avLst>
+              <a:gd name="adj" fmla="val 18947"/>
             </a:avLst>
           </a:prstGeom>
           <a:solidFill>
@@ -9699,7 +9895,7 @@
           </a:solidFill>
           <a:ln w="19050">
             <a:solidFill>
-              <a:srgbClr val="F2A3B6"/>
+              <a:srgbClr val="A9D77F"/>
             </a:solidFill>
             <a:prstDash val="dash"/>
           </a:ln>
@@ -9721,18 +9917,18 @@
       </p:sp>
       <p:sp>
         <p:nvSpPr>
-          <p:cNvPr id="26" name="記入欄"/>
-          <p:cNvSpPr/>
-          <p:nvPr/>
-        </p:nvSpPr>
-        <p:spPr>
-          <a:xfrm>
-            <a:off x="8667750" y="3143250"/>
-            <a:ext cx="2343150" cy="971550"/>
-          </a:xfrm>
-          <a:prstGeom prst="roundRect">
-            <a:avLst>
-              <a:gd name="adj" fmla="val 17647"/>
+          <p:cNvPr id="30" name="記入欄"/>
+          <p:cNvSpPr/>
+          <p:nvPr/>
+        </p:nvSpPr>
+        <p:spPr>
+          <a:xfrm>
+            <a:off x="8667750" y="3381375"/>
+            <a:ext cx="2343150" cy="904875"/>
+          </a:xfrm>
+          <a:prstGeom prst="roundRect">
+            <a:avLst>
+              <a:gd name="adj" fmla="val 18947"/>
             </a:avLst>
           </a:prstGeom>
           <a:solidFill>
@@ -9740,7 +9936,7 @@
           </a:solidFill>
           <a:ln w="19050">
             <a:solidFill>
-              <a:srgbClr val="EBC864"/>
+              <a:srgbClr val="F5B57A"/>
             </a:solidFill>
             <a:prstDash val="dash"/>
           </a:ln>
@@ -9762,13 +9958,13 @@
       </p:sp>
       <p:sp>
         <p:nvSpPr>
-          <p:cNvPr id="27" name=""/>
+          <p:cNvPr id="31" name=""/>
           <p:cNvSpPr txBox="1"/>
           <p:nvPr/>
         </p:nvSpPr>
         <p:spPr>
           <a:xfrm>
-            <a:off x="10972800" y="3419475"/>
+            <a:off x="10972800" y="3619500"/>
             <a:ext cx="609600" cy="419100"/>
           </a:xfrm>
           <a:prstGeom prst="rect">
@@ -9785,7 +9981,7 @@
             <a:r>
               <a:rPr sz="3000" b="1">
                 <a:solidFill>
-                  <a:srgbClr val="F0521E"/>
+                  <a:srgbClr val="1A2238"/>
                 </a:solidFill>
                 <a:latin typeface="Arial"/>
                 <a:ea typeface="Arial"/>
@@ -9797,33 +9993,33 @@
       </p:sp>
       <p:sp>
         <p:nvSpPr>
-          <p:cNvPr id="28" name=""/>
-          <p:cNvSpPr/>
-          <p:nvPr/>
-        </p:nvSpPr>
-        <p:spPr>
-          <a:xfrm>
-            <a:off x="762000" y="4543425"/>
+          <p:cNvPr id="32" name=""/>
+          <p:cNvSpPr/>
+          <p:nvPr/>
+        </p:nvSpPr>
+        <p:spPr>
+          <a:xfrm>
+            <a:off x="762000" y="4667250"/>
             <a:ext cx="381000" cy="381000"/>
           </a:xfrm>
           <a:prstGeom prst="ellipse">
             <a:avLst/>
           </a:prstGeom>
           <a:solidFill>
-            <a:srgbClr val="FFE6DC"/>
-          </a:solidFill>
-          <a:ln/>
-        </p:spPr>
-      </p:sp>
-      <p:sp>
-        <p:nvSpPr>
-          <p:cNvPr id="29" name=""/>
+            <a:srgbClr val="EAF2FB"/>
+          </a:solidFill>
+          <a:ln/>
+        </p:spPr>
+      </p:sp>
+      <p:sp>
+        <p:nvSpPr>
+          <p:cNvPr id="33" name=""/>
           <p:cNvSpPr txBox="1"/>
           <p:nvPr/>
         </p:nvSpPr>
         <p:spPr>
           <a:xfrm>
-            <a:off x="723900" y="4629150"/>
+            <a:off x="723900" y="4743450"/>
             <a:ext cx="466725" cy="209550"/>
           </a:xfrm>
           <a:prstGeom prst="rect">
@@ -9840,7 +10036,7 @@
             <a:r>
               <a:rPr sz="1500" b="1">
                 <a:solidFill>
-                  <a:srgbClr val="C23B12"/>
+                  <a:srgbClr val="4B5569"/>
                 </a:solidFill>
                 <a:latin typeface="Arial"/>
                 <a:ea typeface="Arial"/>
@@ -9852,18 +10048,18 @@
       </p:sp>
       <p:sp>
         <p:nvSpPr>
-          <p:cNvPr id="30" name="記入欄"/>
-          <p:cNvSpPr/>
-          <p:nvPr/>
-        </p:nvSpPr>
-        <p:spPr>
-          <a:xfrm>
-            <a:off x="1295400" y="4248150"/>
-            <a:ext cx="2343150" cy="971550"/>
-          </a:xfrm>
-          <a:prstGeom prst="roundRect">
-            <a:avLst>
-              <a:gd name="adj" fmla="val 17647"/>
+          <p:cNvPr id="34" name="記入欄"/>
+          <p:cNvSpPr/>
+          <p:nvPr/>
+        </p:nvSpPr>
+        <p:spPr>
+          <a:xfrm>
+            <a:off x="1295400" y="4400550"/>
+            <a:ext cx="2343150" cy="904875"/>
+          </a:xfrm>
+          <a:prstGeom prst="roundRect">
+            <a:avLst>
+              <a:gd name="adj" fmla="val 18947"/>
             </a:avLst>
           </a:prstGeom>
           <a:solidFill>
@@ -9871,7 +10067,7 @@
           </a:solidFill>
           <a:ln w="19050">
             <a:solidFill>
-              <a:srgbClr val="F5A285"/>
+              <a:srgbClr val="EDCB45"/>
             </a:solidFill>
             <a:prstDash val="dash"/>
           </a:ln>
@@ -9893,18 +10089,18 @@
       </p:sp>
       <p:sp>
         <p:nvSpPr>
-          <p:cNvPr id="31" name="記入欄"/>
-          <p:cNvSpPr/>
-          <p:nvPr/>
-        </p:nvSpPr>
-        <p:spPr>
-          <a:xfrm>
-            <a:off x="3752850" y="4248150"/>
-            <a:ext cx="2343150" cy="971550"/>
-          </a:xfrm>
-          <a:prstGeom prst="roundRect">
-            <a:avLst>
-              <a:gd name="adj" fmla="val 17647"/>
+          <p:cNvPr id="35" name="記入欄"/>
+          <p:cNvSpPr/>
+          <p:nvPr/>
+        </p:nvSpPr>
+        <p:spPr>
+          <a:xfrm>
+            <a:off x="3752850" y="4400550"/>
+            <a:ext cx="2343150" cy="904875"/>
+          </a:xfrm>
+          <a:prstGeom prst="roundRect">
+            <a:avLst>
+              <a:gd name="adj" fmla="val 18947"/>
             </a:avLst>
           </a:prstGeom>
           <a:solidFill>
@@ -9912,7 +10108,7 @@
           </a:solidFill>
           <a:ln w="19050">
             <a:solidFill>
-              <a:srgbClr val="9CC6EC"/>
+              <a:srgbClr val="F2A0A8"/>
             </a:solidFill>
             <a:prstDash val="dash"/>
           </a:ln>
@@ -9934,18 +10130,18 @@
       </p:sp>
       <p:sp>
         <p:nvSpPr>
-          <p:cNvPr id="32" name="記入欄"/>
-          <p:cNvSpPr/>
-          <p:nvPr/>
-        </p:nvSpPr>
-        <p:spPr>
-          <a:xfrm>
-            <a:off x="6210300" y="4248150"/>
-            <a:ext cx="2343150" cy="971550"/>
-          </a:xfrm>
-          <a:prstGeom prst="roundRect">
-            <a:avLst>
-              <a:gd name="adj" fmla="val 17647"/>
+          <p:cNvPr id="36" name="記入欄"/>
+          <p:cNvSpPr/>
+          <p:nvPr/>
+        </p:nvSpPr>
+        <p:spPr>
+          <a:xfrm>
+            <a:off x="6210300" y="4400550"/>
+            <a:ext cx="2343150" cy="904875"/>
+          </a:xfrm>
+          <a:prstGeom prst="roundRect">
+            <a:avLst>
+              <a:gd name="adj" fmla="val 18947"/>
             </a:avLst>
           </a:prstGeom>
           <a:solidFill>
@@ -9953,7 +10149,7 @@
           </a:solidFill>
           <a:ln w="19050">
             <a:solidFill>
-              <a:srgbClr val="F2A3B6"/>
+              <a:srgbClr val="A9D77F"/>
             </a:solidFill>
             <a:prstDash val="dash"/>
           </a:ln>
@@ -9975,18 +10171,18 @@
       </p:sp>
       <p:sp>
         <p:nvSpPr>
-          <p:cNvPr id="33" name="記入欄"/>
-          <p:cNvSpPr/>
-          <p:nvPr/>
-        </p:nvSpPr>
-        <p:spPr>
-          <a:xfrm>
-            <a:off x="8667750" y="4248150"/>
-            <a:ext cx="2343150" cy="971550"/>
-          </a:xfrm>
-          <a:prstGeom prst="roundRect">
-            <a:avLst>
-              <a:gd name="adj" fmla="val 17647"/>
+          <p:cNvPr id="37" name="記入欄"/>
+          <p:cNvSpPr/>
+          <p:nvPr/>
+        </p:nvSpPr>
+        <p:spPr>
+          <a:xfrm>
+            <a:off x="8667750" y="4400550"/>
+            <a:ext cx="2343150" cy="904875"/>
+          </a:xfrm>
+          <a:prstGeom prst="roundRect">
+            <a:avLst>
+              <a:gd name="adj" fmla="val 18947"/>
             </a:avLst>
           </a:prstGeom>
           <a:solidFill>
@@ -9994,7 +10190,7 @@
           </a:solidFill>
           <a:ln w="19050">
             <a:solidFill>
-              <a:srgbClr val="EBC864"/>
+              <a:srgbClr val="F5B57A"/>
             </a:solidFill>
             <a:prstDash val="dash"/>
           </a:ln>
@@ -10016,13 +10212,13 @@
       </p:sp>
       <p:sp>
         <p:nvSpPr>
-          <p:cNvPr id="34" name=""/>
+          <p:cNvPr id="38" name=""/>
           <p:cNvSpPr txBox="1"/>
           <p:nvPr/>
         </p:nvSpPr>
         <p:spPr>
           <a:xfrm>
-            <a:off x="10972800" y="4524375"/>
+            <a:off x="10972800" y="4638675"/>
             <a:ext cx="609600" cy="419100"/>
           </a:xfrm>
           <a:prstGeom prst="rect">
@@ -10039,7 +10235,7 @@
             <a:r>
               <a:rPr sz="3000" b="1">
                 <a:solidFill>
-                  <a:srgbClr val="F0521E"/>
+                  <a:srgbClr val="1A2238"/>
                 </a:solidFill>
                 <a:latin typeface="Arial"/>
                 <a:ea typeface="Arial"/>
@@ -10051,33 +10247,33 @@
       </p:sp>
       <p:sp>
         <p:nvSpPr>
-          <p:cNvPr id="35" name=""/>
-          <p:cNvSpPr/>
-          <p:nvPr/>
-        </p:nvSpPr>
-        <p:spPr>
-          <a:xfrm>
-            <a:off x="762000" y="5648325"/>
+          <p:cNvPr id="39" name=""/>
+          <p:cNvSpPr/>
+          <p:nvPr/>
+        </p:nvSpPr>
+        <p:spPr>
+          <a:xfrm>
+            <a:off x="762000" y="5686425"/>
             <a:ext cx="381000" cy="381000"/>
           </a:xfrm>
           <a:prstGeom prst="ellipse">
             <a:avLst/>
           </a:prstGeom>
           <a:solidFill>
-            <a:srgbClr val="FFE6DC"/>
-          </a:solidFill>
-          <a:ln/>
-        </p:spPr>
-      </p:sp>
-      <p:sp>
-        <p:nvSpPr>
-          <p:cNvPr id="36" name=""/>
+            <a:srgbClr val="EAF2FB"/>
+          </a:solidFill>
+          <a:ln/>
+        </p:spPr>
+      </p:sp>
+      <p:sp>
+        <p:nvSpPr>
+          <p:cNvPr id="40" name=""/>
           <p:cNvSpPr txBox="1"/>
           <p:nvPr/>
         </p:nvSpPr>
         <p:spPr>
           <a:xfrm>
-            <a:off x="723900" y="5734050"/>
+            <a:off x="723900" y="5762625"/>
             <a:ext cx="466725" cy="209550"/>
           </a:xfrm>
           <a:prstGeom prst="rect">
@@ -10094,7 +10290,7 @@
             <a:r>
               <a:rPr sz="1500" b="1">
                 <a:solidFill>
-                  <a:srgbClr val="C23B12"/>
+                  <a:srgbClr val="4B5569"/>
                 </a:solidFill>
                 <a:latin typeface="Arial"/>
                 <a:ea typeface="Arial"/>
@@ -10106,18 +10302,18 @@
       </p:sp>
       <p:sp>
         <p:nvSpPr>
-          <p:cNvPr id="37" name="記入欄"/>
-          <p:cNvSpPr/>
-          <p:nvPr/>
-        </p:nvSpPr>
-        <p:spPr>
-          <a:xfrm>
-            <a:off x="1295400" y="5353050"/>
-            <a:ext cx="2343150" cy="971550"/>
-          </a:xfrm>
-          <a:prstGeom prst="roundRect">
-            <a:avLst>
-              <a:gd name="adj" fmla="val 17647"/>
+          <p:cNvPr id="41" name="記入欄"/>
+          <p:cNvSpPr/>
+          <p:nvPr/>
+        </p:nvSpPr>
+        <p:spPr>
+          <a:xfrm>
+            <a:off x="1295400" y="5419725"/>
+            <a:ext cx="2343150" cy="904875"/>
+          </a:xfrm>
+          <a:prstGeom prst="roundRect">
+            <a:avLst>
+              <a:gd name="adj" fmla="val 18947"/>
             </a:avLst>
           </a:prstGeom>
           <a:solidFill>
@@ -10125,7 +10321,7 @@
           </a:solidFill>
           <a:ln w="19050">
             <a:solidFill>
-              <a:srgbClr val="F5A285"/>
+              <a:srgbClr val="EDCB45"/>
             </a:solidFill>
             <a:prstDash val="dash"/>
           </a:ln>
@@ -10147,18 +10343,18 @@
       </p:sp>
       <p:sp>
         <p:nvSpPr>
-          <p:cNvPr id="38" name="記入欄"/>
-          <p:cNvSpPr/>
-          <p:nvPr/>
-        </p:nvSpPr>
-        <p:spPr>
-          <a:xfrm>
-            <a:off x="3752850" y="5353050"/>
-            <a:ext cx="2343150" cy="971550"/>
-          </a:xfrm>
-          <a:prstGeom prst="roundRect">
-            <a:avLst>
-              <a:gd name="adj" fmla="val 17647"/>
+          <p:cNvPr id="42" name="記入欄"/>
+          <p:cNvSpPr/>
+          <p:nvPr/>
+        </p:nvSpPr>
+        <p:spPr>
+          <a:xfrm>
+            <a:off x="3752850" y="5419725"/>
+            <a:ext cx="2343150" cy="904875"/>
+          </a:xfrm>
+          <a:prstGeom prst="roundRect">
+            <a:avLst>
+              <a:gd name="adj" fmla="val 18947"/>
             </a:avLst>
           </a:prstGeom>
           <a:solidFill>
@@ -10166,7 +10362,7 @@
           </a:solidFill>
           <a:ln w="19050">
             <a:solidFill>
-              <a:srgbClr val="9CC6EC"/>
+              <a:srgbClr val="F2A0A8"/>
             </a:solidFill>
             <a:prstDash val="dash"/>
           </a:ln>
@@ -10188,18 +10384,18 @@
       </p:sp>
       <p:sp>
         <p:nvSpPr>
-          <p:cNvPr id="39" name="記入欄"/>
-          <p:cNvSpPr/>
-          <p:nvPr/>
-        </p:nvSpPr>
-        <p:spPr>
-          <a:xfrm>
-            <a:off x="6210300" y="5353050"/>
-            <a:ext cx="2343150" cy="971550"/>
-          </a:xfrm>
-          <a:prstGeom prst="roundRect">
-            <a:avLst>
-              <a:gd name="adj" fmla="val 17647"/>
+          <p:cNvPr id="43" name="記入欄"/>
+          <p:cNvSpPr/>
+          <p:nvPr/>
+        </p:nvSpPr>
+        <p:spPr>
+          <a:xfrm>
+            <a:off x="6210300" y="5419725"/>
+            <a:ext cx="2343150" cy="904875"/>
+          </a:xfrm>
+          <a:prstGeom prst="roundRect">
+            <a:avLst>
+              <a:gd name="adj" fmla="val 18947"/>
             </a:avLst>
           </a:prstGeom>
           <a:solidFill>
@@ -10207,7 +10403,7 @@
           </a:solidFill>
           <a:ln w="19050">
             <a:solidFill>
-              <a:srgbClr val="F2A3B6"/>
+              <a:srgbClr val="A9D77F"/>
             </a:solidFill>
             <a:prstDash val="dash"/>
           </a:ln>
@@ -10229,18 +10425,18 @@
       </p:sp>
       <p:sp>
         <p:nvSpPr>
-          <p:cNvPr id="40" name="記入欄"/>
-          <p:cNvSpPr/>
-          <p:nvPr/>
-        </p:nvSpPr>
-        <p:spPr>
-          <a:xfrm>
-            <a:off x="8667750" y="5353050"/>
-            <a:ext cx="2343150" cy="971550"/>
-          </a:xfrm>
-          <a:prstGeom prst="roundRect">
-            <a:avLst>
-              <a:gd name="adj" fmla="val 17647"/>
+          <p:cNvPr id="44" name="記入欄"/>
+          <p:cNvSpPr/>
+          <p:nvPr/>
+        </p:nvSpPr>
+        <p:spPr>
+          <a:xfrm>
+            <a:off x="8667750" y="5419725"/>
+            <a:ext cx="2343150" cy="904875"/>
+          </a:xfrm>
+          <a:prstGeom prst="roundRect">
+            <a:avLst>
+              <a:gd name="adj" fmla="val 18947"/>
             </a:avLst>
           </a:prstGeom>
           <a:solidFill>
@@ -10248,7 +10444,7 @@
           </a:solidFill>
           <a:ln w="19050">
             <a:solidFill>
-              <a:srgbClr val="EBC864"/>
+              <a:srgbClr val="F5B57A"/>
             </a:solidFill>
             <a:prstDash val="dash"/>
           </a:ln>
@@ -10270,13 +10466,13 @@
       </p:sp>
       <p:sp>
         <p:nvSpPr>
-          <p:cNvPr id="41" name=""/>
+          <p:cNvPr id="45" name=""/>
           <p:cNvSpPr txBox="1"/>
           <p:nvPr/>
         </p:nvSpPr>
         <p:spPr>
           <a:xfrm>
-            <a:off x="10972800" y="5629275"/>
+            <a:off x="10972800" y="5657850"/>
             <a:ext cx="609600" cy="419100"/>
           </a:xfrm>
           <a:prstGeom prst="rect">
@@ -10293,7 +10489,7 @@
             <a:r>
               <a:rPr sz="3000" b="1">
                 <a:solidFill>
-                  <a:srgbClr val="F0521E"/>
+                  <a:srgbClr val="1A2238"/>
                 </a:solidFill>
                 <a:latin typeface="Arial"/>
                 <a:ea typeface="Arial"/>
